--- a/2025_Modelo Apresentação Senai - SA.pptx
+++ b/2025_Modelo Apresentação Senai - SA.pptx
@@ -237,7 +237,7 @@
           <a:p>
             <a:fld id="{C81E9325-8DA9-46CE-96CB-F32884D73040}" type="datetimeFigureOut">
               <a:rPr lang="pt-BR" smtClean="0"/>
-              <a:t>04/09/2025</a:t>
+              <a:t>05/09/2025</a:t>
             </a:fld>
             <a:endParaRPr lang="pt-BR"/>
           </a:p>
@@ -819,7 +819,7 @@
           <a:p>
             <a:fld id="{D811D2C6-0C19-402A-B6FC-03CA42DF813C}" type="datetimeFigureOut">
               <a:rPr lang="pt-BR" smtClean="0"/>
-              <a:t>04/09/2025</a:t>
+              <a:t>05/09/2025</a:t>
             </a:fld>
             <a:endParaRPr lang="pt-BR"/>
           </a:p>
@@ -1017,7 +1017,7 @@
           <a:p>
             <a:fld id="{D811D2C6-0C19-402A-B6FC-03CA42DF813C}" type="datetimeFigureOut">
               <a:rPr lang="pt-BR" smtClean="0"/>
-              <a:t>04/09/2025</a:t>
+              <a:t>05/09/2025</a:t>
             </a:fld>
             <a:endParaRPr lang="pt-BR"/>
           </a:p>
@@ -1225,7 +1225,7 @@
           <a:p>
             <a:fld id="{D811D2C6-0C19-402A-B6FC-03CA42DF813C}" type="datetimeFigureOut">
               <a:rPr lang="pt-BR" smtClean="0"/>
-              <a:t>04/09/2025</a:t>
+              <a:t>05/09/2025</a:t>
             </a:fld>
             <a:endParaRPr lang="pt-BR"/>
           </a:p>
@@ -1423,7 +1423,7 @@
           <a:p>
             <a:fld id="{D811D2C6-0C19-402A-B6FC-03CA42DF813C}" type="datetimeFigureOut">
               <a:rPr lang="pt-BR" smtClean="0"/>
-              <a:t>04/09/2025</a:t>
+              <a:t>05/09/2025</a:t>
             </a:fld>
             <a:endParaRPr lang="pt-BR"/>
           </a:p>
@@ -1698,7 +1698,7 @@
           <a:p>
             <a:fld id="{D811D2C6-0C19-402A-B6FC-03CA42DF813C}" type="datetimeFigureOut">
               <a:rPr lang="pt-BR" smtClean="0"/>
-              <a:t>04/09/2025</a:t>
+              <a:t>05/09/2025</a:t>
             </a:fld>
             <a:endParaRPr lang="pt-BR"/>
           </a:p>
@@ -1963,7 +1963,7 @@
           <a:p>
             <a:fld id="{D811D2C6-0C19-402A-B6FC-03CA42DF813C}" type="datetimeFigureOut">
               <a:rPr lang="pt-BR" smtClean="0"/>
-              <a:t>04/09/2025</a:t>
+              <a:t>05/09/2025</a:t>
             </a:fld>
             <a:endParaRPr lang="pt-BR"/>
           </a:p>
@@ -2375,7 +2375,7 @@
           <a:p>
             <a:fld id="{D811D2C6-0C19-402A-B6FC-03CA42DF813C}" type="datetimeFigureOut">
               <a:rPr lang="pt-BR" smtClean="0"/>
-              <a:t>04/09/2025</a:t>
+              <a:t>05/09/2025</a:t>
             </a:fld>
             <a:endParaRPr lang="pt-BR"/>
           </a:p>
@@ -2516,7 +2516,7 @@
           <a:p>
             <a:fld id="{D811D2C6-0C19-402A-B6FC-03CA42DF813C}" type="datetimeFigureOut">
               <a:rPr lang="pt-BR" smtClean="0"/>
-              <a:t>04/09/2025</a:t>
+              <a:t>05/09/2025</a:t>
             </a:fld>
             <a:endParaRPr lang="pt-BR"/>
           </a:p>
@@ -2629,7 +2629,7 @@
           <a:p>
             <a:fld id="{D811D2C6-0C19-402A-B6FC-03CA42DF813C}" type="datetimeFigureOut">
               <a:rPr lang="pt-BR" smtClean="0"/>
-              <a:t>04/09/2025</a:t>
+              <a:t>05/09/2025</a:t>
             </a:fld>
             <a:endParaRPr lang="pt-BR"/>
           </a:p>
@@ -2940,7 +2940,7 @@
           <a:p>
             <a:fld id="{D811D2C6-0C19-402A-B6FC-03CA42DF813C}" type="datetimeFigureOut">
               <a:rPr lang="pt-BR" smtClean="0"/>
-              <a:t>04/09/2025</a:t>
+              <a:t>05/09/2025</a:t>
             </a:fld>
             <a:endParaRPr lang="pt-BR"/>
           </a:p>
@@ -3228,7 +3228,7 @@
           <a:p>
             <a:fld id="{D811D2C6-0C19-402A-B6FC-03CA42DF813C}" type="datetimeFigureOut">
               <a:rPr lang="pt-BR" smtClean="0"/>
-              <a:t>04/09/2025</a:t>
+              <a:t>05/09/2025</a:t>
             </a:fld>
             <a:endParaRPr lang="pt-BR"/>
           </a:p>
@@ -3469,7 +3469,7 @@
           <a:p>
             <a:fld id="{D811D2C6-0C19-402A-B6FC-03CA42DF813C}" type="datetimeFigureOut">
               <a:rPr lang="pt-BR" smtClean="0"/>
-              <a:t>04/09/2025</a:t>
+              <a:t>05/09/2025</a:t>
             </a:fld>
             <a:endParaRPr lang="pt-BR"/>
           </a:p>
@@ -5972,7 +5972,7 @@
         <p:spPr>
           <a:xfrm>
             <a:off x="2081516" y="1920214"/>
-            <a:ext cx="8495608" cy="2554545"/>
+            <a:ext cx="8495608" cy="3170099"/>
           </a:xfrm>
           <a:prstGeom prst="rect">
             <a:avLst/>
@@ -6062,7 +6062,52 @@
                 <a:latin typeface="Verdana" panose="020B0604030504040204" pitchFamily="34" charset="0"/>
                 <a:ea typeface="Verdana" panose="020B0604030504040204" pitchFamily="34" charset="0"/>
               </a:rPr>
-              <a:t>Júlia Borges </a:t>
+              <a:t>João Paulo </a:t>
+            </a:r>
+            <a:r>
+              <a:rPr lang="pt-BR" sz="4000" b="1" dirty="0" err="1">
+                <a:ln>
+                  <a:solidFill>
+                    <a:schemeClr val="tx1"/>
+                  </a:solidFill>
+                </a:ln>
+                <a:solidFill>
+                  <a:schemeClr val="bg1"/>
+                </a:solidFill>
+                <a:latin typeface="Verdana" panose="020B0604030504040204" pitchFamily="34" charset="0"/>
+                <a:ea typeface="Verdana" panose="020B0604030504040204" pitchFamily="34" charset="0"/>
+              </a:rPr>
+              <a:t>Varaldo</a:t>
+            </a:r>
+            <a:endParaRPr lang="pt-BR" sz="4000" b="1" dirty="0">
+              <a:ln>
+                <a:solidFill>
+                  <a:schemeClr val="tx1"/>
+                </a:solidFill>
+              </a:ln>
+              <a:solidFill>
+                <a:schemeClr val="bg1"/>
+              </a:solidFill>
+              <a:latin typeface="Verdana" panose="020B0604030504040204" pitchFamily="34" charset="0"/>
+              <a:ea typeface="Verdana" panose="020B0604030504040204" pitchFamily="34" charset="0"/>
+            </a:endParaRPr>
+          </a:p>
+          <a:p>
+            <a:pPr algn="ctr"/>
+            <a:r>
+              <a:rPr lang="pt-BR" sz="4000" b="1" dirty="0">
+                <a:ln>
+                  <a:solidFill>
+                    <a:schemeClr val="tx1"/>
+                  </a:solidFill>
+                </a:ln>
+                <a:solidFill>
+                  <a:schemeClr val="bg1"/>
+                </a:solidFill>
+                <a:latin typeface="Verdana" panose="020B0604030504040204" pitchFamily="34" charset="0"/>
+                <a:ea typeface="Verdana" panose="020B0604030504040204" pitchFamily="34" charset="0"/>
+              </a:rPr>
+              <a:t>Júlia Caroline Borges </a:t>
             </a:r>
             <a:r>
               <a:rPr lang="pt-BR" sz="4000" b="1" dirty="0" err="1">
@@ -6094,36 +6139,6 @@
           </a:p>
           <a:p>
             <a:pPr algn="ctr"/>
-            <a:r>
-              <a:rPr lang="pt-BR" sz="4000" b="1" dirty="0">
-                <a:ln>
-                  <a:solidFill>
-                    <a:schemeClr val="tx1"/>
-                  </a:solidFill>
-                </a:ln>
-                <a:solidFill>
-                  <a:schemeClr val="bg1"/>
-                </a:solidFill>
-                <a:latin typeface="Verdana" panose="020B0604030504040204" pitchFamily="34" charset="0"/>
-                <a:ea typeface="Verdana" panose="020B0604030504040204" pitchFamily="34" charset="0"/>
-              </a:rPr>
-              <a:t>João Paulo </a:t>
-            </a:r>
-            <a:r>
-              <a:rPr lang="pt-BR" sz="4000" b="1" dirty="0" err="1">
-                <a:ln>
-                  <a:solidFill>
-                    <a:schemeClr val="tx1"/>
-                  </a:solidFill>
-                </a:ln>
-                <a:solidFill>
-                  <a:schemeClr val="bg1"/>
-                </a:solidFill>
-                <a:latin typeface="Verdana" panose="020B0604030504040204" pitchFamily="34" charset="0"/>
-                <a:ea typeface="Verdana" panose="020B0604030504040204" pitchFamily="34" charset="0"/>
-              </a:rPr>
-              <a:t>Varaldo</a:t>
-            </a:r>
             <a:r>
               <a:rPr lang="pt-BR" sz="4000" b="1" dirty="0">
                 <a:ln>
@@ -8251,8 +8266,8 @@
         </p:nvSpPr>
         <p:spPr>
           <a:xfrm>
-            <a:off x="615428" y="2431853"/>
-            <a:ext cx="11121284" cy="2000548"/>
+            <a:off x="132099" y="118838"/>
+            <a:ext cx="11121284" cy="1077218"/>
           </a:xfrm>
           <a:prstGeom prst="rect">
             <a:avLst/>
@@ -8291,36 +8306,54 @@
               </a:rPr>
               <a:t>Imagem do MRN</a:t>
             </a:r>
-            <a:r>
-              <a:rPr lang="pt-BR" sz="3200" dirty="0">
-                <a:latin typeface="Verdana" panose="020B0604030504040204" pitchFamily="34" charset="0"/>
-                <a:ea typeface="Verdana" panose="020B0604030504040204" pitchFamily="34" charset="0"/>
-              </a:rPr>
-              <a:t>;</a:t>
-            </a:r>
-          </a:p>
-          <a:p>
-            <a:pPr algn="ctr"/>
-            <a:r>
-              <a:rPr lang="pt-BR" sz="3200" dirty="0">
-                <a:latin typeface="Verdana" panose="020B0604030504040204" pitchFamily="34" charset="0"/>
-                <a:ea typeface="Verdana" panose="020B0604030504040204" pitchFamily="34" charset="0"/>
-              </a:rPr>
-              <a:t>Explicação sobre Ele;</a:t>
-            </a:r>
-          </a:p>
-          <a:p>
-            <a:pPr algn="ctr"/>
-            <a:r>
-              <a:rPr lang="pt-BR" sz="2800" dirty="0">
-                <a:latin typeface="Verdana" panose="020B0604030504040204" pitchFamily="34" charset="0"/>
-                <a:ea typeface="Verdana" panose="020B0604030504040204" pitchFamily="34" charset="0"/>
-              </a:rPr>
-              <a:t>(Tabelas e Campos, Relacionamento entre as tabelas)</a:t>
-            </a:r>
+            <a:endParaRPr lang="pt-BR" sz="2800" dirty="0">
+              <a:latin typeface="Verdana" panose="020B0604030504040204" pitchFamily="34" charset="0"/>
+              <a:ea typeface="Verdana" panose="020B0604030504040204" pitchFamily="34" charset="0"/>
+            </a:endParaRPr>
           </a:p>
         </p:txBody>
       </p:sp>
+      <p:pic>
+        <p:nvPicPr>
+          <p:cNvPr id="2" name="Imagem 1">
+            <a:extLst>
+              <a:ext uri="{FF2B5EF4-FFF2-40B4-BE49-F238E27FC236}">
+                <a16:creationId xmlns:a16="http://schemas.microsoft.com/office/drawing/2014/main" id="{C543C844-D844-BDED-31D7-D6B9D0AD6463}"/>
+              </a:ext>
+            </a:extLst>
+          </p:cNvPr>
+          <p:cNvPicPr>
+            <a:picLocks noChangeAspect="1"/>
+          </p:cNvPicPr>
+          <p:nvPr/>
+        </p:nvPicPr>
+        <p:blipFill>
+          <a:blip r:embed="rId7">
+            <a:extLst>
+              <a:ext uri="{28A0092B-C50C-407E-A947-70E740481C1C}">
+                <a14:useLocalDpi xmlns:a14="http://schemas.microsoft.com/office/drawing/2010/main" val="0"/>
+              </a:ext>
+            </a:extLst>
+          </a:blip>
+          <a:srcRect/>
+          <a:stretch>
+            <a:fillRect/>
+          </a:stretch>
+        </p:blipFill>
+        <p:spPr bwMode="auto">
+          <a:xfrm>
+            <a:off x="1440240" y="1192443"/>
+            <a:ext cx="8505002" cy="4825666"/>
+          </a:xfrm>
+          <a:prstGeom prst="rect">
+            <a:avLst/>
+          </a:prstGeom>
+          <a:noFill/>
+          <a:ln>
+            <a:noFill/>
+          </a:ln>
+        </p:spPr>
+      </p:pic>
     </p:spTree>
     <p:extLst>
       <p:ext uri="{BB962C8B-B14F-4D97-AF65-F5344CB8AC3E}">
@@ -8649,8 +8682,8 @@
         </p:nvSpPr>
         <p:spPr>
           <a:xfrm>
-            <a:off x="615428" y="2431853"/>
-            <a:ext cx="11121284" cy="1569660"/>
+            <a:off x="535358" y="-24941"/>
+            <a:ext cx="11121284" cy="1077218"/>
           </a:xfrm>
           <a:prstGeom prst="rect">
             <a:avLst/>
@@ -8689,26 +8722,43 @@
               </a:rPr>
               <a:t>Imagem</a:t>
             </a:r>
-            <a:r>
-              <a:rPr lang="pt-BR" sz="3200" dirty="0">
-                <a:latin typeface="Verdana" panose="020B0604030504040204" pitchFamily="34" charset="0"/>
-                <a:ea typeface="Verdana" panose="020B0604030504040204" pitchFamily="34" charset="0"/>
-              </a:rPr>
-              <a:t>;</a:t>
-            </a:r>
-          </a:p>
-          <a:p>
-            <a:pPr algn="ctr"/>
-            <a:r>
-              <a:rPr lang="pt-BR" sz="3200" dirty="0">
-                <a:latin typeface="Verdana" panose="020B0604030504040204" pitchFamily="34" charset="0"/>
-                <a:ea typeface="Verdana" panose="020B0604030504040204" pitchFamily="34" charset="0"/>
-              </a:rPr>
-              <a:t>Explicação sobre Ele;</a:t>
-            </a:r>
+            <a:endParaRPr lang="pt-BR" sz="3200" dirty="0">
+              <a:latin typeface="Verdana" panose="020B0604030504040204" pitchFamily="34" charset="0"/>
+              <a:ea typeface="Verdana" panose="020B0604030504040204" pitchFamily="34" charset="0"/>
+            </a:endParaRPr>
           </a:p>
         </p:txBody>
       </p:sp>
+      <p:pic>
+        <p:nvPicPr>
+          <p:cNvPr id="6" name="Imagem 5">
+            <a:extLst>
+              <a:ext uri="{FF2B5EF4-FFF2-40B4-BE49-F238E27FC236}">
+                <a16:creationId xmlns:a16="http://schemas.microsoft.com/office/drawing/2014/main" id="{EB20F1C3-3890-D726-D372-BF0DB68B2F69}"/>
+              </a:ext>
+            </a:extLst>
+          </p:cNvPr>
+          <p:cNvPicPr>
+            <a:picLocks noChangeAspect="1"/>
+          </p:cNvPicPr>
+          <p:nvPr/>
+        </p:nvPicPr>
+        <p:blipFill>
+          <a:blip r:embed="rId7"/>
+          <a:stretch>
+            <a:fillRect/>
+          </a:stretch>
+        </p:blipFill>
+        <p:spPr>
+          <a:xfrm>
+            <a:off x="3619500" y="1052277"/>
+            <a:ext cx="5524500" cy="5397639"/>
+          </a:xfrm>
+          <a:prstGeom prst="rect">
+            <a:avLst/>
+          </a:prstGeom>
+        </p:spPr>
+      </p:pic>
     </p:spTree>
     <p:extLst>
       <p:ext uri="{BB962C8B-B14F-4D97-AF65-F5344CB8AC3E}">
@@ -9037,8 +9087,8 @@
         </p:nvSpPr>
         <p:spPr>
           <a:xfrm>
-            <a:off x="615428" y="1877856"/>
-            <a:ext cx="11121284" cy="2554545"/>
+            <a:off x="478160" y="0"/>
+            <a:ext cx="11121284" cy="1077218"/>
           </a:xfrm>
           <a:prstGeom prst="rect">
             <a:avLst/>
@@ -9089,46 +9139,313 @@
               </a:rPr>
               <a:t>Imagem</a:t>
             </a:r>
-            <a:r>
-              <a:rPr lang="pt-BR" sz="3200" dirty="0">
-                <a:latin typeface="Verdana" panose="020B0604030504040204" pitchFamily="34" charset="0"/>
-                <a:ea typeface="Verdana" panose="020B0604030504040204" pitchFamily="34" charset="0"/>
-              </a:rPr>
-              <a:t>;</a:t>
-            </a:r>
-          </a:p>
-          <a:p>
-            <a:pPr algn="ctr"/>
             <a:endParaRPr lang="pt-BR" sz="3200" dirty="0">
               <a:latin typeface="Verdana" panose="020B0604030504040204" pitchFamily="34" charset="0"/>
               <a:ea typeface="Verdana" panose="020B0604030504040204" pitchFamily="34" charset="0"/>
             </a:endParaRPr>
           </a:p>
-          <a:p>
-            <a:pPr marL="457200" indent="-457200">
-              <a:buFont typeface="Wingdings" panose="05000000000000000000" pitchFamily="2" charset="2"/>
-              <a:buChar char="Ø"/>
-            </a:pPr>
-            <a:r>
-              <a:rPr lang="pt-BR" sz="3200" dirty="0">
-                <a:latin typeface="Verdana" panose="020B0604030504040204" pitchFamily="34" charset="0"/>
-                <a:ea typeface="Verdana" panose="020B0604030504040204" pitchFamily="34" charset="0"/>
-              </a:rPr>
-              <a:t>Explicação sobre o que é ?</a:t>
-            </a:r>
-          </a:p>
-          <a:p>
-            <a:pPr marL="457200" indent="-457200">
-              <a:buFont typeface="Wingdings" panose="05000000000000000000" pitchFamily="2" charset="2"/>
-              <a:buChar char="Ø"/>
-            </a:pPr>
-            <a:r>
-              <a:rPr lang="pt-BR" sz="3200" dirty="0">
-                <a:latin typeface="Verdana" panose="020B0604030504040204" pitchFamily="34" charset="0"/>
-                <a:ea typeface="Verdana" panose="020B0604030504040204" pitchFamily="34" charset="0"/>
-              </a:rPr>
-              <a:t>Explicação da navegabilidade entre as telas;</a:t>
-            </a:r>
+        </p:txBody>
+      </p:sp>
+      <p:pic>
+        <p:nvPicPr>
+          <p:cNvPr id="6" name="Imagem 5">
+            <a:extLst>
+              <a:ext uri="{FF2B5EF4-FFF2-40B4-BE49-F238E27FC236}">
+                <a16:creationId xmlns:a16="http://schemas.microsoft.com/office/drawing/2014/main" id="{99049B36-B0B8-2BF6-56CA-C902B40CB24E}"/>
+              </a:ext>
+            </a:extLst>
+          </p:cNvPr>
+          <p:cNvPicPr>
+            <a:picLocks noChangeAspect="1"/>
+          </p:cNvPicPr>
+          <p:nvPr/>
+        </p:nvPicPr>
+        <p:blipFill>
+          <a:blip r:embed="rId7"/>
+          <a:stretch>
+            <a:fillRect/>
+          </a:stretch>
+        </p:blipFill>
+        <p:spPr>
+          <a:xfrm>
+            <a:off x="740380" y="759888"/>
+            <a:ext cx="2376893" cy="2334599"/>
+          </a:xfrm>
+          <a:prstGeom prst="rect">
+            <a:avLst/>
+          </a:prstGeom>
+        </p:spPr>
+      </p:pic>
+      <p:sp>
+        <p:nvSpPr>
+          <p:cNvPr id="16" name="Seta: para Baixo 15">
+            <a:extLst>
+              <a:ext uri="{FF2B5EF4-FFF2-40B4-BE49-F238E27FC236}">
+                <a16:creationId xmlns:a16="http://schemas.microsoft.com/office/drawing/2014/main" id="{33653C01-D0E9-CB21-5E5B-E3E92B036803}"/>
+              </a:ext>
+            </a:extLst>
+          </p:cNvPr>
+          <p:cNvSpPr/>
+          <p:nvPr/>
+        </p:nvSpPr>
+        <p:spPr>
+          <a:xfrm rot="16200000">
+            <a:off x="3505699" y="1734172"/>
+            <a:ext cx="720437" cy="479987"/>
+          </a:xfrm>
+          <a:prstGeom prst="downArrow">
+            <a:avLst/>
+          </a:prstGeom>
+        </p:spPr>
+        <p:style>
+          <a:lnRef idx="2">
+            <a:schemeClr val="accent1">
+              <a:shade val="15000"/>
+            </a:schemeClr>
+          </a:lnRef>
+          <a:fillRef idx="1">
+            <a:schemeClr val="accent1"/>
+          </a:fillRef>
+          <a:effectRef idx="0">
+            <a:schemeClr val="accent1"/>
+          </a:effectRef>
+          <a:fontRef idx="minor">
+            <a:schemeClr val="lt1"/>
+          </a:fontRef>
+        </p:style>
+        <p:txBody>
+          <a:bodyPr rtlCol="0" anchor="ctr"/>
+          <a:lstStyle/>
+          <a:p>
+            <a:pPr algn="ctr"/>
+            <a:endParaRPr lang="pt-BR"/>
+          </a:p>
+        </p:txBody>
+      </p:sp>
+      <p:pic>
+        <p:nvPicPr>
+          <p:cNvPr id="18" name="Imagem 17">
+            <a:extLst>
+              <a:ext uri="{FF2B5EF4-FFF2-40B4-BE49-F238E27FC236}">
+                <a16:creationId xmlns:a16="http://schemas.microsoft.com/office/drawing/2014/main" id="{5D4D68F3-4A55-C368-D8A3-DA4C5CDBE3AE}"/>
+              </a:ext>
+            </a:extLst>
+          </p:cNvPr>
+          <p:cNvPicPr>
+            <a:picLocks noChangeAspect="1"/>
+          </p:cNvPicPr>
+          <p:nvPr/>
+        </p:nvPicPr>
+        <p:blipFill>
+          <a:blip r:embed="rId8"/>
+          <a:stretch>
+            <a:fillRect/>
+          </a:stretch>
+        </p:blipFill>
+        <p:spPr>
+          <a:xfrm>
+            <a:off x="4105911" y="1060445"/>
+            <a:ext cx="4712185" cy="2151967"/>
+          </a:xfrm>
+          <a:prstGeom prst="rect">
+            <a:avLst/>
+          </a:prstGeom>
+        </p:spPr>
+      </p:pic>
+      <p:sp>
+        <p:nvSpPr>
+          <p:cNvPr id="19" name="CaixaDeTexto 18">
+            <a:extLst>
+              <a:ext uri="{FF2B5EF4-FFF2-40B4-BE49-F238E27FC236}">
+                <a16:creationId xmlns:a16="http://schemas.microsoft.com/office/drawing/2014/main" id="{F5EFC4A3-92C5-9029-4002-13DC61649BB7}"/>
+              </a:ext>
+            </a:extLst>
+          </p:cNvPr>
+          <p:cNvSpPr txBox="1"/>
+          <p:nvPr/>
+        </p:nvSpPr>
+        <p:spPr>
+          <a:xfrm>
+            <a:off x="817418" y="453618"/>
+            <a:ext cx="2299855" cy="369332"/>
+          </a:xfrm>
+          <a:prstGeom prst="rect">
+            <a:avLst/>
+          </a:prstGeom>
+          <a:noFill/>
+        </p:spPr>
+        <p:txBody>
+          <a:bodyPr wrap="square" rtlCol="0">
+            <a:spAutoFit/>
+          </a:bodyPr>
+          <a:lstStyle/>
+          <a:p>
+            <a:r>
+              <a:rPr lang="pt-BR" dirty="0"/>
+              <a:t>Tela de login</a:t>
+            </a:r>
+          </a:p>
+        </p:txBody>
+      </p:sp>
+      <p:pic>
+        <p:nvPicPr>
+          <p:cNvPr id="21" name="Imagem 20">
+            <a:extLst>
+              <a:ext uri="{FF2B5EF4-FFF2-40B4-BE49-F238E27FC236}">
+                <a16:creationId xmlns:a16="http://schemas.microsoft.com/office/drawing/2014/main" id="{14FD6BC9-BA16-CFC1-13B2-000666878A63}"/>
+              </a:ext>
+            </a:extLst>
+          </p:cNvPr>
+          <p:cNvPicPr>
+            <a:picLocks noChangeAspect="1"/>
+          </p:cNvPicPr>
+          <p:nvPr/>
+        </p:nvPicPr>
+        <p:blipFill>
+          <a:blip r:embed="rId9"/>
+          <a:stretch>
+            <a:fillRect/>
+          </a:stretch>
+        </p:blipFill>
+        <p:spPr>
+          <a:xfrm>
+            <a:off x="7478652" y="3393205"/>
+            <a:ext cx="4712185" cy="2078392"/>
+          </a:xfrm>
+          <a:prstGeom prst="rect">
+            <a:avLst/>
+          </a:prstGeom>
+        </p:spPr>
+      </p:pic>
+      <p:sp>
+        <p:nvSpPr>
+          <p:cNvPr id="22" name="Seta: para Baixo 21">
+            <a:extLst>
+              <a:ext uri="{FF2B5EF4-FFF2-40B4-BE49-F238E27FC236}">
+                <a16:creationId xmlns:a16="http://schemas.microsoft.com/office/drawing/2014/main" id="{7223E0E0-2A52-20EF-7C9D-1EF8592F7492}"/>
+              </a:ext>
+            </a:extLst>
+          </p:cNvPr>
+          <p:cNvSpPr/>
+          <p:nvPr/>
+        </p:nvSpPr>
+        <p:spPr>
+          <a:xfrm rot="5400000">
+            <a:off x="3034195" y="1734172"/>
+            <a:ext cx="720437" cy="479987"/>
+          </a:xfrm>
+          <a:prstGeom prst="downArrow">
+            <a:avLst/>
+          </a:prstGeom>
+        </p:spPr>
+        <p:style>
+          <a:lnRef idx="2">
+            <a:schemeClr val="accent1">
+              <a:shade val="15000"/>
+            </a:schemeClr>
+          </a:lnRef>
+          <a:fillRef idx="1">
+            <a:schemeClr val="accent1"/>
+          </a:fillRef>
+          <a:effectRef idx="0">
+            <a:schemeClr val="accent1"/>
+          </a:effectRef>
+          <a:fontRef idx="minor">
+            <a:schemeClr val="lt1"/>
+          </a:fontRef>
+        </p:style>
+        <p:txBody>
+          <a:bodyPr rtlCol="0" anchor="ctr"/>
+          <a:lstStyle/>
+          <a:p>
+            <a:pPr algn="ctr"/>
+            <a:endParaRPr lang="pt-BR"/>
+          </a:p>
+        </p:txBody>
+      </p:sp>
+      <p:sp>
+        <p:nvSpPr>
+          <p:cNvPr id="23" name="Seta: Dobrada 22">
+            <a:extLst>
+              <a:ext uri="{FF2B5EF4-FFF2-40B4-BE49-F238E27FC236}">
+                <a16:creationId xmlns:a16="http://schemas.microsoft.com/office/drawing/2014/main" id="{CC3F1E97-D2B9-2506-E42F-C24E470841AF}"/>
+              </a:ext>
+            </a:extLst>
+          </p:cNvPr>
+          <p:cNvSpPr/>
+          <p:nvPr/>
+        </p:nvSpPr>
+        <p:spPr>
+          <a:xfrm rot="5400000">
+            <a:off x="8572181" y="2243874"/>
+            <a:ext cx="1357745" cy="871431"/>
+          </a:xfrm>
+          <a:prstGeom prst="bentArrow">
+            <a:avLst/>
+          </a:prstGeom>
+        </p:spPr>
+        <p:style>
+          <a:lnRef idx="2">
+            <a:schemeClr val="accent1">
+              <a:shade val="15000"/>
+            </a:schemeClr>
+          </a:lnRef>
+          <a:fillRef idx="1">
+            <a:schemeClr val="accent1"/>
+          </a:fillRef>
+          <a:effectRef idx="0">
+            <a:schemeClr val="accent1"/>
+          </a:effectRef>
+          <a:fontRef idx="minor">
+            <a:schemeClr val="lt1"/>
+          </a:fontRef>
+        </p:style>
+        <p:txBody>
+          <a:bodyPr rtlCol="0" anchor="ctr"/>
+          <a:lstStyle/>
+          <a:p>
+            <a:pPr algn="ctr"/>
+            <a:endParaRPr lang="pt-BR">
+              <a:solidFill>
+                <a:schemeClr val="tx1"/>
+              </a:solidFill>
+            </a:endParaRPr>
+          </a:p>
+        </p:txBody>
+      </p:sp>
+      <p:sp>
+        <p:nvSpPr>
+          <p:cNvPr id="24" name="CaixaDeTexto 23">
+            <a:extLst>
+              <a:ext uri="{FF2B5EF4-FFF2-40B4-BE49-F238E27FC236}">
+                <a16:creationId xmlns:a16="http://schemas.microsoft.com/office/drawing/2014/main" id="{CD7E6A42-441A-439B-2704-81018AB89AF0}"/>
+              </a:ext>
+            </a:extLst>
+          </p:cNvPr>
+          <p:cNvSpPr txBox="1"/>
+          <p:nvPr/>
+        </p:nvSpPr>
+        <p:spPr>
+          <a:xfrm>
+            <a:off x="2221671" y="3429000"/>
+            <a:ext cx="3029202" cy="369332"/>
+          </a:xfrm>
+          <a:prstGeom prst="rect">
+            <a:avLst/>
+          </a:prstGeom>
+          <a:noFill/>
+        </p:spPr>
+        <p:txBody>
+          <a:bodyPr wrap="square" rtlCol="0">
+            <a:spAutoFit/>
+          </a:bodyPr>
+          <a:lstStyle/>
+          <a:p>
+            <a:r>
+              <a:rPr lang="pt-BR"/>
+              <a:t>Tela principal</a:t>
+            </a:r>
+            <a:endParaRPr lang="pt-BR" dirty="0"/>
           </a:p>
         </p:txBody>
       </p:sp>
@@ -10147,15 +10464,6 @@
 </file>
 
 <file path=customXml/item1.xml><?xml version="1.0" encoding="utf-8"?>
-<?mso-contentType ?>
-<FormTemplates xmlns="http://schemas.microsoft.com/sharepoint/v3/contenttype/forms">
-  <Display>DocumentLibraryForm</Display>
-  <Edit>DocumentLibraryForm</Edit>
-  <New>DocumentLibraryForm</New>
-</FormTemplates>
-</file>
-
-<file path=customXml/item2.xml><?xml version="1.0" encoding="utf-8"?>
 <ct:contentTypeSchema xmlns:ct="http://schemas.microsoft.com/office/2006/metadata/contentType" xmlns:ma="http://schemas.microsoft.com/office/2006/metadata/properties/metaAttributes" ct:_="" ma:_="" ma:contentTypeName="Documento" ma:contentTypeID="0x0101003014CAD5C0D95047AD87A6CEF9A0ED6F" ma:contentTypeVersion="11" ma:contentTypeDescription="Crie um novo documento." ma:contentTypeScope="" ma:versionID="0eaeb304f0019e33f865282dd94b7faa">
   <xsd:schema xmlns:xsd="http://www.w3.org/2001/XMLSchema" xmlns:xs="http://www.w3.org/2001/XMLSchema" xmlns:p="http://schemas.microsoft.com/office/2006/metadata/properties" xmlns:ns2="230e2427-5d80-4bd2-a9ba-53805cfde8a4" xmlns:ns3="cf5f2b4c-ceff-48b8-acfd-b6c7cb4e26ae" targetNamespace="http://schemas.microsoft.com/office/2006/metadata/properties" ma:root="true" ma:fieldsID="9583cfaf6218e9ef312e531a09f9933a" ns2:_="" ns3:_="">
     <xsd:import namespace="230e2427-5d80-4bd2-a9ba-53805cfde8a4"/>
@@ -10366,6 +10674,15 @@
 </ct:contentTypeSchema>
 </file>
 
+<file path=customXml/item2.xml><?xml version="1.0" encoding="utf-8"?>
+<?mso-contentType ?>
+<FormTemplates xmlns="http://schemas.microsoft.com/sharepoint/v3/contenttype/forms">
+  <Display>DocumentLibraryForm</Display>
+  <Edit>DocumentLibraryForm</Edit>
+  <New>DocumentLibraryForm</New>
+</FormTemplates>
+</file>
+
 <file path=customXml/item3.xml><?xml version="1.0" encoding="utf-8"?>
 <p:properties xmlns:p="http://schemas.microsoft.com/office/2006/metadata/properties" xmlns:xsi="http://www.w3.org/2001/XMLSchema-instance" xmlns:pc="http://schemas.microsoft.com/office/infopath/2007/PartnerControls">
   <documentManagement>
@@ -10385,14 +10702,6 @@
 </file>
 
 <file path=customXml/itemProps1.xml><?xml version="1.0" encoding="utf-8"?>
-<ds:datastoreItem xmlns:ds="http://schemas.openxmlformats.org/officeDocument/2006/customXml" ds:itemID="{954C6406-39F0-4F36-B3D7-F12E598C1962}">
-  <ds:schemaRefs>
-    <ds:schemaRef ds:uri="http://schemas.microsoft.com/sharepoint/v3/contenttype/forms"/>
-  </ds:schemaRefs>
-</ds:datastoreItem>
-</file>
-
-<file path=customXml/itemProps2.xml><?xml version="1.0" encoding="utf-8"?>
 <ds:datastoreItem xmlns:ds="http://schemas.openxmlformats.org/officeDocument/2006/customXml" ds:itemID="{CDCD03E9-41C4-42C6-A5E8-47AC9D6E1F65}">
   <ds:schemaRefs>
     <ds:schemaRef ds:uri="http://schemas.microsoft.com/office/2006/metadata/contentType"/>
@@ -10411,6 +10720,14 @@
 </ds:datastoreItem>
 </file>
 
+<file path=customXml/itemProps2.xml><?xml version="1.0" encoding="utf-8"?>
+<ds:datastoreItem xmlns:ds="http://schemas.openxmlformats.org/officeDocument/2006/customXml" ds:itemID="{954C6406-39F0-4F36-B3D7-F12E598C1962}">
+  <ds:schemaRefs>
+    <ds:schemaRef ds:uri="http://schemas.microsoft.com/sharepoint/v3/contenttype/forms"/>
+  </ds:schemaRefs>
+</ds:datastoreItem>
+</file>
+
 <file path=customXml/itemProps3.xml><?xml version="1.0" encoding="utf-8"?>
 <ds:datastoreItem xmlns:ds="http://schemas.openxmlformats.org/officeDocument/2006/customXml" ds:itemID="{925A2D76-B89D-43D9-81CC-F73DB603259F}">
   <ds:schemaRefs>

--- a/2025_Modelo Apresentação Senai - SA.pptx
+++ b/2025_Modelo Apresentação Senai - SA.pptx
@@ -5,43 +5,41 @@
     <p:sldMasterId id="2147483648" r:id="rId4"/>
   </p:sldMasterIdLst>
   <p:notesMasterIdLst>
-    <p:notesMasterId r:id="rId17"/>
+    <p:notesMasterId r:id="rId15"/>
   </p:notesMasterIdLst>
   <p:sldIdLst>
     <p:sldId id="256" r:id="rId5"/>
     <p:sldId id="561" r:id="rId6"/>
-    <p:sldId id="316" r:id="rId7"/>
-    <p:sldId id="551" r:id="rId8"/>
-    <p:sldId id="562" r:id="rId9"/>
-    <p:sldId id="552" r:id="rId10"/>
-    <p:sldId id="557" r:id="rId11"/>
-    <p:sldId id="558" r:id="rId12"/>
-    <p:sldId id="554" r:id="rId13"/>
-    <p:sldId id="559" r:id="rId14"/>
-    <p:sldId id="560" r:id="rId15"/>
-    <p:sldId id="548" r:id="rId16"/>
+    <p:sldId id="562" r:id="rId7"/>
+    <p:sldId id="552" r:id="rId8"/>
+    <p:sldId id="557" r:id="rId9"/>
+    <p:sldId id="558" r:id="rId10"/>
+    <p:sldId id="554" r:id="rId11"/>
+    <p:sldId id="559" r:id="rId12"/>
+    <p:sldId id="560" r:id="rId13"/>
+    <p:sldId id="548" r:id="rId14"/>
   </p:sldIdLst>
   <p:sldSz cx="12192000" cy="6858000"/>
   <p:notesSz cx="6858000" cy="9144000"/>
   <p:embeddedFontLst>
     <p:embeddedFont>
       <p:font typeface="Aharoni" panose="02010803020104030203" pitchFamily="2" charset="-79"/>
+      <p:bold r:id="rId16"/>
+    </p:embeddedFont>
+    <p:embeddedFont>
+      <p:font typeface="Arial Black" panose="020B0A04020102020204" pitchFamily="34" charset="0"/>
+      <p:bold r:id="rId17"/>
+    </p:embeddedFont>
+    <p:embeddedFont>
+      <p:font typeface="Branding Black" panose="00000A00000000000000" charset="0"/>
       <p:bold r:id="rId18"/>
     </p:embeddedFont>
     <p:embeddedFont>
-      <p:font typeface="Arial Black" panose="020B0A04020102020204" pitchFamily="34" charset="0"/>
-      <p:bold r:id="rId19"/>
-    </p:embeddedFont>
-    <p:embeddedFont>
-      <p:font typeface="Branding Black" panose="00000A00000000000000" charset="0"/>
+      <p:font typeface="Verdana" panose="020B0604030504040204" pitchFamily="34" charset="0"/>
+      <p:regular r:id="rId19"/>
       <p:bold r:id="rId20"/>
-    </p:embeddedFont>
-    <p:embeddedFont>
-      <p:font typeface="Verdana" panose="020B0604030504040204" pitchFamily="34" charset="0"/>
-      <p:regular r:id="rId21"/>
-      <p:bold r:id="rId22"/>
-      <p:italic r:id="rId23"/>
-      <p:boldItalic r:id="rId24"/>
+      <p:italic r:id="rId21"/>
+      <p:boldItalic r:id="rId22"/>
     </p:embeddedFont>
   </p:embeddedFontLst>
   <p:defaultTextStyle>
@@ -237,7 +235,7 @@
           <a:p>
             <a:fld id="{C81E9325-8DA9-46CE-96CB-F32884D73040}" type="datetimeFigureOut">
               <a:rPr lang="pt-BR" smtClean="0"/>
-              <a:t>05/09/2025</a:t>
+              <a:t>08/09/2025</a:t>
             </a:fld>
             <a:endParaRPr lang="pt-BR"/>
           </a:p>
@@ -819,7 +817,7 @@
           <a:p>
             <a:fld id="{D811D2C6-0C19-402A-B6FC-03CA42DF813C}" type="datetimeFigureOut">
               <a:rPr lang="pt-BR" smtClean="0"/>
-              <a:t>05/09/2025</a:t>
+              <a:t>08/09/2025</a:t>
             </a:fld>
             <a:endParaRPr lang="pt-BR"/>
           </a:p>
@@ -1017,7 +1015,7 @@
           <a:p>
             <a:fld id="{D811D2C6-0C19-402A-B6FC-03CA42DF813C}" type="datetimeFigureOut">
               <a:rPr lang="pt-BR" smtClean="0"/>
-              <a:t>05/09/2025</a:t>
+              <a:t>08/09/2025</a:t>
             </a:fld>
             <a:endParaRPr lang="pt-BR"/>
           </a:p>
@@ -1225,7 +1223,7 @@
           <a:p>
             <a:fld id="{D811D2C6-0C19-402A-B6FC-03CA42DF813C}" type="datetimeFigureOut">
               <a:rPr lang="pt-BR" smtClean="0"/>
-              <a:t>05/09/2025</a:t>
+              <a:t>08/09/2025</a:t>
             </a:fld>
             <a:endParaRPr lang="pt-BR"/>
           </a:p>
@@ -1423,7 +1421,7 @@
           <a:p>
             <a:fld id="{D811D2C6-0C19-402A-B6FC-03CA42DF813C}" type="datetimeFigureOut">
               <a:rPr lang="pt-BR" smtClean="0"/>
-              <a:t>05/09/2025</a:t>
+              <a:t>08/09/2025</a:t>
             </a:fld>
             <a:endParaRPr lang="pt-BR"/>
           </a:p>
@@ -1698,7 +1696,7 @@
           <a:p>
             <a:fld id="{D811D2C6-0C19-402A-B6FC-03CA42DF813C}" type="datetimeFigureOut">
               <a:rPr lang="pt-BR" smtClean="0"/>
-              <a:t>05/09/2025</a:t>
+              <a:t>08/09/2025</a:t>
             </a:fld>
             <a:endParaRPr lang="pt-BR"/>
           </a:p>
@@ -1963,7 +1961,7 @@
           <a:p>
             <a:fld id="{D811D2C6-0C19-402A-B6FC-03CA42DF813C}" type="datetimeFigureOut">
               <a:rPr lang="pt-BR" smtClean="0"/>
-              <a:t>05/09/2025</a:t>
+              <a:t>08/09/2025</a:t>
             </a:fld>
             <a:endParaRPr lang="pt-BR"/>
           </a:p>
@@ -2375,7 +2373,7 @@
           <a:p>
             <a:fld id="{D811D2C6-0C19-402A-B6FC-03CA42DF813C}" type="datetimeFigureOut">
               <a:rPr lang="pt-BR" smtClean="0"/>
-              <a:t>05/09/2025</a:t>
+              <a:t>08/09/2025</a:t>
             </a:fld>
             <a:endParaRPr lang="pt-BR"/>
           </a:p>
@@ -2516,7 +2514,7 @@
           <a:p>
             <a:fld id="{D811D2C6-0C19-402A-B6FC-03CA42DF813C}" type="datetimeFigureOut">
               <a:rPr lang="pt-BR" smtClean="0"/>
-              <a:t>05/09/2025</a:t>
+              <a:t>08/09/2025</a:t>
             </a:fld>
             <a:endParaRPr lang="pt-BR"/>
           </a:p>
@@ -2629,7 +2627,7 @@
           <a:p>
             <a:fld id="{D811D2C6-0C19-402A-B6FC-03CA42DF813C}" type="datetimeFigureOut">
               <a:rPr lang="pt-BR" smtClean="0"/>
-              <a:t>05/09/2025</a:t>
+              <a:t>08/09/2025</a:t>
             </a:fld>
             <a:endParaRPr lang="pt-BR"/>
           </a:p>
@@ -2940,7 +2938,7 @@
           <a:p>
             <a:fld id="{D811D2C6-0C19-402A-B6FC-03CA42DF813C}" type="datetimeFigureOut">
               <a:rPr lang="pt-BR" smtClean="0"/>
-              <a:t>05/09/2025</a:t>
+              <a:t>08/09/2025</a:t>
             </a:fld>
             <a:endParaRPr lang="pt-BR"/>
           </a:p>
@@ -3228,7 +3226,7 @@
           <a:p>
             <a:fld id="{D811D2C6-0C19-402A-B6FC-03CA42DF813C}" type="datetimeFigureOut">
               <a:rPr lang="pt-BR" smtClean="0"/>
-              <a:t>05/09/2025</a:t>
+              <a:t>08/09/2025</a:t>
             </a:fld>
             <a:endParaRPr lang="pt-BR"/>
           </a:p>
@@ -3469,7 +3467,7 @@
           <a:p>
             <a:fld id="{D811D2C6-0C19-402A-B6FC-03CA42DF813C}" type="datetimeFigureOut">
               <a:rPr lang="pt-BR" smtClean="0"/>
-              <a:t>05/09/2025</a:t>
+              <a:t>08/09/2025</a:t>
             </a:fld>
             <a:endParaRPr lang="pt-BR"/>
           </a:p>
@@ -4672,774 +4670,6 @@
             </a:extLst>
           </p:cNvPr>
           <p:cNvPicPr>
-            <a:picLocks noGrp="1" noRot="1" noChangeAspect="1" noMove="1" noResize="1" noEditPoints="1" noAdjustHandles="1" noChangeArrowheads="1" noChangeShapeType="1" noCrop="1"/>
-          </p:cNvPicPr>
-          <p:nvPr/>
-        </p:nvPicPr>
-        <p:blipFill>
-          <a:blip r:embed="rId2">
-            <a:extLst>
-              <a:ext uri="{96DAC541-7B7A-43D3-8B79-37D633B846F1}">
-                <asvg:svgBlip xmlns:asvg="http://schemas.microsoft.com/office/drawing/2016/SVG/main" r:embed="rId3"/>
-              </a:ext>
-            </a:extLst>
-          </a:blip>
-          <a:stretch>
-            <a:fillRect/>
-          </a:stretch>
-        </p:blipFill>
-        <p:spPr>
-          <a:xfrm>
-            <a:off x="11304109" y="345653"/>
-            <a:ext cx="590670" cy="414236"/>
-          </a:xfrm>
-          <a:prstGeom prst="rect">
-            <a:avLst/>
-          </a:prstGeom>
-        </p:spPr>
-      </p:pic>
-      <p:sp>
-        <p:nvSpPr>
-          <p:cNvPr id="9" name="CaixaDeTexto 8">
-            <a:extLst>
-              <a:ext uri="{FF2B5EF4-FFF2-40B4-BE49-F238E27FC236}">
-                <a16:creationId xmlns:a16="http://schemas.microsoft.com/office/drawing/2014/main" id="{C3FF65A0-369C-D42D-38F3-4267C6F783A8}"/>
-              </a:ext>
-            </a:extLst>
-          </p:cNvPr>
-          <p:cNvSpPr txBox="1"/>
-          <p:nvPr/>
-        </p:nvSpPr>
-        <p:spPr>
-          <a:xfrm>
-            <a:off x="169412" y="6436585"/>
-            <a:ext cx="3456512" cy="307777"/>
-          </a:xfrm>
-          <a:prstGeom prst="rect">
-            <a:avLst/>
-          </a:prstGeom>
-          <a:noFill/>
-        </p:spPr>
-        <p:txBody>
-          <a:bodyPr wrap="square" rtlCol="0">
-            <a:spAutoFit/>
-          </a:bodyPr>
-          <a:lstStyle/>
-          <a:p>
-            <a:pPr algn="just"/>
-            <a:r>
-              <a:rPr lang="pt-BR" sz="1400" b="1" dirty="0">
-                <a:solidFill>
-                  <a:srgbClr val="005CA8"/>
-                </a:solidFill>
-                <a:latin typeface="Branding Black" panose="00000A00000000000000" pitchFamily="50" charset="0"/>
-              </a:rPr>
-              <a:t>Prof.s3rgio@gmail.com</a:t>
-            </a:r>
-          </a:p>
-        </p:txBody>
-      </p:sp>
-      <p:grpSp>
-        <p:nvGrpSpPr>
-          <p:cNvPr id="12" name="Agrupar 11">
-            <a:extLst>
-              <a:ext uri="{FF2B5EF4-FFF2-40B4-BE49-F238E27FC236}">
-                <a16:creationId xmlns:a16="http://schemas.microsoft.com/office/drawing/2014/main" id="{CC5EF651-2DA5-0E70-EFF7-9488FEEFB47A}"/>
-              </a:ext>
-            </a:extLst>
-          </p:cNvPr>
-          <p:cNvGrpSpPr>
-            <a:grpSpLocks noGrp="1" noUngrp="1" noRot="1" noMove="1" noResize="1"/>
-          </p:cNvGrpSpPr>
-          <p:nvPr/>
-        </p:nvGrpSpPr>
-        <p:grpSpPr>
-          <a:xfrm>
-            <a:off x="6096000" y="5838415"/>
-            <a:ext cx="6096000" cy="1143000"/>
-            <a:chOff x="6096000" y="5838415"/>
-            <a:chExt cx="6096000" cy="1143000"/>
-          </a:xfrm>
-        </p:grpSpPr>
-        <p:sp>
-          <p:nvSpPr>
-            <p:cNvPr id="7" name="Retângulo 6">
-              <a:extLst>
-                <a:ext uri="{FF2B5EF4-FFF2-40B4-BE49-F238E27FC236}">
-                  <a16:creationId xmlns:a16="http://schemas.microsoft.com/office/drawing/2014/main" id="{728628C8-8C44-0CBC-DF6C-CEC9E1371D2D}"/>
-                </a:ext>
-              </a:extLst>
-            </p:cNvPr>
-            <p:cNvSpPr>
-              <a:spLocks noGrp="1" noRot="1" noMove="1" noResize="1" noEditPoints="1" noAdjustHandles="1" noChangeArrowheads="1" noChangeShapeType="1"/>
-            </p:cNvSpPr>
-            <p:nvPr/>
-          </p:nvSpPr>
-          <p:spPr>
-            <a:xfrm>
-              <a:off x="6096000" y="6675368"/>
-              <a:ext cx="6096000" cy="182632"/>
-            </a:xfrm>
-            <a:prstGeom prst="rect">
-              <a:avLst/>
-            </a:prstGeom>
-            <a:solidFill>
-              <a:srgbClr val="005CA8"/>
-            </a:solidFill>
-            <a:ln>
-              <a:noFill/>
-            </a:ln>
-          </p:spPr>
-          <p:style>
-            <a:lnRef idx="2">
-              <a:schemeClr val="accent1">
-                <a:shade val="50000"/>
-              </a:schemeClr>
-            </a:lnRef>
-            <a:fillRef idx="1">
-              <a:schemeClr val="accent1"/>
-            </a:fillRef>
-            <a:effectRef idx="0">
-              <a:schemeClr val="accent1"/>
-            </a:effectRef>
-            <a:fontRef idx="minor">
-              <a:schemeClr val="lt1"/>
-            </a:fontRef>
-          </p:style>
-          <p:txBody>
-            <a:bodyPr rtlCol="0" anchor="ctr"/>
-            <a:lstStyle/>
-            <a:p>
-              <a:pPr algn="ctr"/>
-              <a:endParaRPr lang="pt-BR">
-                <a:solidFill>
-                  <a:srgbClr val="14143C"/>
-                </a:solidFill>
-              </a:endParaRPr>
-            </a:p>
-          </p:txBody>
-        </p:sp>
-        <p:pic>
-          <p:nvPicPr>
-            <p:cNvPr id="2050" name="Picture 2" descr="FIESC">
-              <a:extLst>
-                <a:ext uri="{FF2B5EF4-FFF2-40B4-BE49-F238E27FC236}">
-                  <a16:creationId xmlns:a16="http://schemas.microsoft.com/office/drawing/2014/main" id="{1A67935A-584C-E520-7BC5-40CB572B176A}"/>
-                </a:ext>
-              </a:extLst>
-            </p:cNvPr>
-            <p:cNvPicPr>
-              <a:picLocks noGrp="1" noRot="1" noChangeAspect="1" noMove="1" noResize="1" noEditPoints="1" noAdjustHandles="1" noChangeArrowheads="1" noChangeShapeType="1" noCrop="1"/>
-            </p:cNvPicPr>
-            <p:nvPr/>
-          </p:nvPicPr>
-          <p:blipFill>
-            <a:blip r:embed="rId4">
-              <a:extLst>
-                <a:ext uri="{28A0092B-C50C-407E-A947-70E740481C1C}">
-                  <a14:useLocalDpi xmlns:a14="http://schemas.microsoft.com/office/drawing/2010/main" val="0"/>
-                </a:ext>
-              </a:extLst>
-            </a:blip>
-            <a:srcRect/>
-            <a:stretch>
-              <a:fillRect/>
-            </a:stretch>
-          </p:blipFill>
-          <p:spPr bwMode="auto">
-            <a:xfrm>
-              <a:off x="9888988" y="5838415"/>
-              <a:ext cx="2133600" cy="1143000"/>
-            </a:xfrm>
-            <a:prstGeom prst="rect">
-              <a:avLst/>
-            </a:prstGeom>
-            <a:noFill/>
-            <a:extLst>
-              <a:ext uri="{909E8E84-426E-40DD-AFC4-6F175D3DCCD1}">
-                <a14:hiddenFill xmlns:a14="http://schemas.microsoft.com/office/drawing/2010/main">
-                  <a:solidFill>
-                    <a:srgbClr val="FFFFFF"/>
-                  </a:solidFill>
-                </a14:hiddenFill>
-              </a:ext>
-            </a:extLst>
-          </p:spPr>
-        </p:pic>
-        <p:sp>
-          <p:nvSpPr>
-            <p:cNvPr id="11" name="CaixaDeTexto 10">
-              <a:extLst>
-                <a:ext uri="{FF2B5EF4-FFF2-40B4-BE49-F238E27FC236}">
-                  <a16:creationId xmlns:a16="http://schemas.microsoft.com/office/drawing/2014/main" id="{1936E23A-FA9B-49C2-6A13-B4C678B63766}"/>
-                </a:ext>
-              </a:extLst>
-            </p:cNvPr>
-            <p:cNvSpPr txBox="1">
-              <a:spLocks noGrp="1" noRot="1" noMove="1" noResize="1" noEditPoints="1" noAdjustHandles="1" noChangeArrowheads="1" noChangeShapeType="1"/>
-            </p:cNvSpPr>
-            <p:nvPr/>
-          </p:nvSpPr>
-          <p:spPr>
-            <a:xfrm>
-              <a:off x="10167827" y="6628184"/>
-              <a:ext cx="1575921" cy="276999"/>
-            </a:xfrm>
-            <a:prstGeom prst="rect">
-              <a:avLst/>
-            </a:prstGeom>
-            <a:noFill/>
-          </p:spPr>
-          <p:txBody>
-            <a:bodyPr wrap="square" rtlCol="0">
-              <a:spAutoFit/>
-            </a:bodyPr>
-            <a:lstStyle/>
-            <a:p>
-              <a:r>
-                <a:rPr lang="pt-BR" sz="1200" b="1" i="1" dirty="0">
-                  <a:solidFill>
-                    <a:schemeClr val="bg1"/>
-                  </a:solidFill>
-                  <a:latin typeface="Aharoni" panose="02010803020104030203" pitchFamily="2" charset="-79"/>
-                  <a:cs typeface="Aharoni" panose="02010803020104030203" pitchFamily="2" charset="-79"/>
-                </a:rPr>
-                <a:t>SESI – SENAI - IEL</a:t>
-              </a:r>
-            </a:p>
-          </p:txBody>
-        </p:sp>
-      </p:grpSp>
-      <p:pic>
-        <p:nvPicPr>
-          <p:cNvPr id="4" name="Gráfico 3">
-            <a:extLst>
-              <a:ext uri="{FF2B5EF4-FFF2-40B4-BE49-F238E27FC236}">
-                <a16:creationId xmlns:a16="http://schemas.microsoft.com/office/drawing/2014/main" id="{13C881EA-D14C-496A-470D-88F74C42C6B0}"/>
-              </a:ext>
-            </a:extLst>
-          </p:cNvPr>
-          <p:cNvPicPr>
-            <a:picLocks noGrp="1" noRot="1" noChangeAspect="1" noMove="1" noResize="1" noEditPoints="1" noAdjustHandles="1" noChangeArrowheads="1" noChangeShapeType="1" noCrop="1"/>
-          </p:cNvPicPr>
-          <p:nvPr/>
-        </p:nvPicPr>
-        <p:blipFill>
-          <a:blip r:embed="rId5">
-            <a:extLst>
-              <a:ext uri="{96DAC541-7B7A-43D3-8B79-37D633B846F1}">
-                <asvg:svgBlip xmlns:asvg="http://schemas.microsoft.com/office/drawing/2016/SVG/main" r:embed="rId6"/>
-              </a:ext>
-            </a:extLst>
-          </a:blip>
-          <a:stretch>
-            <a:fillRect/>
-          </a:stretch>
-        </p:blipFill>
-        <p:spPr>
-          <a:xfrm>
-            <a:off x="1163" y="187683"/>
-            <a:ext cx="614265" cy="4244718"/>
-          </a:xfrm>
-          <a:prstGeom prst="rect">
-            <a:avLst/>
-          </a:prstGeom>
-        </p:spPr>
-      </p:pic>
-      <p:sp>
-        <p:nvSpPr>
-          <p:cNvPr id="2" name="CaixaDeTexto 1">
-            <a:extLst>
-              <a:ext uri="{FF2B5EF4-FFF2-40B4-BE49-F238E27FC236}">
-                <a16:creationId xmlns:a16="http://schemas.microsoft.com/office/drawing/2014/main" id="{C8510107-E3C6-DF5A-475A-F560311510F8}"/>
-              </a:ext>
-            </a:extLst>
-          </p:cNvPr>
-          <p:cNvSpPr txBox="1"/>
-          <p:nvPr/>
-        </p:nvSpPr>
-        <p:spPr>
-          <a:xfrm>
-            <a:off x="615428" y="3136612"/>
-            <a:ext cx="11121284" cy="584775"/>
-          </a:xfrm>
-          <a:prstGeom prst="rect">
-            <a:avLst/>
-          </a:prstGeom>
-          <a:noFill/>
-        </p:spPr>
-        <p:txBody>
-          <a:bodyPr wrap="square" rtlCol="0">
-            <a:spAutoFit/>
-          </a:bodyPr>
-          <a:lstStyle/>
-          <a:p>
-            <a:pPr algn="ctr"/>
-            <a:r>
-              <a:rPr lang="pt-BR" sz="3200" b="1" dirty="0">
-                <a:ln>
-                  <a:solidFill>
-                    <a:sysClr val="windowText" lastClr="000000"/>
-                  </a:solidFill>
-                </a:ln>
-                <a:solidFill>
-                  <a:srgbClr val="FF0000"/>
-                </a:solidFill>
-                <a:latin typeface="Verdana" panose="020B0604030504040204" pitchFamily="34" charset="0"/>
-                <a:ea typeface="Verdana" panose="020B0604030504040204" pitchFamily="34" charset="0"/>
-              </a:rPr>
-              <a:t>CONCLUSAO</a:t>
-            </a:r>
-          </a:p>
-        </p:txBody>
-      </p:sp>
-    </p:spTree>
-    <p:extLst>
-      <p:ext uri="{BB962C8B-B14F-4D97-AF65-F5344CB8AC3E}">
-        <p14:creationId xmlns:p14="http://schemas.microsoft.com/office/powerpoint/2010/main" val="436553731"/>
-      </p:ext>
-    </p:extLst>
-  </p:cSld>
-  <p:clrMapOvr>
-    <a:masterClrMapping/>
-  </p:clrMapOvr>
-</p:sld>
-</file>
-
-<file path=ppt/slides/slide11.xml><?xml version="1.0" encoding="utf-8"?>
-<p:sld xmlns:a="http://schemas.openxmlformats.org/drawingml/2006/main" xmlns:r="http://schemas.openxmlformats.org/officeDocument/2006/relationships" xmlns:p="http://schemas.openxmlformats.org/presentationml/2006/main">
-  <p:cSld>
-    <p:spTree>
-      <p:nvGrpSpPr>
-        <p:cNvPr id="1" name=""/>
-        <p:cNvGrpSpPr/>
-        <p:nvPr/>
-      </p:nvGrpSpPr>
-      <p:grpSpPr>
-        <a:xfrm>
-          <a:off x="0" y="0"/>
-          <a:ext cx="0" cy="0"/>
-          <a:chOff x="0" y="0"/>
-          <a:chExt cx="0" cy="0"/>
-        </a:xfrm>
-      </p:grpSpPr>
-      <p:pic>
-        <p:nvPicPr>
-          <p:cNvPr id="3" name="Gráfico 2">
-            <a:extLst>
-              <a:ext uri="{FF2B5EF4-FFF2-40B4-BE49-F238E27FC236}">
-                <a16:creationId xmlns:a16="http://schemas.microsoft.com/office/drawing/2014/main" id="{12EA250C-B730-2CEB-9B63-8093001D4F43}"/>
-              </a:ext>
-            </a:extLst>
-          </p:cNvPr>
-          <p:cNvPicPr>
-            <a:picLocks noGrp="1" noRot="1" noChangeAspect="1" noMove="1" noResize="1" noEditPoints="1" noAdjustHandles="1" noChangeArrowheads="1" noChangeShapeType="1" noCrop="1"/>
-          </p:cNvPicPr>
-          <p:nvPr/>
-        </p:nvPicPr>
-        <p:blipFill>
-          <a:blip r:embed="rId2">
-            <a:extLst>
-              <a:ext uri="{96DAC541-7B7A-43D3-8B79-37D633B846F1}">
-                <asvg:svgBlip xmlns:asvg="http://schemas.microsoft.com/office/drawing/2016/SVG/main" r:embed="rId3"/>
-              </a:ext>
-            </a:extLst>
-          </a:blip>
-          <a:stretch>
-            <a:fillRect/>
-          </a:stretch>
-        </p:blipFill>
-        <p:spPr>
-          <a:xfrm>
-            <a:off x="11304109" y="345653"/>
-            <a:ext cx="590670" cy="414236"/>
-          </a:xfrm>
-          <a:prstGeom prst="rect">
-            <a:avLst/>
-          </a:prstGeom>
-        </p:spPr>
-      </p:pic>
-      <p:sp>
-        <p:nvSpPr>
-          <p:cNvPr id="9" name="CaixaDeTexto 8">
-            <a:extLst>
-              <a:ext uri="{FF2B5EF4-FFF2-40B4-BE49-F238E27FC236}">
-                <a16:creationId xmlns:a16="http://schemas.microsoft.com/office/drawing/2014/main" id="{C3FF65A0-369C-D42D-38F3-4267C6F783A8}"/>
-              </a:ext>
-            </a:extLst>
-          </p:cNvPr>
-          <p:cNvSpPr txBox="1"/>
-          <p:nvPr/>
-        </p:nvSpPr>
-        <p:spPr>
-          <a:xfrm>
-            <a:off x="169412" y="6436585"/>
-            <a:ext cx="3456512" cy="307777"/>
-          </a:xfrm>
-          <a:prstGeom prst="rect">
-            <a:avLst/>
-          </a:prstGeom>
-          <a:noFill/>
-        </p:spPr>
-        <p:txBody>
-          <a:bodyPr wrap="square" rtlCol="0">
-            <a:spAutoFit/>
-          </a:bodyPr>
-          <a:lstStyle/>
-          <a:p>
-            <a:pPr algn="just"/>
-            <a:r>
-              <a:rPr lang="pt-BR" sz="1400" b="1" dirty="0">
-                <a:solidFill>
-                  <a:srgbClr val="005CA8"/>
-                </a:solidFill>
-                <a:latin typeface="Branding Black" panose="00000A00000000000000" pitchFamily="50" charset="0"/>
-              </a:rPr>
-              <a:t>Prof.s3rgio@gmail.com</a:t>
-            </a:r>
-          </a:p>
-        </p:txBody>
-      </p:sp>
-      <p:grpSp>
-        <p:nvGrpSpPr>
-          <p:cNvPr id="12" name="Agrupar 11">
-            <a:extLst>
-              <a:ext uri="{FF2B5EF4-FFF2-40B4-BE49-F238E27FC236}">
-                <a16:creationId xmlns:a16="http://schemas.microsoft.com/office/drawing/2014/main" id="{CC5EF651-2DA5-0E70-EFF7-9488FEEFB47A}"/>
-              </a:ext>
-            </a:extLst>
-          </p:cNvPr>
-          <p:cNvGrpSpPr>
-            <a:grpSpLocks noGrp="1" noUngrp="1" noRot="1" noMove="1" noResize="1"/>
-          </p:cNvGrpSpPr>
-          <p:nvPr/>
-        </p:nvGrpSpPr>
-        <p:grpSpPr>
-          <a:xfrm>
-            <a:off x="6096000" y="5838415"/>
-            <a:ext cx="6096000" cy="1143000"/>
-            <a:chOff x="6096000" y="5838415"/>
-            <a:chExt cx="6096000" cy="1143000"/>
-          </a:xfrm>
-        </p:grpSpPr>
-        <p:sp>
-          <p:nvSpPr>
-            <p:cNvPr id="7" name="Retângulo 6">
-              <a:extLst>
-                <a:ext uri="{FF2B5EF4-FFF2-40B4-BE49-F238E27FC236}">
-                  <a16:creationId xmlns:a16="http://schemas.microsoft.com/office/drawing/2014/main" id="{728628C8-8C44-0CBC-DF6C-CEC9E1371D2D}"/>
-                </a:ext>
-              </a:extLst>
-            </p:cNvPr>
-            <p:cNvSpPr>
-              <a:spLocks noGrp="1" noRot="1" noMove="1" noResize="1" noEditPoints="1" noAdjustHandles="1" noChangeArrowheads="1" noChangeShapeType="1"/>
-            </p:cNvSpPr>
-            <p:nvPr/>
-          </p:nvSpPr>
-          <p:spPr>
-            <a:xfrm>
-              <a:off x="6096000" y="6675368"/>
-              <a:ext cx="6096000" cy="182632"/>
-            </a:xfrm>
-            <a:prstGeom prst="rect">
-              <a:avLst/>
-            </a:prstGeom>
-            <a:solidFill>
-              <a:srgbClr val="005CA8"/>
-            </a:solidFill>
-            <a:ln>
-              <a:noFill/>
-            </a:ln>
-          </p:spPr>
-          <p:style>
-            <a:lnRef idx="2">
-              <a:schemeClr val="accent1">
-                <a:shade val="50000"/>
-              </a:schemeClr>
-            </a:lnRef>
-            <a:fillRef idx="1">
-              <a:schemeClr val="accent1"/>
-            </a:fillRef>
-            <a:effectRef idx="0">
-              <a:schemeClr val="accent1"/>
-            </a:effectRef>
-            <a:fontRef idx="minor">
-              <a:schemeClr val="lt1"/>
-            </a:fontRef>
-          </p:style>
-          <p:txBody>
-            <a:bodyPr rtlCol="0" anchor="ctr"/>
-            <a:lstStyle/>
-            <a:p>
-              <a:pPr algn="ctr"/>
-              <a:endParaRPr lang="pt-BR">
-                <a:solidFill>
-                  <a:srgbClr val="14143C"/>
-                </a:solidFill>
-              </a:endParaRPr>
-            </a:p>
-          </p:txBody>
-        </p:sp>
-        <p:pic>
-          <p:nvPicPr>
-            <p:cNvPr id="2050" name="Picture 2" descr="FIESC">
-              <a:extLst>
-                <a:ext uri="{FF2B5EF4-FFF2-40B4-BE49-F238E27FC236}">
-                  <a16:creationId xmlns:a16="http://schemas.microsoft.com/office/drawing/2014/main" id="{1A67935A-584C-E520-7BC5-40CB572B176A}"/>
-                </a:ext>
-              </a:extLst>
-            </p:cNvPr>
-            <p:cNvPicPr>
-              <a:picLocks noGrp="1" noRot="1" noChangeAspect="1" noMove="1" noResize="1" noEditPoints="1" noAdjustHandles="1" noChangeArrowheads="1" noChangeShapeType="1" noCrop="1"/>
-            </p:cNvPicPr>
-            <p:nvPr/>
-          </p:nvPicPr>
-          <p:blipFill>
-            <a:blip r:embed="rId4">
-              <a:extLst>
-                <a:ext uri="{28A0092B-C50C-407E-A947-70E740481C1C}">
-                  <a14:useLocalDpi xmlns:a14="http://schemas.microsoft.com/office/drawing/2010/main" val="0"/>
-                </a:ext>
-              </a:extLst>
-            </a:blip>
-            <a:srcRect/>
-            <a:stretch>
-              <a:fillRect/>
-            </a:stretch>
-          </p:blipFill>
-          <p:spPr bwMode="auto">
-            <a:xfrm>
-              <a:off x="9888988" y="5838415"/>
-              <a:ext cx="2133600" cy="1143000"/>
-            </a:xfrm>
-            <a:prstGeom prst="rect">
-              <a:avLst/>
-            </a:prstGeom>
-            <a:noFill/>
-            <a:extLst>
-              <a:ext uri="{909E8E84-426E-40DD-AFC4-6F175D3DCCD1}">
-                <a14:hiddenFill xmlns:a14="http://schemas.microsoft.com/office/drawing/2010/main">
-                  <a:solidFill>
-                    <a:srgbClr val="FFFFFF"/>
-                  </a:solidFill>
-                </a14:hiddenFill>
-              </a:ext>
-            </a:extLst>
-          </p:spPr>
-        </p:pic>
-        <p:sp>
-          <p:nvSpPr>
-            <p:cNvPr id="11" name="CaixaDeTexto 10">
-              <a:extLst>
-                <a:ext uri="{FF2B5EF4-FFF2-40B4-BE49-F238E27FC236}">
-                  <a16:creationId xmlns:a16="http://schemas.microsoft.com/office/drawing/2014/main" id="{1936E23A-FA9B-49C2-6A13-B4C678B63766}"/>
-                </a:ext>
-              </a:extLst>
-            </p:cNvPr>
-            <p:cNvSpPr txBox="1">
-              <a:spLocks noGrp="1" noRot="1" noMove="1" noResize="1" noEditPoints="1" noAdjustHandles="1" noChangeArrowheads="1" noChangeShapeType="1"/>
-            </p:cNvSpPr>
-            <p:nvPr/>
-          </p:nvSpPr>
-          <p:spPr>
-            <a:xfrm>
-              <a:off x="10167827" y="6628184"/>
-              <a:ext cx="1575921" cy="276999"/>
-            </a:xfrm>
-            <a:prstGeom prst="rect">
-              <a:avLst/>
-            </a:prstGeom>
-            <a:noFill/>
-          </p:spPr>
-          <p:txBody>
-            <a:bodyPr wrap="square" rtlCol="0">
-              <a:spAutoFit/>
-            </a:bodyPr>
-            <a:lstStyle/>
-            <a:p>
-              <a:r>
-                <a:rPr lang="pt-BR" sz="1200" b="1" i="1" dirty="0">
-                  <a:solidFill>
-                    <a:schemeClr val="bg1"/>
-                  </a:solidFill>
-                  <a:latin typeface="Aharoni" panose="02010803020104030203" pitchFamily="2" charset="-79"/>
-                  <a:cs typeface="Aharoni" panose="02010803020104030203" pitchFamily="2" charset="-79"/>
-                </a:rPr>
-                <a:t>SESI – SENAI - IEL</a:t>
-              </a:r>
-            </a:p>
-          </p:txBody>
-        </p:sp>
-      </p:grpSp>
-      <p:pic>
-        <p:nvPicPr>
-          <p:cNvPr id="4" name="Gráfico 3">
-            <a:extLst>
-              <a:ext uri="{FF2B5EF4-FFF2-40B4-BE49-F238E27FC236}">
-                <a16:creationId xmlns:a16="http://schemas.microsoft.com/office/drawing/2014/main" id="{13C881EA-D14C-496A-470D-88F74C42C6B0}"/>
-              </a:ext>
-            </a:extLst>
-          </p:cNvPr>
-          <p:cNvPicPr>
-            <a:picLocks noGrp="1" noRot="1" noChangeAspect="1" noMove="1" noResize="1" noEditPoints="1" noAdjustHandles="1" noChangeArrowheads="1" noChangeShapeType="1" noCrop="1"/>
-          </p:cNvPicPr>
-          <p:nvPr/>
-        </p:nvPicPr>
-        <p:blipFill>
-          <a:blip r:embed="rId5">
-            <a:extLst>
-              <a:ext uri="{96DAC541-7B7A-43D3-8B79-37D633B846F1}">
-                <asvg:svgBlip xmlns:asvg="http://schemas.microsoft.com/office/drawing/2016/SVG/main" r:embed="rId6"/>
-              </a:ext>
-            </a:extLst>
-          </a:blip>
-          <a:stretch>
-            <a:fillRect/>
-          </a:stretch>
-        </p:blipFill>
-        <p:spPr>
-          <a:xfrm>
-            <a:off x="1163" y="187683"/>
-            <a:ext cx="614265" cy="4244718"/>
-          </a:xfrm>
-          <a:prstGeom prst="rect">
-            <a:avLst/>
-          </a:prstGeom>
-        </p:spPr>
-      </p:pic>
-      <p:sp>
-        <p:nvSpPr>
-          <p:cNvPr id="5" name="CaixaDeTexto 4">
-            <a:extLst>
-              <a:ext uri="{FF2B5EF4-FFF2-40B4-BE49-F238E27FC236}">
-                <a16:creationId xmlns:a16="http://schemas.microsoft.com/office/drawing/2014/main" id="{450B366E-ADF9-41FB-D956-C09E85EEAAD6}"/>
-              </a:ext>
-            </a:extLst>
-          </p:cNvPr>
-          <p:cNvSpPr txBox="1"/>
-          <p:nvPr/>
-        </p:nvSpPr>
-        <p:spPr>
-          <a:xfrm>
-            <a:off x="615428" y="1877856"/>
-            <a:ext cx="11121284" cy="2554545"/>
-          </a:xfrm>
-          <a:prstGeom prst="rect">
-            <a:avLst/>
-          </a:prstGeom>
-          <a:noFill/>
-        </p:spPr>
-        <p:txBody>
-          <a:bodyPr wrap="square" rtlCol="0">
-            <a:spAutoFit/>
-          </a:bodyPr>
-          <a:lstStyle/>
-          <a:p>
-            <a:pPr algn="ctr"/>
-            <a:r>
-              <a:rPr lang="pt-BR" sz="3200" b="1" dirty="0">
-                <a:ln>
-                  <a:solidFill>
-                    <a:sysClr val="windowText" lastClr="000000"/>
-                  </a:solidFill>
-                </a:ln>
-                <a:solidFill>
-                  <a:srgbClr val="FF0000"/>
-                </a:solidFill>
-                <a:latin typeface="Verdana" panose="020B0604030504040204" pitchFamily="34" charset="0"/>
-                <a:ea typeface="Verdana" panose="020B0604030504040204" pitchFamily="34" charset="0"/>
-              </a:rPr>
-              <a:t>AGRADECIMENTOS</a:t>
-            </a:r>
-          </a:p>
-          <a:p>
-            <a:pPr algn="ctr"/>
-            <a:endParaRPr lang="pt-BR" sz="3200" dirty="0">
-              <a:latin typeface="Verdana" panose="020B0604030504040204" pitchFamily="34" charset="0"/>
-              <a:ea typeface="Verdana" panose="020B0604030504040204" pitchFamily="34" charset="0"/>
-            </a:endParaRPr>
-          </a:p>
-          <a:p>
-            <a:pPr marL="457200" indent="-457200">
-              <a:buFont typeface="Wingdings" panose="05000000000000000000" pitchFamily="2" charset="2"/>
-              <a:buChar char="Ø"/>
-            </a:pPr>
-            <a:r>
-              <a:rPr lang="pt-BR" sz="3200" dirty="0">
-                <a:latin typeface="Verdana" panose="020B0604030504040204" pitchFamily="34" charset="0"/>
-                <a:ea typeface="Verdana" panose="020B0604030504040204" pitchFamily="34" charset="0"/>
-              </a:rPr>
-              <a:t>Jesus Cristo</a:t>
-            </a:r>
-          </a:p>
-          <a:p>
-            <a:pPr marL="457200" indent="-457200">
-              <a:buFont typeface="Wingdings" panose="05000000000000000000" pitchFamily="2" charset="2"/>
-              <a:buChar char="Ø"/>
-            </a:pPr>
-            <a:r>
-              <a:rPr lang="pt-BR" sz="3200" dirty="0">
-                <a:latin typeface="Verdana" panose="020B0604030504040204" pitchFamily="34" charset="0"/>
-                <a:ea typeface="Verdana" panose="020B0604030504040204" pitchFamily="34" charset="0"/>
-              </a:rPr>
-              <a:t>Kerry King</a:t>
-            </a:r>
-          </a:p>
-          <a:p>
-            <a:pPr marL="457200" indent="-457200">
-              <a:buFont typeface="Wingdings" panose="05000000000000000000" pitchFamily="2" charset="2"/>
-              <a:buChar char="Ø"/>
-            </a:pPr>
-            <a:r>
-              <a:rPr lang="pt-BR" sz="3200" dirty="0">
-                <a:latin typeface="Verdana" panose="020B0604030504040204" pitchFamily="34" charset="0"/>
-                <a:ea typeface="Verdana" panose="020B0604030504040204" pitchFamily="34" charset="0"/>
-              </a:rPr>
-              <a:t>Marcio Senhorinha</a:t>
-            </a:r>
-          </a:p>
-        </p:txBody>
-      </p:sp>
-    </p:spTree>
-    <p:extLst>
-      <p:ext uri="{BB962C8B-B14F-4D97-AF65-F5344CB8AC3E}">
-        <p14:creationId xmlns:p14="http://schemas.microsoft.com/office/powerpoint/2010/main" val="855279719"/>
-      </p:ext>
-    </p:extLst>
-  </p:cSld>
-  <p:clrMapOvr>
-    <a:masterClrMapping/>
-  </p:clrMapOvr>
-</p:sld>
-</file>
-
-<file path=ppt/slides/slide12.xml><?xml version="1.0" encoding="utf-8"?>
-<p:sld xmlns:a="http://schemas.openxmlformats.org/drawingml/2006/main" xmlns:r="http://schemas.openxmlformats.org/officeDocument/2006/relationships" xmlns:p="http://schemas.openxmlformats.org/presentationml/2006/main">
-  <p:cSld>
-    <p:spTree>
-      <p:nvGrpSpPr>
-        <p:cNvPr id="1" name=""/>
-        <p:cNvGrpSpPr/>
-        <p:nvPr/>
-      </p:nvGrpSpPr>
-      <p:grpSpPr>
-        <a:xfrm>
-          <a:off x="0" y="0"/>
-          <a:ext cx="0" cy="0"/>
-          <a:chOff x="0" y="0"/>
-          <a:chExt cx="0" cy="0"/>
-        </a:xfrm>
-      </p:grpSpPr>
-      <p:pic>
-        <p:nvPicPr>
-          <p:cNvPr id="3" name="Gráfico 2">
-            <a:extLst>
-              <a:ext uri="{FF2B5EF4-FFF2-40B4-BE49-F238E27FC236}">
-                <a16:creationId xmlns:a16="http://schemas.microsoft.com/office/drawing/2014/main" id="{12EA250C-B730-2CEB-9B63-8093001D4F43}"/>
-              </a:ext>
-            </a:extLst>
-          </p:cNvPr>
-          <p:cNvPicPr>
             <a:picLocks noChangeAspect="1"/>
           </p:cNvPicPr>
           <p:nvPr/>
@@ -6967,10 +6197,10 @@
       </p:pic>
       <p:sp>
         <p:nvSpPr>
-          <p:cNvPr id="5" name="CaixaDeTexto 4">
-            <a:extLst>
-              <a:ext uri="{FF2B5EF4-FFF2-40B4-BE49-F238E27FC236}">
-                <a16:creationId xmlns:a16="http://schemas.microsoft.com/office/drawing/2014/main" id="{613BABB8-3460-EF83-02FA-CC8B0E8815ED}"/>
+          <p:cNvPr id="6" name="CaixaDeTexto 5">
+            <a:extLst>
+              <a:ext uri="{FF2B5EF4-FFF2-40B4-BE49-F238E27FC236}">
+                <a16:creationId xmlns:a16="http://schemas.microsoft.com/office/drawing/2014/main" id="{9229632F-8D90-6195-9CDD-F470141FAAC6}"/>
               </a:ext>
             </a:extLst>
           </p:cNvPr>
@@ -6979,8 +6209,8 @@
         </p:nvSpPr>
         <p:spPr>
           <a:xfrm>
-            <a:off x="630850" y="540829"/>
-            <a:ext cx="10931067" cy="1446550"/>
+            <a:off x="1234206" y="1237048"/>
+            <a:ext cx="10365238" cy="2062103"/>
           </a:xfrm>
           <a:prstGeom prst="rect">
             <a:avLst/>
@@ -6988,28 +6218,27 @@
           <a:noFill/>
         </p:spPr>
         <p:txBody>
-          <a:bodyPr wrap="square" rtlCol="0">
+          <a:bodyPr wrap="square">
             <a:spAutoFit/>
           </a:bodyPr>
           <a:lstStyle/>
           <a:p>
-            <a:pPr algn="ctr"/>
-            <a:r>
-              <a:rPr lang="pt-BR" sz="4400" b="1" dirty="0">
+            <a:r>
+              <a:rPr lang="pt-BR" sz="3200" dirty="0">
                 <a:latin typeface="Verdana" panose="020B0604030504040204" pitchFamily="34" charset="0"/>
                 <a:ea typeface="Verdana" panose="020B0604030504040204" pitchFamily="34" charset="0"/>
               </a:rPr>
-              <a:t>Orientações sobre a formatação dos SLIDES</a:t>
-            </a:r>
-          </a:p>
-        </p:txBody>
-      </p:sp>
-      <p:sp>
-        <p:nvSpPr>
-          <p:cNvPr id="6" name="CaixaDeTexto 5">
-            <a:extLst>
-              <a:ext uri="{FF2B5EF4-FFF2-40B4-BE49-F238E27FC236}">
-                <a16:creationId xmlns:a16="http://schemas.microsoft.com/office/drawing/2014/main" id="{60F62352-6B64-4B9A-C9A2-82FFFDCB1D14}"/>
+              <a:t>A Padaria do Alemão, fundada há mais de 95 anos, é uma referência local que oferece pães, bolos e diversos produtos de café, mantendo receitas tradicionais e atendimento de qualidade.</a:t>
+            </a:r>
+          </a:p>
+        </p:txBody>
+      </p:sp>
+      <p:sp>
+        <p:nvSpPr>
+          <p:cNvPr id="5" name="CaixaDeTexto 4">
+            <a:extLst>
+              <a:ext uri="{FF2B5EF4-FFF2-40B4-BE49-F238E27FC236}">
+                <a16:creationId xmlns:a16="http://schemas.microsoft.com/office/drawing/2014/main" id="{2771EBC3-9BA4-5D63-6D0C-4B40FB250347}"/>
               </a:ext>
             </a:extLst>
           </p:cNvPr>
@@ -7018,8 +6247,8 @@
         </p:nvSpPr>
         <p:spPr>
           <a:xfrm>
-            <a:off x="516628" y="2617051"/>
-            <a:ext cx="11158743" cy="2554545"/>
+            <a:off x="2611582" y="98169"/>
+            <a:ext cx="6968836" cy="1323439"/>
           </a:xfrm>
           <a:prstGeom prst="rect">
             <a:avLst/>
@@ -7027,188 +6256,18 @@
           <a:noFill/>
         </p:spPr>
         <p:txBody>
-          <a:bodyPr wrap="square" rtlCol="0">
+          <a:bodyPr wrap="square">
             <a:spAutoFit/>
           </a:bodyPr>
           <a:lstStyle/>
           <a:p>
-            <a:pPr marL="457200" indent="-457200" algn="just">
-              <a:buFont typeface="Wingdings" panose="05000000000000000000" pitchFamily="2" charset="2"/>
-              <a:buChar char="ü"/>
-            </a:pPr>
-            <a:r>
-              <a:rPr lang="pt-BR" sz="3200" b="1" dirty="0">
+            <a:pPr algn="ctr"/>
+            <a:r>
+              <a:rPr lang="pt-BR" sz="4000" dirty="0">
                 <a:latin typeface="Verdana" panose="020B0604030504040204" pitchFamily="34" charset="0"/>
                 <a:ea typeface="Verdana" panose="020B0604030504040204" pitchFamily="34" charset="0"/>
               </a:rPr>
-              <a:t>Titulo</a:t>
-            </a:r>
-            <a:r>
-              <a:rPr lang="pt-BR" sz="3200" dirty="0">
-                <a:latin typeface="Verdana" panose="020B0604030504040204" pitchFamily="34" charset="0"/>
-                <a:ea typeface="Verdana" panose="020B0604030504040204" pitchFamily="34" charset="0"/>
-              </a:rPr>
-              <a:t>  - Tamanho </a:t>
-            </a:r>
-            <a:r>
-              <a:rPr lang="pt-BR" sz="3200" b="1" dirty="0">
-                <a:latin typeface="Verdana" panose="020B0604030504040204" pitchFamily="34" charset="0"/>
-                <a:ea typeface="Verdana" panose="020B0604030504040204" pitchFamily="34" charset="0"/>
-              </a:rPr>
-              <a:t>44</a:t>
-            </a:r>
-            <a:r>
-              <a:rPr lang="pt-BR" sz="3200" dirty="0">
-                <a:latin typeface="Verdana" panose="020B0604030504040204" pitchFamily="34" charset="0"/>
-                <a:ea typeface="Verdana" panose="020B0604030504040204" pitchFamily="34" charset="0"/>
-              </a:rPr>
-              <a:t>, Fonte </a:t>
-            </a:r>
-            <a:r>
-              <a:rPr lang="pt-BR" sz="3200" b="1" dirty="0">
-                <a:latin typeface="Verdana" panose="020B0604030504040204" pitchFamily="34" charset="0"/>
-                <a:ea typeface="Verdana" panose="020B0604030504040204" pitchFamily="34" charset="0"/>
-              </a:rPr>
-              <a:t>Verdana</a:t>
-            </a:r>
-            <a:r>
-              <a:rPr lang="pt-BR" sz="3200" dirty="0">
-                <a:latin typeface="Verdana" panose="020B0604030504040204" pitchFamily="34" charset="0"/>
-                <a:ea typeface="Verdana" panose="020B0604030504040204" pitchFamily="34" charset="0"/>
-              </a:rPr>
-              <a:t>;</a:t>
-            </a:r>
-          </a:p>
-          <a:p>
-            <a:pPr marL="457200" indent="-457200" algn="just">
-              <a:buFont typeface="Wingdings" panose="05000000000000000000" pitchFamily="2" charset="2"/>
-              <a:buChar char="ü"/>
-            </a:pPr>
-            <a:r>
-              <a:rPr lang="pt-BR" sz="3200" b="1" dirty="0">
-                <a:latin typeface="Verdana" panose="020B0604030504040204" pitchFamily="34" charset="0"/>
-                <a:ea typeface="Verdana" panose="020B0604030504040204" pitchFamily="34" charset="0"/>
-              </a:rPr>
-              <a:t>Texto</a:t>
-            </a:r>
-            <a:r>
-              <a:rPr lang="pt-BR" sz="3200" dirty="0">
-                <a:latin typeface="Verdana" panose="020B0604030504040204" pitchFamily="34" charset="0"/>
-                <a:ea typeface="Verdana" panose="020B0604030504040204" pitchFamily="34" charset="0"/>
-              </a:rPr>
-              <a:t> – Tamanho </a:t>
-            </a:r>
-            <a:r>
-              <a:rPr lang="pt-BR" sz="3200" b="1" dirty="0">
-                <a:latin typeface="Verdana" panose="020B0604030504040204" pitchFamily="34" charset="0"/>
-                <a:ea typeface="Verdana" panose="020B0604030504040204" pitchFamily="34" charset="0"/>
-              </a:rPr>
-              <a:t>32</a:t>
-            </a:r>
-            <a:r>
-              <a:rPr lang="pt-BR" sz="3200" dirty="0">
-                <a:latin typeface="Verdana" panose="020B0604030504040204" pitchFamily="34" charset="0"/>
-                <a:ea typeface="Verdana" panose="020B0604030504040204" pitchFamily="34" charset="0"/>
-              </a:rPr>
-              <a:t> (mínimo) – Fonte </a:t>
-            </a:r>
-            <a:r>
-              <a:rPr lang="pt-BR" sz="3200" b="1" dirty="0">
-                <a:latin typeface="Verdana" panose="020B0604030504040204" pitchFamily="34" charset="0"/>
-                <a:ea typeface="Verdana" panose="020B0604030504040204" pitchFamily="34" charset="0"/>
-              </a:rPr>
-              <a:t>Verdana</a:t>
-            </a:r>
-            <a:r>
-              <a:rPr lang="pt-BR" sz="3200" dirty="0">
-                <a:latin typeface="Verdana" panose="020B0604030504040204" pitchFamily="34" charset="0"/>
-                <a:ea typeface="Verdana" panose="020B0604030504040204" pitchFamily="34" charset="0"/>
-              </a:rPr>
-              <a:t>;</a:t>
-            </a:r>
-          </a:p>
-          <a:p>
-            <a:pPr marL="457200" indent="-457200" algn="just">
-              <a:buFont typeface="Wingdings" panose="05000000000000000000" pitchFamily="2" charset="2"/>
-              <a:buChar char="ü"/>
-            </a:pPr>
-            <a:r>
-              <a:rPr lang="pt-BR" sz="3200" b="1" dirty="0">
-                <a:ln>
-                  <a:solidFill>
-                    <a:sysClr val="windowText" lastClr="000000"/>
-                  </a:solidFill>
-                </a:ln>
-                <a:solidFill>
-                  <a:srgbClr val="3796FF"/>
-                </a:solidFill>
-                <a:latin typeface="Verdana" panose="020B0604030504040204" pitchFamily="34" charset="0"/>
-                <a:ea typeface="Verdana" panose="020B0604030504040204" pitchFamily="34" charset="0"/>
-              </a:rPr>
-              <a:t>SE</a:t>
-            </a:r>
-            <a:r>
-              <a:rPr lang="pt-BR" sz="3200" dirty="0">
-                <a:latin typeface="Verdana" panose="020B0604030504040204" pitchFamily="34" charset="0"/>
-                <a:ea typeface="Verdana" panose="020B0604030504040204" pitchFamily="34" charset="0"/>
-              </a:rPr>
-              <a:t> fundo do SLIDE escuro, FONTE deve ser clara;</a:t>
-            </a:r>
-          </a:p>
-          <a:p>
-            <a:pPr marL="457200" indent="-457200" algn="just">
-              <a:buFont typeface="Wingdings" panose="05000000000000000000" pitchFamily="2" charset="2"/>
-              <a:buChar char="ü"/>
-            </a:pPr>
-            <a:r>
-              <a:rPr lang="pt-BR" sz="3200" b="1" dirty="0">
-                <a:ln>
-                  <a:solidFill>
-                    <a:sysClr val="windowText" lastClr="000000"/>
-                  </a:solidFill>
-                </a:ln>
-                <a:solidFill>
-                  <a:srgbClr val="FF0000"/>
-                </a:solidFill>
-                <a:latin typeface="Verdana" panose="020B0604030504040204" pitchFamily="34" charset="0"/>
-                <a:ea typeface="Verdana" panose="020B0604030504040204" pitchFamily="34" charset="0"/>
-              </a:rPr>
-              <a:t>SE</a:t>
-            </a:r>
-            <a:r>
-              <a:rPr lang="pt-BR" sz="3200" dirty="0">
-                <a:latin typeface="Verdana" panose="020B0604030504040204" pitchFamily="34" charset="0"/>
-                <a:ea typeface="Verdana" panose="020B0604030504040204" pitchFamily="34" charset="0"/>
-              </a:rPr>
-              <a:t> fundo do SLIDE claro, FONTE deve ser escura.</a:t>
-            </a:r>
-          </a:p>
-          <a:p>
-            <a:pPr marL="457200" indent="-457200" algn="just">
-              <a:buFont typeface="Wingdings" panose="05000000000000000000" pitchFamily="2" charset="2"/>
-              <a:buChar char="ü"/>
-            </a:pPr>
-            <a:r>
-              <a:rPr lang="pt-BR" sz="3200" b="1" dirty="0">
-                <a:ln>
-                  <a:solidFill>
-                    <a:sysClr val="windowText" lastClr="000000"/>
-                  </a:solidFill>
-                </a:ln>
-                <a:solidFill>
-                  <a:srgbClr val="FF0000"/>
-                </a:solidFill>
-                <a:latin typeface="Verdana" panose="020B0604030504040204" pitchFamily="34" charset="0"/>
-                <a:ea typeface="Verdana" panose="020B0604030504040204" pitchFamily="34" charset="0"/>
-              </a:rPr>
-              <a:t>EVITE</a:t>
-            </a:r>
-            <a:r>
-              <a:rPr lang="pt-BR" sz="3200" dirty="0">
-                <a:latin typeface="Verdana" panose="020B0604030504040204" pitchFamily="34" charset="0"/>
-                <a:ea typeface="Verdana" panose="020B0604030504040204" pitchFamily="34" charset="0"/>
-              </a:rPr>
-              <a:t> ANIMAÇÃO  e TRANSIÇÃO.  </a:t>
+              <a:t>INTRODUÇAO SOBRE O SISTEMA</a:t>
             </a:r>
           </a:p>
         </p:txBody>
@@ -7216,7 +6275,7 @@
     </p:spTree>
     <p:extLst>
       <p:ext uri="{BB962C8B-B14F-4D97-AF65-F5344CB8AC3E}">
-        <p14:creationId xmlns:p14="http://schemas.microsoft.com/office/powerpoint/2010/main" val="2345933350"/>
+        <p14:creationId xmlns:p14="http://schemas.microsoft.com/office/powerpoint/2010/main" val="2994047144"/>
       </p:ext>
     </p:extLst>
   </p:cSld>
@@ -7529,10 +6588,10 @@
       </p:pic>
       <p:sp>
         <p:nvSpPr>
-          <p:cNvPr id="2" name="CaixaDeTexto 1">
-            <a:extLst>
-              <a:ext uri="{FF2B5EF4-FFF2-40B4-BE49-F238E27FC236}">
-                <a16:creationId xmlns:a16="http://schemas.microsoft.com/office/drawing/2014/main" id="{ABE6C731-78CF-43DC-65CF-DE97769BB70B}"/>
+          <p:cNvPr id="5" name="CaixaDeTexto 4">
+            <a:extLst>
+              <a:ext uri="{FF2B5EF4-FFF2-40B4-BE49-F238E27FC236}">
+                <a16:creationId xmlns:a16="http://schemas.microsoft.com/office/drawing/2014/main" id="{B0BFF9FC-13A5-2497-E5D0-DB508CE1327B}"/>
               </a:ext>
             </a:extLst>
           </p:cNvPr>
@@ -7541,8 +6600,8 @@
         </p:nvSpPr>
         <p:spPr>
           <a:xfrm>
-            <a:off x="2271688" y="345653"/>
-            <a:ext cx="7376160" cy="2554545"/>
+            <a:off x="132099" y="118838"/>
+            <a:ext cx="11121284" cy="1077218"/>
           </a:xfrm>
           <a:prstGeom prst="rect">
             <a:avLst/>
@@ -7557,39 +6616,82 @@
           <a:p>
             <a:pPr algn="ctr"/>
             <a:r>
-              <a:rPr lang="pt-BR" sz="4000" dirty="0">
+              <a:rPr lang="pt-BR" sz="3200" b="1" dirty="0">
                 <a:latin typeface="Verdana" panose="020B0604030504040204" pitchFamily="34" charset="0"/>
                 <a:ea typeface="Verdana" panose="020B0604030504040204" pitchFamily="34" charset="0"/>
               </a:rPr>
-              <a:t>INTRODUÇAO SOBRE O SISTEMA</a:t>
+              <a:t>BANCO DE DADOS</a:t>
             </a:r>
           </a:p>
           <a:p>
             <a:pPr algn="ctr"/>
             <a:r>
-              <a:rPr lang="pt-BR" sz="4000" dirty="0">
+              <a:rPr lang="pt-BR" sz="3200" b="1" dirty="0">
+                <a:ln>
+                  <a:solidFill>
+                    <a:sysClr val="windowText" lastClr="000000"/>
+                  </a:solidFill>
+                </a:ln>
+                <a:solidFill>
+                  <a:srgbClr val="3796FF"/>
+                </a:solidFill>
                 <a:latin typeface="Verdana" panose="020B0604030504040204" pitchFamily="34" charset="0"/>
                 <a:ea typeface="Verdana" panose="020B0604030504040204" pitchFamily="34" charset="0"/>
               </a:rPr>
-              <a:t>O que é?</a:t>
-            </a:r>
-          </a:p>
-          <a:p>
-            <a:pPr algn="ctr"/>
-            <a:r>
-              <a:rPr lang="pt-BR" sz="4000" dirty="0">
-                <a:latin typeface="Verdana" panose="020B0604030504040204" pitchFamily="34" charset="0"/>
-                <a:ea typeface="Verdana" panose="020B0604030504040204" pitchFamily="34" charset="0"/>
-              </a:rPr>
-              <a:t>O que faz?</a:t>
-            </a:r>
-          </a:p>
-        </p:txBody>
-      </p:sp>
+              <a:t>Imagem do MRN</a:t>
+            </a:r>
+            <a:endParaRPr lang="pt-BR" sz="2800" dirty="0">
+              <a:latin typeface="Verdana" panose="020B0604030504040204" pitchFamily="34" charset="0"/>
+              <a:ea typeface="Verdana" panose="020B0604030504040204" pitchFamily="34" charset="0"/>
+            </a:endParaRPr>
+          </a:p>
+        </p:txBody>
+      </p:sp>
+      <p:pic>
+        <p:nvPicPr>
+          <p:cNvPr id="2" name="Imagem 1">
+            <a:extLst>
+              <a:ext uri="{FF2B5EF4-FFF2-40B4-BE49-F238E27FC236}">
+                <a16:creationId xmlns:a16="http://schemas.microsoft.com/office/drawing/2014/main" id="{C543C844-D844-BDED-31D7-D6B9D0AD6463}"/>
+              </a:ext>
+            </a:extLst>
+          </p:cNvPr>
+          <p:cNvPicPr>
+            <a:picLocks noChangeAspect="1"/>
+          </p:cNvPicPr>
+          <p:nvPr/>
+        </p:nvPicPr>
+        <p:blipFill>
+          <a:blip r:embed="rId7">
+            <a:extLst>
+              <a:ext uri="{28A0092B-C50C-407E-A947-70E740481C1C}">
+                <a14:useLocalDpi xmlns:a14="http://schemas.microsoft.com/office/drawing/2010/main" val="0"/>
+              </a:ext>
+            </a:extLst>
+          </a:blip>
+          <a:srcRect/>
+          <a:stretch>
+            <a:fillRect/>
+          </a:stretch>
+        </p:blipFill>
+        <p:spPr bwMode="auto">
+          <a:xfrm>
+            <a:off x="1440240" y="1192443"/>
+            <a:ext cx="8505002" cy="4825666"/>
+          </a:xfrm>
+          <a:prstGeom prst="rect">
+            <a:avLst/>
+          </a:prstGeom>
+          <a:noFill/>
+          <a:ln>
+            <a:noFill/>
+          </a:ln>
+        </p:spPr>
+      </p:pic>
     </p:spTree>
     <p:extLst>
       <p:ext uri="{BB962C8B-B14F-4D97-AF65-F5344CB8AC3E}">
-        <p14:creationId xmlns:p14="http://schemas.microsoft.com/office/powerpoint/2010/main" val="1169431528"/>
+        <p14:creationId xmlns:p14="http://schemas.microsoft.com/office/powerpoint/2010/main" val="3403325015"/>
       </p:ext>
     </p:extLst>
   </p:cSld>
@@ -7902,10 +7004,10 @@
       </p:pic>
       <p:sp>
         <p:nvSpPr>
-          <p:cNvPr id="6" name="CaixaDeTexto 5">
-            <a:extLst>
-              <a:ext uri="{FF2B5EF4-FFF2-40B4-BE49-F238E27FC236}">
-                <a16:creationId xmlns:a16="http://schemas.microsoft.com/office/drawing/2014/main" id="{9229632F-8D90-6195-9CDD-F470141FAAC6}"/>
+          <p:cNvPr id="2" name="CaixaDeTexto 1">
+            <a:extLst>
+              <a:ext uri="{FF2B5EF4-FFF2-40B4-BE49-F238E27FC236}">
+                <a16:creationId xmlns:a16="http://schemas.microsoft.com/office/drawing/2014/main" id="{7F094C35-F076-57E3-285B-9B664512718D}"/>
               </a:ext>
             </a:extLst>
           </p:cNvPr>
@@ -7914,8 +7016,8 @@
         </p:nvSpPr>
         <p:spPr>
           <a:xfrm>
-            <a:off x="1234206" y="1237048"/>
-            <a:ext cx="10365238" cy="2062103"/>
+            <a:off x="535358" y="-24941"/>
+            <a:ext cx="11121284" cy="1077218"/>
           </a:xfrm>
           <a:prstGeom prst="rect">
             <a:avLst/>
@@ -7923,25 +7025,78 @@
           <a:noFill/>
         </p:spPr>
         <p:txBody>
-          <a:bodyPr wrap="square">
+          <a:bodyPr wrap="square" rtlCol="0">
             <a:spAutoFit/>
           </a:bodyPr>
           <a:lstStyle/>
           <a:p>
-            <a:r>
-              <a:rPr lang="pt-BR" sz="3200" dirty="0">
+            <a:pPr algn="ctr"/>
+            <a:r>
+              <a:rPr lang="pt-BR" sz="3200" b="1" dirty="0">
                 <a:latin typeface="Verdana" panose="020B0604030504040204" pitchFamily="34" charset="0"/>
                 <a:ea typeface="Verdana" panose="020B0604030504040204" pitchFamily="34" charset="0"/>
               </a:rPr>
-              <a:t>A Padaria do Alemão, fundada há mais de 95 anos, é uma referência local que oferece pães, bolos e diversos produtos de café, mantendo receitas tradicionais e atendimento de qualidade.</a:t>
-            </a:r>
-          </a:p>
-        </p:txBody>
-      </p:sp>
+              <a:t>DIAGRAMA DO CASO DE USO (GERAL)</a:t>
+            </a:r>
+          </a:p>
+          <a:p>
+            <a:pPr algn="ctr"/>
+            <a:r>
+              <a:rPr lang="pt-BR" sz="3200" b="1" dirty="0">
+                <a:ln>
+                  <a:solidFill>
+                    <a:sysClr val="windowText" lastClr="000000"/>
+                  </a:solidFill>
+                </a:ln>
+                <a:solidFill>
+                  <a:srgbClr val="3796FF"/>
+                </a:solidFill>
+                <a:latin typeface="Verdana" panose="020B0604030504040204" pitchFamily="34" charset="0"/>
+                <a:ea typeface="Verdana" panose="020B0604030504040204" pitchFamily="34" charset="0"/>
+              </a:rPr>
+              <a:t>Imagem</a:t>
+            </a:r>
+            <a:endParaRPr lang="pt-BR" sz="3200" dirty="0">
+              <a:latin typeface="Verdana" panose="020B0604030504040204" pitchFamily="34" charset="0"/>
+              <a:ea typeface="Verdana" panose="020B0604030504040204" pitchFamily="34" charset="0"/>
+            </a:endParaRPr>
+          </a:p>
+        </p:txBody>
+      </p:sp>
+      <p:pic>
+        <p:nvPicPr>
+          <p:cNvPr id="6" name="Imagem 5">
+            <a:extLst>
+              <a:ext uri="{FF2B5EF4-FFF2-40B4-BE49-F238E27FC236}">
+                <a16:creationId xmlns:a16="http://schemas.microsoft.com/office/drawing/2014/main" id="{EB20F1C3-3890-D726-D372-BF0DB68B2F69}"/>
+              </a:ext>
+            </a:extLst>
+          </p:cNvPr>
+          <p:cNvPicPr>
+            <a:picLocks noChangeAspect="1"/>
+          </p:cNvPicPr>
+          <p:nvPr/>
+        </p:nvPicPr>
+        <p:blipFill>
+          <a:blip r:embed="rId7"/>
+          <a:stretch>
+            <a:fillRect/>
+          </a:stretch>
+        </p:blipFill>
+        <p:spPr>
+          <a:xfrm>
+            <a:off x="3619500" y="1052277"/>
+            <a:ext cx="5524500" cy="5397639"/>
+          </a:xfrm>
+          <a:prstGeom prst="rect">
+            <a:avLst/>
+          </a:prstGeom>
+        </p:spPr>
+      </p:pic>
     </p:spTree>
     <p:extLst>
       <p:ext uri="{BB962C8B-B14F-4D97-AF65-F5344CB8AC3E}">
-        <p14:creationId xmlns:p14="http://schemas.microsoft.com/office/powerpoint/2010/main" val="2994047144"/>
+        <p14:creationId xmlns:p14="http://schemas.microsoft.com/office/powerpoint/2010/main" val="984659062"/>
       </p:ext>
     </p:extLst>
   </p:cSld>
@@ -8254,10 +7409,10 @@
       </p:pic>
       <p:sp>
         <p:nvSpPr>
-          <p:cNvPr id="5" name="CaixaDeTexto 4">
-            <a:extLst>
-              <a:ext uri="{FF2B5EF4-FFF2-40B4-BE49-F238E27FC236}">
-                <a16:creationId xmlns:a16="http://schemas.microsoft.com/office/drawing/2014/main" id="{B0BFF9FC-13A5-2497-E5D0-DB508CE1327B}"/>
+          <p:cNvPr id="2" name="CaixaDeTexto 1">
+            <a:extLst>
+              <a:ext uri="{FF2B5EF4-FFF2-40B4-BE49-F238E27FC236}">
+                <a16:creationId xmlns:a16="http://schemas.microsoft.com/office/drawing/2014/main" id="{3E73C538-7322-D3FE-2D45-F38951041EBE}"/>
               </a:ext>
             </a:extLst>
           </p:cNvPr>
@@ -8266,7 +7421,7 @@
         </p:nvSpPr>
         <p:spPr>
           <a:xfrm>
-            <a:off x="132099" y="118838"/>
+            <a:off x="615428" y="-41984"/>
             <a:ext cx="11121284" cy="1077218"/>
           </a:xfrm>
           <a:prstGeom prst="rect">
@@ -8286,39 +7441,36 @@
                 <a:latin typeface="Verdana" panose="020B0604030504040204" pitchFamily="34" charset="0"/>
                 <a:ea typeface="Verdana" panose="020B0604030504040204" pitchFamily="34" charset="0"/>
               </a:rPr>
-              <a:t>BANCO DE DADOS</a:t>
-            </a:r>
-          </a:p>
-          <a:p>
-            <a:pPr algn="ctr"/>
-            <a:r>
-              <a:rPr lang="pt-BR" sz="3200" b="1" dirty="0">
-                <a:ln>
-                  <a:solidFill>
-                    <a:sysClr val="windowText" lastClr="000000"/>
-                  </a:solidFill>
-                </a:ln>
+              <a:t>PROTOTIPAÇÃO DO SISTEMA</a:t>
+            </a:r>
+            <a:endParaRPr lang="pt-BR" sz="3200" b="1" dirty="0">
+              <a:ln>
                 <a:solidFill>
-                  <a:srgbClr val="3796FF"/>
+                  <a:sysClr val="windowText" lastClr="000000"/>
                 </a:solidFill>
-                <a:latin typeface="Verdana" panose="020B0604030504040204" pitchFamily="34" charset="0"/>
-                <a:ea typeface="Verdana" panose="020B0604030504040204" pitchFamily="34" charset="0"/>
-              </a:rPr>
-              <a:t>Imagem do MRN</a:t>
-            </a:r>
-            <a:endParaRPr lang="pt-BR" sz="2800" dirty="0">
+              </a:ln>
+              <a:solidFill>
+                <a:srgbClr val="FF0000"/>
+              </a:solidFill>
               <a:latin typeface="Verdana" panose="020B0604030504040204" pitchFamily="34" charset="0"/>
               <a:ea typeface="Verdana" panose="020B0604030504040204" pitchFamily="34" charset="0"/>
             </a:endParaRPr>
           </a:p>
+          <a:p>
+            <a:pPr algn="ctr"/>
+            <a:endParaRPr lang="pt-BR" sz="3200" dirty="0">
+              <a:latin typeface="Verdana" panose="020B0604030504040204" pitchFamily="34" charset="0"/>
+              <a:ea typeface="Verdana" panose="020B0604030504040204" pitchFamily="34" charset="0"/>
+            </a:endParaRPr>
+          </a:p>
         </p:txBody>
       </p:sp>
       <p:pic>
         <p:nvPicPr>
-          <p:cNvPr id="2" name="Imagem 1">
-            <a:extLst>
-              <a:ext uri="{FF2B5EF4-FFF2-40B4-BE49-F238E27FC236}">
-                <a16:creationId xmlns:a16="http://schemas.microsoft.com/office/drawing/2014/main" id="{C543C844-D844-BDED-31D7-D6B9D0AD6463}"/>
+          <p:cNvPr id="6" name="Imagem 5">
+            <a:extLst>
+              <a:ext uri="{FF2B5EF4-FFF2-40B4-BE49-F238E27FC236}">
+                <a16:creationId xmlns:a16="http://schemas.microsoft.com/office/drawing/2014/main" id="{99049B36-B0B8-2BF6-56CA-C902B40CB24E}"/>
               </a:ext>
             </a:extLst>
           </p:cNvPr>
@@ -8328,36 +7480,829 @@
           <p:nvPr/>
         </p:nvPicPr>
         <p:blipFill>
-          <a:blip r:embed="rId7">
-            <a:extLst>
-              <a:ext uri="{28A0092B-C50C-407E-A947-70E740481C1C}">
-                <a14:useLocalDpi xmlns:a14="http://schemas.microsoft.com/office/drawing/2010/main" val="0"/>
-              </a:ext>
-            </a:extLst>
-          </a:blip>
-          <a:srcRect/>
+          <a:blip r:embed="rId7"/>
           <a:stretch>
             <a:fillRect/>
           </a:stretch>
         </p:blipFill>
-        <p:spPr bwMode="auto">
-          <a:xfrm>
-            <a:off x="1440240" y="1192443"/>
-            <a:ext cx="8505002" cy="4825666"/>
+        <p:spPr>
+          <a:xfrm>
+            <a:off x="681755" y="929867"/>
+            <a:ext cx="1525883" cy="1498732"/>
+          </a:xfrm>
+          <a:prstGeom prst="rect">
+            <a:avLst/>
+          </a:prstGeom>
+        </p:spPr>
+      </p:pic>
+      <p:sp>
+        <p:nvSpPr>
+          <p:cNvPr id="16" name="Seta: para Baixo 15">
+            <a:extLst>
+              <a:ext uri="{FF2B5EF4-FFF2-40B4-BE49-F238E27FC236}">
+                <a16:creationId xmlns:a16="http://schemas.microsoft.com/office/drawing/2014/main" id="{33653C01-D0E9-CB21-5E5B-E3E92B036803}"/>
+              </a:ext>
+            </a:extLst>
+          </p:cNvPr>
+          <p:cNvSpPr/>
+          <p:nvPr/>
+        </p:nvSpPr>
+        <p:spPr>
+          <a:xfrm rot="16200000">
+            <a:off x="2734757" y="1336465"/>
+            <a:ext cx="720437" cy="479987"/>
+          </a:xfrm>
+          <a:prstGeom prst="downArrow">
+            <a:avLst/>
+          </a:prstGeom>
+        </p:spPr>
+        <p:style>
+          <a:lnRef idx="2">
+            <a:schemeClr val="accent1">
+              <a:shade val="15000"/>
+            </a:schemeClr>
+          </a:lnRef>
+          <a:fillRef idx="1">
+            <a:schemeClr val="accent1"/>
+          </a:fillRef>
+          <a:effectRef idx="0">
+            <a:schemeClr val="accent1"/>
+          </a:effectRef>
+          <a:fontRef idx="minor">
+            <a:schemeClr val="lt1"/>
+          </a:fontRef>
+        </p:style>
+        <p:txBody>
+          <a:bodyPr rtlCol="0" anchor="ctr"/>
+          <a:lstStyle/>
+          <a:p>
+            <a:pPr algn="ctr"/>
+            <a:endParaRPr lang="pt-BR"/>
+          </a:p>
+        </p:txBody>
+      </p:sp>
+      <p:sp>
+        <p:nvSpPr>
+          <p:cNvPr id="19" name="CaixaDeTexto 18">
+            <a:extLst>
+              <a:ext uri="{FF2B5EF4-FFF2-40B4-BE49-F238E27FC236}">
+                <a16:creationId xmlns:a16="http://schemas.microsoft.com/office/drawing/2014/main" id="{F5EFC4A3-92C5-9029-4002-13DC61649BB7}"/>
+              </a:ext>
+            </a:extLst>
+          </p:cNvPr>
+          <p:cNvSpPr txBox="1"/>
+          <p:nvPr/>
+        </p:nvSpPr>
+        <p:spPr>
+          <a:xfrm>
+            <a:off x="817418" y="453618"/>
+            <a:ext cx="2299855" cy="369332"/>
           </a:xfrm>
           <a:prstGeom prst="rect">
             <a:avLst/>
           </a:prstGeom>
           <a:noFill/>
-          <a:ln>
-            <a:noFill/>
-          </a:ln>
+        </p:spPr>
+        <p:txBody>
+          <a:bodyPr wrap="square" rtlCol="0">
+            <a:spAutoFit/>
+          </a:bodyPr>
+          <a:lstStyle/>
+          <a:p>
+            <a:r>
+              <a:rPr lang="pt-BR" dirty="0"/>
+              <a:t>Tela de login</a:t>
+            </a:r>
+          </a:p>
+        </p:txBody>
+      </p:sp>
+      <p:sp>
+        <p:nvSpPr>
+          <p:cNvPr id="22" name="Seta: para Baixo 21">
+            <a:extLst>
+              <a:ext uri="{FF2B5EF4-FFF2-40B4-BE49-F238E27FC236}">
+                <a16:creationId xmlns:a16="http://schemas.microsoft.com/office/drawing/2014/main" id="{7223E0E0-2A52-20EF-7C9D-1EF8592F7492}"/>
+              </a:ext>
+            </a:extLst>
+          </p:cNvPr>
+          <p:cNvSpPr/>
+          <p:nvPr/>
+        </p:nvSpPr>
+        <p:spPr>
+          <a:xfrm rot="5400000">
+            <a:off x="2046101" y="1311595"/>
+            <a:ext cx="720437" cy="479987"/>
+          </a:xfrm>
+          <a:prstGeom prst="downArrow">
+            <a:avLst/>
+          </a:prstGeom>
+        </p:spPr>
+        <p:style>
+          <a:lnRef idx="2">
+            <a:schemeClr val="accent1">
+              <a:shade val="15000"/>
+            </a:schemeClr>
+          </a:lnRef>
+          <a:fillRef idx="1">
+            <a:schemeClr val="accent1"/>
+          </a:fillRef>
+          <a:effectRef idx="0">
+            <a:schemeClr val="accent1"/>
+          </a:effectRef>
+          <a:fontRef idx="minor">
+            <a:schemeClr val="lt1"/>
+          </a:fontRef>
+        </p:style>
+        <p:txBody>
+          <a:bodyPr rtlCol="0" anchor="ctr"/>
+          <a:lstStyle/>
+          <a:p>
+            <a:pPr algn="ctr"/>
+            <a:endParaRPr lang="pt-BR"/>
+          </a:p>
+        </p:txBody>
+      </p:sp>
+      <p:sp>
+        <p:nvSpPr>
+          <p:cNvPr id="24" name="CaixaDeTexto 23">
+            <a:extLst>
+              <a:ext uri="{FF2B5EF4-FFF2-40B4-BE49-F238E27FC236}">
+                <a16:creationId xmlns:a16="http://schemas.microsoft.com/office/drawing/2014/main" id="{CD7E6A42-441A-439B-2704-81018AB89AF0}"/>
+              </a:ext>
+            </a:extLst>
+          </p:cNvPr>
+          <p:cNvSpPr txBox="1"/>
+          <p:nvPr/>
+        </p:nvSpPr>
+        <p:spPr>
+          <a:xfrm>
+            <a:off x="3921044" y="670360"/>
+            <a:ext cx="3456512" cy="369332"/>
+          </a:xfrm>
+          <a:prstGeom prst="rect">
+            <a:avLst/>
+          </a:prstGeom>
+          <a:noFill/>
+        </p:spPr>
+        <p:txBody>
+          <a:bodyPr wrap="square" rtlCol="0">
+            <a:spAutoFit/>
+          </a:bodyPr>
+          <a:lstStyle/>
+          <a:p>
+            <a:r>
+              <a:rPr lang="pt-BR" dirty="0"/>
+              <a:t>Tela principal</a:t>
+            </a:r>
+          </a:p>
+        </p:txBody>
+      </p:sp>
+      <p:pic>
+        <p:nvPicPr>
+          <p:cNvPr id="8" name="Imagem 7" descr="Interface gráfica do usuário&#10;&#10;O conteúdo gerado por IA pode estar incorreto.">
+            <a:extLst>
+              <a:ext uri="{FF2B5EF4-FFF2-40B4-BE49-F238E27FC236}">
+                <a16:creationId xmlns:a16="http://schemas.microsoft.com/office/drawing/2014/main" id="{FE171389-6F0C-92EF-0DBB-7DF752810FEE}"/>
+              </a:ext>
+            </a:extLst>
+          </p:cNvPr>
+          <p:cNvPicPr>
+            <a:picLocks noChangeAspect="1"/>
+          </p:cNvPicPr>
+          <p:nvPr/>
+        </p:nvPicPr>
+        <p:blipFill>
+          <a:blip r:embed="rId8">
+            <a:extLst>
+              <a:ext uri="{28A0092B-C50C-407E-A947-70E740481C1C}">
+                <a14:useLocalDpi xmlns:a14="http://schemas.microsoft.com/office/drawing/2010/main" val="0"/>
+              </a:ext>
+            </a:extLst>
+          </a:blip>
+          <a:stretch>
+            <a:fillRect/>
+          </a:stretch>
+        </p:blipFill>
+        <p:spPr>
+          <a:xfrm>
+            <a:off x="7655131" y="2838935"/>
+            <a:ext cx="3029203" cy="1764147"/>
+          </a:xfrm>
+          <a:prstGeom prst="rect">
+            <a:avLst/>
+          </a:prstGeom>
         </p:spPr>
       </p:pic>
+      <p:sp>
+        <p:nvSpPr>
+          <p:cNvPr id="13" name="Seta: para Baixo 12">
+            <a:extLst>
+              <a:ext uri="{FF2B5EF4-FFF2-40B4-BE49-F238E27FC236}">
+                <a16:creationId xmlns:a16="http://schemas.microsoft.com/office/drawing/2014/main" id="{2BC410AA-4FDE-DE52-F8BF-94ED8B87EEC0}"/>
+              </a:ext>
+            </a:extLst>
+          </p:cNvPr>
+          <p:cNvSpPr/>
+          <p:nvPr/>
+        </p:nvSpPr>
+        <p:spPr>
+          <a:xfrm rot="16200000">
+            <a:off x="6742684" y="1190549"/>
+            <a:ext cx="720437" cy="479987"/>
+          </a:xfrm>
+          <a:prstGeom prst="downArrow">
+            <a:avLst/>
+          </a:prstGeom>
+        </p:spPr>
+        <p:style>
+          <a:lnRef idx="2">
+            <a:schemeClr val="accent1">
+              <a:shade val="15000"/>
+            </a:schemeClr>
+          </a:lnRef>
+          <a:fillRef idx="1">
+            <a:schemeClr val="accent1"/>
+          </a:fillRef>
+          <a:effectRef idx="0">
+            <a:schemeClr val="accent1"/>
+          </a:effectRef>
+          <a:fontRef idx="minor">
+            <a:schemeClr val="lt1"/>
+          </a:fontRef>
+        </p:style>
+        <p:txBody>
+          <a:bodyPr rtlCol="0" anchor="ctr"/>
+          <a:lstStyle/>
+          <a:p>
+            <a:pPr algn="ctr"/>
+            <a:endParaRPr lang="pt-BR"/>
+          </a:p>
+        </p:txBody>
+      </p:sp>
+      <p:pic>
+        <p:nvPicPr>
+          <p:cNvPr id="15" name="Imagem 14" descr="Interface gráfica do usuário, Aplicativo&#10;&#10;O conteúdo gerado por IA pode estar incorreto.">
+            <a:extLst>
+              <a:ext uri="{FF2B5EF4-FFF2-40B4-BE49-F238E27FC236}">
+                <a16:creationId xmlns:a16="http://schemas.microsoft.com/office/drawing/2014/main" id="{F194A1DD-7B4C-DF79-2E70-AB960251B0CA}"/>
+              </a:ext>
+            </a:extLst>
+          </p:cNvPr>
+          <p:cNvPicPr>
+            <a:picLocks noChangeAspect="1"/>
+          </p:cNvPicPr>
+          <p:nvPr/>
+        </p:nvPicPr>
+        <p:blipFill>
+          <a:blip r:embed="rId9">
+            <a:extLst>
+              <a:ext uri="{28A0092B-C50C-407E-A947-70E740481C1C}">
+                <a14:useLocalDpi xmlns:a14="http://schemas.microsoft.com/office/drawing/2010/main" val="0"/>
+              </a:ext>
+            </a:extLst>
+          </a:blip>
+          <a:stretch>
+            <a:fillRect/>
+          </a:stretch>
+        </p:blipFill>
+        <p:spPr>
+          <a:xfrm>
+            <a:off x="5747454" y="4668608"/>
+            <a:ext cx="3392287" cy="1929810"/>
+          </a:xfrm>
+          <a:prstGeom prst="rect">
+            <a:avLst/>
+          </a:prstGeom>
+        </p:spPr>
+      </p:pic>
+      <p:pic>
+        <p:nvPicPr>
+          <p:cNvPr id="20" name="Imagem 19" descr="Interface gráfica do usuário, Aplicativo&#10;&#10;O conteúdo gerado por IA pode estar incorreto.">
+            <a:extLst>
+              <a:ext uri="{FF2B5EF4-FFF2-40B4-BE49-F238E27FC236}">
+                <a16:creationId xmlns:a16="http://schemas.microsoft.com/office/drawing/2014/main" id="{2B0E28D2-0C64-D125-AEFD-FC1854E61519}"/>
+              </a:ext>
+            </a:extLst>
+          </p:cNvPr>
+          <p:cNvPicPr>
+            <a:picLocks noChangeAspect="1"/>
+          </p:cNvPicPr>
+          <p:nvPr/>
+        </p:nvPicPr>
+        <p:blipFill>
+          <a:blip r:embed="rId10">
+            <a:extLst>
+              <a:ext uri="{28A0092B-C50C-407E-A947-70E740481C1C}">
+                <a14:useLocalDpi xmlns:a14="http://schemas.microsoft.com/office/drawing/2010/main" val="0"/>
+              </a:ext>
+            </a:extLst>
+          </a:blip>
+          <a:stretch>
+            <a:fillRect/>
+          </a:stretch>
+        </p:blipFill>
+        <p:spPr>
+          <a:xfrm>
+            <a:off x="1748316" y="2781662"/>
+            <a:ext cx="3557167" cy="2412762"/>
+          </a:xfrm>
+          <a:prstGeom prst="rect">
+            <a:avLst/>
+          </a:prstGeom>
+        </p:spPr>
+      </p:pic>
+      <p:sp>
+        <p:nvSpPr>
+          <p:cNvPr id="25" name="Seta: para Baixo 24">
+            <a:extLst>
+              <a:ext uri="{FF2B5EF4-FFF2-40B4-BE49-F238E27FC236}">
+                <a16:creationId xmlns:a16="http://schemas.microsoft.com/office/drawing/2014/main" id="{A1F3446D-CC5C-A34E-4262-0F4FC276B678}"/>
+              </a:ext>
+            </a:extLst>
+          </p:cNvPr>
+          <p:cNvSpPr/>
+          <p:nvPr/>
+        </p:nvSpPr>
+        <p:spPr>
+          <a:xfrm>
+            <a:off x="8659965" y="2116335"/>
+            <a:ext cx="720437" cy="479987"/>
+          </a:xfrm>
+          <a:prstGeom prst="downArrow">
+            <a:avLst/>
+          </a:prstGeom>
+        </p:spPr>
+        <p:style>
+          <a:lnRef idx="2">
+            <a:schemeClr val="accent1">
+              <a:shade val="15000"/>
+            </a:schemeClr>
+          </a:lnRef>
+          <a:fillRef idx="1">
+            <a:schemeClr val="accent1"/>
+          </a:fillRef>
+          <a:effectRef idx="0">
+            <a:schemeClr val="accent1"/>
+          </a:effectRef>
+          <a:fontRef idx="minor">
+            <a:schemeClr val="lt1"/>
+          </a:fontRef>
+        </p:style>
+        <p:txBody>
+          <a:bodyPr rtlCol="0" anchor="ctr"/>
+          <a:lstStyle/>
+          <a:p>
+            <a:pPr algn="ctr"/>
+            <a:endParaRPr lang="pt-BR"/>
+          </a:p>
+        </p:txBody>
+      </p:sp>
+      <p:sp>
+        <p:nvSpPr>
+          <p:cNvPr id="26" name="Seta: para Baixo 25">
+            <a:extLst>
+              <a:ext uri="{FF2B5EF4-FFF2-40B4-BE49-F238E27FC236}">
+                <a16:creationId xmlns:a16="http://schemas.microsoft.com/office/drawing/2014/main" id="{911F5F86-38FF-EAA5-3C0D-263F3457ED13}"/>
+              </a:ext>
+            </a:extLst>
+          </p:cNvPr>
+          <p:cNvSpPr/>
+          <p:nvPr/>
+        </p:nvSpPr>
+        <p:spPr>
+          <a:xfrm rot="2850865">
+            <a:off x="9108493" y="5276526"/>
+            <a:ext cx="720437" cy="479987"/>
+          </a:xfrm>
+          <a:prstGeom prst="downArrow">
+            <a:avLst/>
+          </a:prstGeom>
+        </p:spPr>
+        <p:style>
+          <a:lnRef idx="2">
+            <a:schemeClr val="accent1">
+              <a:shade val="15000"/>
+            </a:schemeClr>
+          </a:lnRef>
+          <a:fillRef idx="1">
+            <a:schemeClr val="accent1"/>
+          </a:fillRef>
+          <a:effectRef idx="0">
+            <a:schemeClr val="accent1"/>
+          </a:effectRef>
+          <a:fontRef idx="minor">
+            <a:schemeClr val="lt1"/>
+          </a:fontRef>
+        </p:style>
+        <p:txBody>
+          <a:bodyPr rtlCol="0" anchor="ctr"/>
+          <a:lstStyle/>
+          <a:p>
+            <a:pPr algn="ctr"/>
+            <a:endParaRPr lang="pt-BR"/>
+          </a:p>
+        </p:txBody>
+      </p:sp>
+      <p:sp>
+        <p:nvSpPr>
+          <p:cNvPr id="27" name="Seta: para Baixo 26">
+            <a:extLst>
+              <a:ext uri="{FF2B5EF4-FFF2-40B4-BE49-F238E27FC236}">
+                <a16:creationId xmlns:a16="http://schemas.microsoft.com/office/drawing/2014/main" id="{04246C84-9B6C-4AEB-DDF9-B9B63D2F0780}"/>
+              </a:ext>
+            </a:extLst>
+          </p:cNvPr>
+          <p:cNvSpPr/>
+          <p:nvPr/>
+        </p:nvSpPr>
+        <p:spPr>
+          <a:xfrm rot="5400000">
+            <a:off x="5405829" y="3099579"/>
+            <a:ext cx="720437" cy="836386"/>
+          </a:xfrm>
+          <a:prstGeom prst="downArrow">
+            <a:avLst/>
+          </a:prstGeom>
+        </p:spPr>
+        <p:style>
+          <a:lnRef idx="2">
+            <a:schemeClr val="accent1">
+              <a:shade val="15000"/>
+            </a:schemeClr>
+          </a:lnRef>
+          <a:fillRef idx="1">
+            <a:schemeClr val="accent1"/>
+          </a:fillRef>
+          <a:effectRef idx="0">
+            <a:schemeClr val="accent1"/>
+          </a:effectRef>
+          <a:fontRef idx="minor">
+            <a:schemeClr val="lt1"/>
+          </a:fontRef>
+        </p:style>
+        <p:txBody>
+          <a:bodyPr rtlCol="0" anchor="ctr"/>
+          <a:lstStyle/>
+          <a:p>
+            <a:pPr algn="ctr"/>
+            <a:endParaRPr lang="pt-BR"/>
+          </a:p>
+        </p:txBody>
+      </p:sp>
+      <p:sp>
+        <p:nvSpPr>
+          <p:cNvPr id="28" name="CaixaDeTexto 27">
+            <a:extLst>
+              <a:ext uri="{FF2B5EF4-FFF2-40B4-BE49-F238E27FC236}">
+                <a16:creationId xmlns:a16="http://schemas.microsoft.com/office/drawing/2014/main" id="{8966EBD7-81D4-9A5C-09F0-3DB0491EEFBB}"/>
+              </a:ext>
+            </a:extLst>
+          </p:cNvPr>
+          <p:cNvSpPr txBox="1"/>
+          <p:nvPr/>
+        </p:nvSpPr>
+        <p:spPr>
+          <a:xfrm>
+            <a:off x="7896738" y="445564"/>
+            <a:ext cx="1748364" cy="369332"/>
+          </a:xfrm>
+          <a:prstGeom prst="rect">
+            <a:avLst/>
+          </a:prstGeom>
+          <a:noFill/>
+        </p:spPr>
+        <p:txBody>
+          <a:bodyPr wrap="none" rtlCol="0">
+            <a:spAutoFit/>
+          </a:bodyPr>
+          <a:lstStyle/>
+          <a:p>
+            <a:r>
+              <a:rPr lang="pt-BR" dirty="0"/>
+              <a:t>Tela de produtos</a:t>
+            </a:r>
+          </a:p>
+        </p:txBody>
+      </p:sp>
+      <p:sp>
+        <p:nvSpPr>
+          <p:cNvPr id="29" name="CaixaDeTexto 28">
+            <a:extLst>
+              <a:ext uri="{FF2B5EF4-FFF2-40B4-BE49-F238E27FC236}">
+                <a16:creationId xmlns:a16="http://schemas.microsoft.com/office/drawing/2014/main" id="{153801C5-9031-5562-51B8-4101DE8BF41B}"/>
+              </a:ext>
+            </a:extLst>
+          </p:cNvPr>
+          <p:cNvSpPr txBox="1"/>
+          <p:nvPr/>
+        </p:nvSpPr>
+        <p:spPr>
+          <a:xfrm>
+            <a:off x="2035685" y="2462751"/>
+            <a:ext cx="2356286" cy="369332"/>
+          </a:xfrm>
+          <a:prstGeom prst="rect">
+            <a:avLst/>
+          </a:prstGeom>
+          <a:noFill/>
+        </p:spPr>
+        <p:txBody>
+          <a:bodyPr wrap="none" rtlCol="0">
+            <a:spAutoFit/>
+          </a:bodyPr>
+          <a:lstStyle/>
+          <a:p>
+            <a:r>
+              <a:rPr lang="pt-BR" dirty="0"/>
+              <a:t>Tela de editar produtos</a:t>
+            </a:r>
+          </a:p>
+        </p:txBody>
+      </p:sp>
+      <p:sp>
+        <p:nvSpPr>
+          <p:cNvPr id="30" name="CaixaDeTexto 29">
+            <a:extLst>
+              <a:ext uri="{FF2B5EF4-FFF2-40B4-BE49-F238E27FC236}">
+                <a16:creationId xmlns:a16="http://schemas.microsoft.com/office/drawing/2014/main" id="{33D073F4-61B9-EA38-76FA-719186DB71AC}"/>
+              </a:ext>
+            </a:extLst>
+          </p:cNvPr>
+          <p:cNvSpPr txBox="1"/>
+          <p:nvPr/>
+        </p:nvSpPr>
+        <p:spPr>
+          <a:xfrm>
+            <a:off x="6993496" y="2432976"/>
+            <a:ext cx="4352474" cy="369332"/>
+          </a:xfrm>
+          <a:prstGeom prst="rect">
+            <a:avLst/>
+          </a:prstGeom>
+          <a:noFill/>
+        </p:spPr>
+        <p:txBody>
+          <a:bodyPr wrap="none" rtlCol="0">
+            <a:spAutoFit/>
+          </a:bodyPr>
+          <a:lstStyle/>
+          <a:p>
+            <a:r>
+              <a:rPr lang="pt-BR" dirty="0"/>
+              <a:t>O lápis libera opções de cadastro e alteração</a:t>
+            </a:r>
+          </a:p>
+        </p:txBody>
+      </p:sp>
+      <p:sp>
+        <p:nvSpPr>
+          <p:cNvPr id="31" name="CaixaDeTexto 30">
+            <a:extLst>
+              <a:ext uri="{FF2B5EF4-FFF2-40B4-BE49-F238E27FC236}">
+                <a16:creationId xmlns:a16="http://schemas.microsoft.com/office/drawing/2014/main" id="{E1763596-E437-FC09-A2E8-F74D5C74ED32}"/>
+              </a:ext>
+            </a:extLst>
+          </p:cNvPr>
+          <p:cNvSpPr txBox="1"/>
+          <p:nvPr/>
+        </p:nvSpPr>
+        <p:spPr>
+          <a:xfrm>
+            <a:off x="5919828" y="4418416"/>
+            <a:ext cx="1699632" cy="369332"/>
+          </a:xfrm>
+          <a:prstGeom prst="rect">
+            <a:avLst/>
+          </a:prstGeom>
+          <a:noFill/>
+        </p:spPr>
+        <p:txBody>
+          <a:bodyPr wrap="none" rtlCol="0">
+            <a:spAutoFit/>
+          </a:bodyPr>
+          <a:lstStyle/>
+          <a:p>
+            <a:r>
+              <a:rPr lang="pt-BR" dirty="0"/>
+              <a:t>Tela de cadastro</a:t>
+            </a:r>
+          </a:p>
+        </p:txBody>
+      </p:sp>
+      <p:pic>
+        <p:nvPicPr>
+          <p:cNvPr id="33" name="Imagem 32" descr="Interface gráfica do usuário, Aplicativo&#10;&#10;O conteúdo gerado por IA pode estar incorreto.">
+            <a:extLst>
+              <a:ext uri="{FF2B5EF4-FFF2-40B4-BE49-F238E27FC236}">
+                <a16:creationId xmlns:a16="http://schemas.microsoft.com/office/drawing/2014/main" id="{C871BD2A-679D-01F4-5113-5637827B8F67}"/>
+              </a:ext>
+            </a:extLst>
+          </p:cNvPr>
+          <p:cNvPicPr>
+            <a:picLocks noChangeAspect="1"/>
+          </p:cNvPicPr>
+          <p:nvPr/>
+        </p:nvPicPr>
+        <p:blipFill>
+          <a:blip r:embed="rId11">
+            <a:extLst>
+              <a:ext uri="{28A0092B-C50C-407E-A947-70E740481C1C}">
+                <a14:useLocalDpi xmlns:a14="http://schemas.microsoft.com/office/drawing/2010/main" val="0"/>
+              </a:ext>
+            </a:extLst>
+          </a:blip>
+          <a:stretch>
+            <a:fillRect/>
+          </a:stretch>
+        </p:blipFill>
+        <p:spPr>
+          <a:xfrm>
+            <a:off x="7619460" y="780398"/>
+            <a:ext cx="2801449" cy="1323537"/>
+          </a:xfrm>
+          <a:prstGeom prst="rect">
+            <a:avLst/>
+          </a:prstGeom>
+        </p:spPr>
+      </p:pic>
+      <p:pic>
+        <p:nvPicPr>
+          <p:cNvPr id="36" name="Imagem 35">
+            <a:extLst>
+              <a:ext uri="{FF2B5EF4-FFF2-40B4-BE49-F238E27FC236}">
+                <a16:creationId xmlns:a16="http://schemas.microsoft.com/office/drawing/2014/main" id="{A2EE3B87-003C-31DA-8029-4668EFB4E9A2}"/>
+              </a:ext>
+            </a:extLst>
+          </p:cNvPr>
+          <p:cNvPicPr>
+            <a:picLocks noChangeAspect="1"/>
+          </p:cNvPicPr>
+          <p:nvPr/>
+        </p:nvPicPr>
+        <p:blipFill>
+          <a:blip r:embed="rId12">
+            <a:extLst>
+              <a:ext uri="{28A0092B-C50C-407E-A947-70E740481C1C}">
+                <a14:useLocalDpi xmlns:a14="http://schemas.microsoft.com/office/drawing/2010/main" val="0"/>
+              </a:ext>
+            </a:extLst>
+          </a:blip>
+          <a:stretch>
+            <a:fillRect/>
+          </a:stretch>
+        </p:blipFill>
+        <p:spPr>
+          <a:xfrm>
+            <a:off x="3386695" y="1056918"/>
+            <a:ext cx="2537151" cy="1198670"/>
+          </a:xfrm>
+          <a:prstGeom prst="rect">
+            <a:avLst/>
+          </a:prstGeom>
+        </p:spPr>
+      </p:pic>
+      <p:sp>
+        <p:nvSpPr>
+          <p:cNvPr id="37" name="Seta: para Baixo 36">
+            <a:extLst>
+              <a:ext uri="{FF2B5EF4-FFF2-40B4-BE49-F238E27FC236}">
+                <a16:creationId xmlns:a16="http://schemas.microsoft.com/office/drawing/2014/main" id="{B721C91C-2D51-CCB6-95D7-640D1AA19836}"/>
+              </a:ext>
+            </a:extLst>
+          </p:cNvPr>
+          <p:cNvSpPr/>
+          <p:nvPr/>
+        </p:nvSpPr>
+        <p:spPr>
+          <a:xfrm rot="5400000">
+            <a:off x="6064016" y="1190549"/>
+            <a:ext cx="720437" cy="479987"/>
+          </a:xfrm>
+          <a:prstGeom prst="downArrow">
+            <a:avLst/>
+          </a:prstGeom>
+        </p:spPr>
+        <p:style>
+          <a:lnRef idx="2">
+            <a:schemeClr val="accent1">
+              <a:shade val="15000"/>
+            </a:schemeClr>
+          </a:lnRef>
+          <a:fillRef idx="1">
+            <a:schemeClr val="accent1"/>
+          </a:fillRef>
+          <a:effectRef idx="0">
+            <a:schemeClr val="accent1"/>
+          </a:effectRef>
+          <a:fontRef idx="minor">
+            <a:schemeClr val="lt1"/>
+          </a:fontRef>
+        </p:style>
+        <p:txBody>
+          <a:bodyPr rtlCol="0" anchor="ctr"/>
+          <a:lstStyle/>
+          <a:p>
+            <a:pPr algn="ctr"/>
+            <a:endParaRPr lang="pt-BR"/>
+          </a:p>
+        </p:txBody>
+      </p:sp>
+      <p:sp>
+        <p:nvSpPr>
+          <p:cNvPr id="39" name="Seta: para Baixo 38">
+            <a:extLst>
+              <a:ext uri="{FF2B5EF4-FFF2-40B4-BE49-F238E27FC236}">
+                <a16:creationId xmlns:a16="http://schemas.microsoft.com/office/drawing/2014/main" id="{D2F5C4BF-A3A7-D032-D7B1-C38B2F21084B}"/>
+              </a:ext>
+            </a:extLst>
+          </p:cNvPr>
+          <p:cNvSpPr/>
+          <p:nvPr/>
+        </p:nvSpPr>
+        <p:spPr>
+          <a:xfrm rot="13856497">
+            <a:off x="9670132" y="4825198"/>
+            <a:ext cx="720437" cy="479987"/>
+          </a:xfrm>
+          <a:prstGeom prst="downArrow">
+            <a:avLst/>
+          </a:prstGeom>
+        </p:spPr>
+        <p:style>
+          <a:lnRef idx="2">
+            <a:schemeClr val="accent1">
+              <a:shade val="15000"/>
+            </a:schemeClr>
+          </a:lnRef>
+          <a:fillRef idx="1">
+            <a:schemeClr val="accent1"/>
+          </a:fillRef>
+          <a:effectRef idx="0">
+            <a:schemeClr val="accent1"/>
+          </a:effectRef>
+          <a:fontRef idx="minor">
+            <a:schemeClr val="lt1"/>
+          </a:fontRef>
+        </p:style>
+        <p:txBody>
+          <a:bodyPr rtlCol="0" anchor="ctr"/>
+          <a:lstStyle/>
+          <a:p>
+            <a:pPr algn="ctr"/>
+            <a:endParaRPr lang="pt-BR"/>
+          </a:p>
+        </p:txBody>
+      </p:sp>
+      <p:sp>
+        <p:nvSpPr>
+          <p:cNvPr id="40" name="Seta: para Baixo 39">
+            <a:extLst>
+              <a:ext uri="{FF2B5EF4-FFF2-40B4-BE49-F238E27FC236}">
+                <a16:creationId xmlns:a16="http://schemas.microsoft.com/office/drawing/2014/main" id="{AFFFB5C8-4A75-1BAD-37BF-C20C0E4031D1}"/>
+              </a:ext>
+            </a:extLst>
+          </p:cNvPr>
+          <p:cNvSpPr/>
+          <p:nvPr/>
+        </p:nvSpPr>
+        <p:spPr>
+          <a:xfrm rot="16200000">
+            <a:off x="6628491" y="3144574"/>
+            <a:ext cx="720437" cy="777692"/>
+          </a:xfrm>
+          <a:prstGeom prst="downArrow">
+            <a:avLst/>
+          </a:prstGeom>
+        </p:spPr>
+        <p:style>
+          <a:lnRef idx="2">
+            <a:schemeClr val="accent1">
+              <a:shade val="15000"/>
+            </a:schemeClr>
+          </a:lnRef>
+          <a:fillRef idx="1">
+            <a:schemeClr val="accent1"/>
+          </a:fillRef>
+          <a:effectRef idx="0">
+            <a:schemeClr val="accent1"/>
+          </a:effectRef>
+          <a:fontRef idx="minor">
+            <a:schemeClr val="lt1"/>
+          </a:fontRef>
+        </p:style>
+        <p:txBody>
+          <a:bodyPr rtlCol="0" anchor="ctr"/>
+          <a:lstStyle/>
+          <a:p>
+            <a:pPr algn="ctr"/>
+            <a:endParaRPr lang="pt-BR"/>
+          </a:p>
+        </p:txBody>
+      </p:sp>
     </p:spTree>
     <p:extLst>
       <p:ext uri="{BB962C8B-B14F-4D97-AF65-F5344CB8AC3E}">
-        <p14:creationId xmlns:p14="http://schemas.microsoft.com/office/powerpoint/2010/main" val="3403325015"/>
+        <p14:creationId xmlns:p14="http://schemas.microsoft.com/office/powerpoint/2010/main" val="6276868"/>
       </p:ext>
     </p:extLst>
   </p:cSld>
@@ -8670,10 +8615,10 @@
       </p:pic>
       <p:sp>
         <p:nvSpPr>
-          <p:cNvPr id="2" name="CaixaDeTexto 1">
-            <a:extLst>
-              <a:ext uri="{FF2B5EF4-FFF2-40B4-BE49-F238E27FC236}">
-                <a16:creationId xmlns:a16="http://schemas.microsoft.com/office/drawing/2014/main" id="{7F094C35-F076-57E3-285B-9B664512718D}"/>
+          <p:cNvPr id="5" name="CaixaDeTexto 4">
+            <a:extLst>
+              <a:ext uri="{FF2B5EF4-FFF2-40B4-BE49-F238E27FC236}">
+                <a16:creationId xmlns:a16="http://schemas.microsoft.com/office/drawing/2014/main" id="{61FDC6AC-1BEC-5AB8-1A27-461C659F4272}"/>
               </a:ext>
             </a:extLst>
           </p:cNvPr>
@@ -8682,8 +8627,8 @@
         </p:nvSpPr>
         <p:spPr>
           <a:xfrm>
-            <a:off x="535358" y="-24941"/>
-            <a:ext cx="11121284" cy="1077218"/>
+            <a:off x="901304" y="873049"/>
+            <a:ext cx="11121284" cy="3046988"/>
           </a:xfrm>
           <a:prstGeom prst="rect">
             <a:avLst/>
@@ -8702,67 +8647,73 @@
                 <a:latin typeface="Verdana" panose="020B0604030504040204" pitchFamily="34" charset="0"/>
                 <a:ea typeface="Verdana" panose="020B0604030504040204" pitchFamily="34" charset="0"/>
               </a:rPr>
-              <a:t>DIAGRAMA DO CASO DE USO (GERAL)</a:t>
-            </a:r>
+              <a:t>APRESENTAÇAO DO SISTEMA</a:t>
+            </a:r>
+            <a:endParaRPr lang="pt-BR" sz="3200" b="1" dirty="0">
+              <a:ln>
+                <a:solidFill>
+                  <a:sysClr val="windowText" lastClr="000000"/>
+                </a:solidFill>
+              </a:ln>
+              <a:solidFill>
+                <a:srgbClr val="FF0000"/>
+              </a:solidFill>
+              <a:latin typeface="Verdana" panose="020B0604030504040204" pitchFamily="34" charset="0"/>
+              <a:ea typeface="Verdana" panose="020B0604030504040204" pitchFamily="34" charset="0"/>
+            </a:endParaRPr>
           </a:p>
           <a:p>
             <a:pPr algn="ctr"/>
-            <a:r>
-              <a:rPr lang="pt-BR" sz="3200" b="1" dirty="0">
-                <a:ln>
-                  <a:solidFill>
-                    <a:sysClr val="windowText" lastClr="000000"/>
-                  </a:solidFill>
-                </a:ln>
-                <a:solidFill>
-                  <a:srgbClr val="3796FF"/>
-                </a:solidFill>
-                <a:latin typeface="Verdana" panose="020B0604030504040204" pitchFamily="34" charset="0"/>
-                <a:ea typeface="Verdana" panose="020B0604030504040204" pitchFamily="34" charset="0"/>
-              </a:rPr>
-              <a:t>Imagem</a:t>
-            </a:r>
             <a:endParaRPr lang="pt-BR" sz="3200" dirty="0">
               <a:latin typeface="Verdana" panose="020B0604030504040204" pitchFamily="34" charset="0"/>
               <a:ea typeface="Verdana" panose="020B0604030504040204" pitchFamily="34" charset="0"/>
             </a:endParaRPr>
           </a:p>
-        </p:txBody>
-      </p:sp>
-      <p:pic>
-        <p:nvPicPr>
-          <p:cNvPr id="6" name="Imagem 5">
-            <a:extLst>
-              <a:ext uri="{FF2B5EF4-FFF2-40B4-BE49-F238E27FC236}">
-                <a16:creationId xmlns:a16="http://schemas.microsoft.com/office/drawing/2014/main" id="{EB20F1C3-3890-D726-D372-BF0DB68B2F69}"/>
-              </a:ext>
-            </a:extLst>
-          </p:cNvPr>
-          <p:cNvPicPr>
-            <a:picLocks noChangeAspect="1"/>
-          </p:cNvPicPr>
-          <p:nvPr/>
-        </p:nvPicPr>
-        <p:blipFill>
-          <a:blip r:embed="rId7"/>
-          <a:stretch>
-            <a:fillRect/>
-          </a:stretch>
-        </p:blipFill>
-        <p:spPr>
-          <a:xfrm>
-            <a:off x="3619500" y="1052277"/>
-            <a:ext cx="5524500" cy="5397639"/>
-          </a:xfrm>
-          <a:prstGeom prst="rect">
-            <a:avLst/>
-          </a:prstGeom>
-        </p:spPr>
-      </p:pic>
+          <a:p>
+            <a:pPr marL="457200" indent="-457200">
+              <a:buFont typeface="Wingdings" panose="05000000000000000000" pitchFamily="2" charset="2"/>
+              <a:buChar char="Ø"/>
+            </a:pPr>
+            <a:r>
+              <a:rPr lang="pt-BR" sz="3200" dirty="0">
+                <a:latin typeface="Verdana" panose="020B0604030504040204" pitchFamily="34" charset="0"/>
+                <a:ea typeface="Verdana" panose="020B0604030504040204" pitchFamily="34" charset="0"/>
+              </a:rPr>
+              <a:t>Exibir o Sistema;</a:t>
+            </a:r>
+          </a:p>
+          <a:p>
+            <a:pPr marL="457200" indent="-457200">
+              <a:buFont typeface="Wingdings" panose="05000000000000000000" pitchFamily="2" charset="2"/>
+              <a:buChar char="Ø"/>
+            </a:pPr>
+            <a:r>
+              <a:rPr lang="pt-BR" sz="3200" dirty="0">
+                <a:latin typeface="Verdana" panose="020B0604030504040204" pitchFamily="34" charset="0"/>
+                <a:ea typeface="Verdana" panose="020B0604030504040204" pitchFamily="34" charset="0"/>
+              </a:rPr>
+              <a:t>Realizar CRUD no Sistema;</a:t>
+            </a:r>
+          </a:p>
+          <a:p>
+            <a:pPr marL="457200" indent="-457200">
+              <a:buFont typeface="Wingdings" panose="05000000000000000000" pitchFamily="2" charset="2"/>
+              <a:buChar char="Ø"/>
+            </a:pPr>
+            <a:r>
+              <a:rPr lang="pt-BR" sz="3200" dirty="0">
+                <a:latin typeface="Verdana" panose="020B0604030504040204" pitchFamily="34" charset="0"/>
+                <a:ea typeface="Verdana" panose="020B0604030504040204" pitchFamily="34" charset="0"/>
+              </a:rPr>
+              <a:t>Explicar as ações que está sendo realizada no sistema.</a:t>
+            </a:r>
+          </a:p>
+        </p:txBody>
+      </p:sp>
     </p:spTree>
     <p:extLst>
       <p:ext uri="{BB962C8B-B14F-4D97-AF65-F5344CB8AC3E}">
-        <p14:creationId xmlns:p14="http://schemas.microsoft.com/office/powerpoint/2010/main" val="984659062"/>
+        <p14:creationId xmlns:p14="http://schemas.microsoft.com/office/powerpoint/2010/main" val="1025352840"/>
       </p:ext>
     </p:extLst>
   </p:cSld>
@@ -9078,7 +9029,7 @@
           <p:cNvPr id="2" name="CaixaDeTexto 1">
             <a:extLst>
               <a:ext uri="{FF2B5EF4-FFF2-40B4-BE49-F238E27FC236}">
-                <a16:creationId xmlns:a16="http://schemas.microsoft.com/office/drawing/2014/main" id="{3E73C538-7322-D3FE-2D45-F38951041EBE}"/>
+                <a16:creationId xmlns:a16="http://schemas.microsoft.com/office/drawing/2014/main" id="{C8510107-E3C6-DF5A-475A-F560311510F8}"/>
               </a:ext>
             </a:extLst>
           </p:cNvPr>
@@ -9087,8 +9038,8 @@
         </p:nvSpPr>
         <p:spPr>
           <a:xfrm>
-            <a:off x="478160" y="0"/>
-            <a:ext cx="11121284" cy="1077218"/>
+            <a:off x="615428" y="3136612"/>
+            <a:ext cx="11121284" cy="584775"/>
           </a:xfrm>
           <a:prstGeom prst="rect">
             <a:avLst/>
@@ -9100,28 +9051,6 @@
             <a:spAutoFit/>
           </a:bodyPr>
           <a:lstStyle/>
-          <a:p>
-            <a:pPr algn="ctr"/>
-            <a:r>
-              <a:rPr lang="pt-BR" sz="3200" b="1" dirty="0">
-                <a:latin typeface="Verdana" panose="020B0604030504040204" pitchFamily="34" charset="0"/>
-                <a:ea typeface="Verdana" panose="020B0604030504040204" pitchFamily="34" charset="0"/>
-              </a:rPr>
-              <a:t>PROTOTIPAÇÃO DO SISTEMA</a:t>
-            </a:r>
-            <a:endParaRPr lang="pt-BR" sz="3200" b="1" dirty="0">
-              <a:ln>
-                <a:solidFill>
-                  <a:sysClr val="windowText" lastClr="000000"/>
-                </a:solidFill>
-              </a:ln>
-              <a:solidFill>
-                <a:srgbClr val="FF0000"/>
-              </a:solidFill>
-              <a:latin typeface="Verdana" panose="020B0604030504040204" pitchFamily="34" charset="0"/>
-              <a:ea typeface="Verdana" panose="020B0604030504040204" pitchFamily="34" charset="0"/>
-            </a:endParaRPr>
-          </a:p>
           <a:p>
             <a:pPr algn="ctr"/>
             <a:r>
@@ -9132,327 +9061,20 @@
                   </a:solidFill>
                 </a:ln>
                 <a:solidFill>
-                  <a:srgbClr val="3796FF"/>
+                  <a:srgbClr val="FF0000"/>
                 </a:solidFill>
                 <a:latin typeface="Verdana" panose="020B0604030504040204" pitchFamily="34" charset="0"/>
                 <a:ea typeface="Verdana" panose="020B0604030504040204" pitchFamily="34" charset="0"/>
               </a:rPr>
-              <a:t>Imagem</a:t>
-            </a:r>
-            <a:endParaRPr lang="pt-BR" sz="3200" dirty="0">
-              <a:latin typeface="Verdana" panose="020B0604030504040204" pitchFamily="34" charset="0"/>
-              <a:ea typeface="Verdana" panose="020B0604030504040204" pitchFamily="34" charset="0"/>
-            </a:endParaRPr>
-          </a:p>
-        </p:txBody>
-      </p:sp>
-      <p:pic>
-        <p:nvPicPr>
-          <p:cNvPr id="6" name="Imagem 5">
-            <a:extLst>
-              <a:ext uri="{FF2B5EF4-FFF2-40B4-BE49-F238E27FC236}">
-                <a16:creationId xmlns:a16="http://schemas.microsoft.com/office/drawing/2014/main" id="{99049B36-B0B8-2BF6-56CA-C902B40CB24E}"/>
-              </a:ext>
-            </a:extLst>
-          </p:cNvPr>
-          <p:cNvPicPr>
-            <a:picLocks noChangeAspect="1"/>
-          </p:cNvPicPr>
-          <p:nvPr/>
-        </p:nvPicPr>
-        <p:blipFill>
-          <a:blip r:embed="rId7"/>
-          <a:stretch>
-            <a:fillRect/>
-          </a:stretch>
-        </p:blipFill>
-        <p:spPr>
-          <a:xfrm>
-            <a:off x="740380" y="759888"/>
-            <a:ext cx="2376893" cy="2334599"/>
-          </a:xfrm>
-          <a:prstGeom prst="rect">
-            <a:avLst/>
-          </a:prstGeom>
-        </p:spPr>
-      </p:pic>
-      <p:sp>
-        <p:nvSpPr>
-          <p:cNvPr id="16" name="Seta: para Baixo 15">
-            <a:extLst>
-              <a:ext uri="{FF2B5EF4-FFF2-40B4-BE49-F238E27FC236}">
-                <a16:creationId xmlns:a16="http://schemas.microsoft.com/office/drawing/2014/main" id="{33653C01-D0E9-CB21-5E5B-E3E92B036803}"/>
-              </a:ext>
-            </a:extLst>
-          </p:cNvPr>
-          <p:cNvSpPr/>
-          <p:nvPr/>
-        </p:nvSpPr>
-        <p:spPr>
-          <a:xfrm rot="16200000">
-            <a:off x="3505699" y="1734172"/>
-            <a:ext cx="720437" cy="479987"/>
-          </a:xfrm>
-          <a:prstGeom prst="downArrow">
-            <a:avLst/>
-          </a:prstGeom>
-        </p:spPr>
-        <p:style>
-          <a:lnRef idx="2">
-            <a:schemeClr val="accent1">
-              <a:shade val="15000"/>
-            </a:schemeClr>
-          </a:lnRef>
-          <a:fillRef idx="1">
-            <a:schemeClr val="accent1"/>
-          </a:fillRef>
-          <a:effectRef idx="0">
-            <a:schemeClr val="accent1"/>
-          </a:effectRef>
-          <a:fontRef idx="minor">
-            <a:schemeClr val="lt1"/>
-          </a:fontRef>
-        </p:style>
-        <p:txBody>
-          <a:bodyPr rtlCol="0" anchor="ctr"/>
-          <a:lstStyle/>
-          <a:p>
-            <a:pPr algn="ctr"/>
-            <a:endParaRPr lang="pt-BR"/>
-          </a:p>
-        </p:txBody>
-      </p:sp>
-      <p:pic>
-        <p:nvPicPr>
-          <p:cNvPr id="18" name="Imagem 17">
-            <a:extLst>
-              <a:ext uri="{FF2B5EF4-FFF2-40B4-BE49-F238E27FC236}">
-                <a16:creationId xmlns:a16="http://schemas.microsoft.com/office/drawing/2014/main" id="{5D4D68F3-4A55-C368-D8A3-DA4C5CDBE3AE}"/>
-              </a:ext>
-            </a:extLst>
-          </p:cNvPr>
-          <p:cNvPicPr>
-            <a:picLocks noChangeAspect="1"/>
-          </p:cNvPicPr>
-          <p:nvPr/>
-        </p:nvPicPr>
-        <p:blipFill>
-          <a:blip r:embed="rId8"/>
-          <a:stretch>
-            <a:fillRect/>
-          </a:stretch>
-        </p:blipFill>
-        <p:spPr>
-          <a:xfrm>
-            <a:off x="4105911" y="1060445"/>
-            <a:ext cx="4712185" cy="2151967"/>
-          </a:xfrm>
-          <a:prstGeom prst="rect">
-            <a:avLst/>
-          </a:prstGeom>
-        </p:spPr>
-      </p:pic>
-      <p:sp>
-        <p:nvSpPr>
-          <p:cNvPr id="19" name="CaixaDeTexto 18">
-            <a:extLst>
-              <a:ext uri="{FF2B5EF4-FFF2-40B4-BE49-F238E27FC236}">
-                <a16:creationId xmlns:a16="http://schemas.microsoft.com/office/drawing/2014/main" id="{F5EFC4A3-92C5-9029-4002-13DC61649BB7}"/>
-              </a:ext>
-            </a:extLst>
-          </p:cNvPr>
-          <p:cNvSpPr txBox="1"/>
-          <p:nvPr/>
-        </p:nvSpPr>
-        <p:spPr>
-          <a:xfrm>
-            <a:off x="817418" y="453618"/>
-            <a:ext cx="2299855" cy="369332"/>
-          </a:xfrm>
-          <a:prstGeom prst="rect">
-            <a:avLst/>
-          </a:prstGeom>
-          <a:noFill/>
-        </p:spPr>
-        <p:txBody>
-          <a:bodyPr wrap="square" rtlCol="0">
-            <a:spAutoFit/>
-          </a:bodyPr>
-          <a:lstStyle/>
-          <a:p>
-            <a:r>
-              <a:rPr lang="pt-BR" dirty="0"/>
-              <a:t>Tela de login</a:t>
-            </a:r>
-          </a:p>
-        </p:txBody>
-      </p:sp>
-      <p:pic>
-        <p:nvPicPr>
-          <p:cNvPr id="21" name="Imagem 20">
-            <a:extLst>
-              <a:ext uri="{FF2B5EF4-FFF2-40B4-BE49-F238E27FC236}">
-                <a16:creationId xmlns:a16="http://schemas.microsoft.com/office/drawing/2014/main" id="{14FD6BC9-BA16-CFC1-13B2-000666878A63}"/>
-              </a:ext>
-            </a:extLst>
-          </p:cNvPr>
-          <p:cNvPicPr>
-            <a:picLocks noChangeAspect="1"/>
-          </p:cNvPicPr>
-          <p:nvPr/>
-        </p:nvPicPr>
-        <p:blipFill>
-          <a:blip r:embed="rId9"/>
-          <a:stretch>
-            <a:fillRect/>
-          </a:stretch>
-        </p:blipFill>
-        <p:spPr>
-          <a:xfrm>
-            <a:off x="7478652" y="3393205"/>
-            <a:ext cx="4712185" cy="2078392"/>
-          </a:xfrm>
-          <a:prstGeom prst="rect">
-            <a:avLst/>
-          </a:prstGeom>
-        </p:spPr>
-      </p:pic>
-      <p:sp>
-        <p:nvSpPr>
-          <p:cNvPr id="22" name="Seta: para Baixo 21">
-            <a:extLst>
-              <a:ext uri="{FF2B5EF4-FFF2-40B4-BE49-F238E27FC236}">
-                <a16:creationId xmlns:a16="http://schemas.microsoft.com/office/drawing/2014/main" id="{7223E0E0-2A52-20EF-7C9D-1EF8592F7492}"/>
-              </a:ext>
-            </a:extLst>
-          </p:cNvPr>
-          <p:cNvSpPr/>
-          <p:nvPr/>
-        </p:nvSpPr>
-        <p:spPr>
-          <a:xfrm rot="5400000">
-            <a:off x="3034195" y="1734172"/>
-            <a:ext cx="720437" cy="479987"/>
-          </a:xfrm>
-          <a:prstGeom prst="downArrow">
-            <a:avLst/>
-          </a:prstGeom>
-        </p:spPr>
-        <p:style>
-          <a:lnRef idx="2">
-            <a:schemeClr val="accent1">
-              <a:shade val="15000"/>
-            </a:schemeClr>
-          </a:lnRef>
-          <a:fillRef idx="1">
-            <a:schemeClr val="accent1"/>
-          </a:fillRef>
-          <a:effectRef idx="0">
-            <a:schemeClr val="accent1"/>
-          </a:effectRef>
-          <a:fontRef idx="minor">
-            <a:schemeClr val="lt1"/>
-          </a:fontRef>
-        </p:style>
-        <p:txBody>
-          <a:bodyPr rtlCol="0" anchor="ctr"/>
-          <a:lstStyle/>
-          <a:p>
-            <a:pPr algn="ctr"/>
-            <a:endParaRPr lang="pt-BR"/>
-          </a:p>
-        </p:txBody>
-      </p:sp>
-      <p:sp>
-        <p:nvSpPr>
-          <p:cNvPr id="23" name="Seta: Dobrada 22">
-            <a:extLst>
-              <a:ext uri="{FF2B5EF4-FFF2-40B4-BE49-F238E27FC236}">
-                <a16:creationId xmlns:a16="http://schemas.microsoft.com/office/drawing/2014/main" id="{CC3F1E97-D2B9-2506-E42F-C24E470841AF}"/>
-              </a:ext>
-            </a:extLst>
-          </p:cNvPr>
-          <p:cNvSpPr/>
-          <p:nvPr/>
-        </p:nvSpPr>
-        <p:spPr>
-          <a:xfrm rot="5400000">
-            <a:off x="8572181" y="2243874"/>
-            <a:ext cx="1357745" cy="871431"/>
-          </a:xfrm>
-          <a:prstGeom prst="bentArrow">
-            <a:avLst/>
-          </a:prstGeom>
-        </p:spPr>
-        <p:style>
-          <a:lnRef idx="2">
-            <a:schemeClr val="accent1">
-              <a:shade val="15000"/>
-            </a:schemeClr>
-          </a:lnRef>
-          <a:fillRef idx="1">
-            <a:schemeClr val="accent1"/>
-          </a:fillRef>
-          <a:effectRef idx="0">
-            <a:schemeClr val="accent1"/>
-          </a:effectRef>
-          <a:fontRef idx="minor">
-            <a:schemeClr val="lt1"/>
-          </a:fontRef>
-        </p:style>
-        <p:txBody>
-          <a:bodyPr rtlCol="0" anchor="ctr"/>
-          <a:lstStyle/>
-          <a:p>
-            <a:pPr algn="ctr"/>
-            <a:endParaRPr lang="pt-BR">
-              <a:solidFill>
-                <a:schemeClr val="tx1"/>
-              </a:solidFill>
-            </a:endParaRPr>
-          </a:p>
-        </p:txBody>
-      </p:sp>
-      <p:sp>
-        <p:nvSpPr>
-          <p:cNvPr id="24" name="CaixaDeTexto 23">
-            <a:extLst>
-              <a:ext uri="{FF2B5EF4-FFF2-40B4-BE49-F238E27FC236}">
-                <a16:creationId xmlns:a16="http://schemas.microsoft.com/office/drawing/2014/main" id="{CD7E6A42-441A-439B-2704-81018AB89AF0}"/>
-              </a:ext>
-            </a:extLst>
-          </p:cNvPr>
-          <p:cNvSpPr txBox="1"/>
-          <p:nvPr/>
-        </p:nvSpPr>
-        <p:spPr>
-          <a:xfrm>
-            <a:off x="2221671" y="3429000"/>
-            <a:ext cx="3029202" cy="369332"/>
-          </a:xfrm>
-          <a:prstGeom prst="rect">
-            <a:avLst/>
-          </a:prstGeom>
-          <a:noFill/>
-        </p:spPr>
-        <p:txBody>
-          <a:bodyPr wrap="square" rtlCol="0">
-            <a:spAutoFit/>
-          </a:bodyPr>
-          <a:lstStyle/>
-          <a:p>
-            <a:r>
-              <a:rPr lang="pt-BR"/>
-              <a:t>Tela principal</a:t>
-            </a:r>
-            <a:endParaRPr lang="pt-BR" dirty="0"/>
+              <a:t>CONCLUSAO</a:t>
+            </a:r>
           </a:p>
         </p:txBody>
       </p:sp>
     </p:spTree>
     <p:extLst>
       <p:ext uri="{BB962C8B-B14F-4D97-AF65-F5344CB8AC3E}">
-        <p14:creationId xmlns:p14="http://schemas.microsoft.com/office/powerpoint/2010/main" val="6276868"/>
+        <p14:creationId xmlns:p14="http://schemas.microsoft.com/office/powerpoint/2010/main" val="436553731"/>
       </p:ext>
     </p:extLst>
   </p:cSld>
@@ -9768,7 +9390,7 @@
           <p:cNvPr id="5" name="CaixaDeTexto 4">
             <a:extLst>
               <a:ext uri="{FF2B5EF4-FFF2-40B4-BE49-F238E27FC236}">
-                <a16:creationId xmlns:a16="http://schemas.microsoft.com/office/drawing/2014/main" id="{61FDC6AC-1BEC-5AB8-1A27-461C659F4272}"/>
+                <a16:creationId xmlns:a16="http://schemas.microsoft.com/office/drawing/2014/main" id="{450B366E-ADF9-41FB-D956-C09E85EEAAD6}"/>
               </a:ext>
             </a:extLst>
           </p:cNvPr>
@@ -9778,7 +9400,7 @@
         <p:spPr>
           <a:xfrm>
             <a:off x="615428" y="1877856"/>
-            <a:ext cx="11121284" cy="3046988"/>
+            <a:ext cx="11121284" cy="3539430"/>
           </a:xfrm>
           <a:prstGeom prst="rect">
             <a:avLst/>
@@ -9794,23 +9416,19 @@
             <a:pPr algn="ctr"/>
             <a:r>
               <a:rPr lang="pt-BR" sz="3200" b="1" dirty="0">
+                <a:ln>
+                  <a:solidFill>
+                    <a:sysClr val="windowText" lastClr="000000"/>
+                  </a:solidFill>
+                </a:ln>
+                <a:solidFill>
+                  <a:srgbClr val="FF0000"/>
+                </a:solidFill>
                 <a:latin typeface="Verdana" panose="020B0604030504040204" pitchFamily="34" charset="0"/>
                 <a:ea typeface="Verdana" panose="020B0604030504040204" pitchFamily="34" charset="0"/>
               </a:rPr>
-              <a:t>APRESENTAÇAO DO SISTEMA</a:t>
-            </a:r>
-            <a:endParaRPr lang="pt-BR" sz="3200" b="1" dirty="0">
-              <a:ln>
-                <a:solidFill>
-                  <a:sysClr val="windowText" lastClr="000000"/>
-                </a:solidFill>
-              </a:ln>
-              <a:solidFill>
-                <a:srgbClr val="FF0000"/>
-              </a:solidFill>
-              <a:latin typeface="Verdana" panose="020B0604030504040204" pitchFamily="34" charset="0"/>
-              <a:ea typeface="Verdana" panose="020B0604030504040204" pitchFamily="34" charset="0"/>
-            </a:endParaRPr>
+              <a:t>AGRADECIMENTOS</a:t>
+            </a:r>
           </a:p>
           <a:p>
             <a:pPr algn="ctr"/>
@@ -9829,7 +9447,7 @@
                 <a:latin typeface="Verdana" panose="020B0604030504040204" pitchFamily="34" charset="0"/>
                 <a:ea typeface="Verdana" panose="020B0604030504040204" pitchFamily="34" charset="0"/>
               </a:rPr>
-              <a:t>Exibir o Sistema;</a:t>
+              <a:t>Jesus Cristo</a:t>
             </a:r>
           </a:p>
           <a:p>
@@ -9842,7 +9460,7 @@
                 <a:latin typeface="Verdana" panose="020B0604030504040204" pitchFamily="34" charset="0"/>
                 <a:ea typeface="Verdana" panose="020B0604030504040204" pitchFamily="34" charset="0"/>
               </a:rPr>
-              <a:t>Realizar CRUD no Sistema;</a:t>
+              <a:t>Kerry King</a:t>
             </a:r>
           </a:p>
           <a:p>
@@ -9855,7 +9473,33 @@
                 <a:latin typeface="Verdana" panose="020B0604030504040204" pitchFamily="34" charset="0"/>
                 <a:ea typeface="Verdana" panose="020B0604030504040204" pitchFamily="34" charset="0"/>
               </a:rPr>
-              <a:t>Explicar as ações que está sendo realizada no sistema.</a:t>
+              <a:t>Marcio Senhorinha</a:t>
+            </a:r>
+          </a:p>
+          <a:p>
+            <a:pPr marL="457200" indent="-457200">
+              <a:buFont typeface="Wingdings" panose="05000000000000000000" pitchFamily="2" charset="2"/>
+              <a:buChar char="Ø"/>
+            </a:pPr>
+            <a:r>
+              <a:rPr lang="pt-BR" sz="3200" dirty="0">
+                <a:latin typeface="Verdana" panose="020B0604030504040204" pitchFamily="34" charset="0"/>
+                <a:ea typeface="Verdana" panose="020B0604030504040204" pitchFamily="34" charset="0"/>
+              </a:rPr>
+              <a:t>Sérgio Luiz da Silveira</a:t>
+            </a:r>
+          </a:p>
+          <a:p>
+            <a:pPr marL="457200" indent="-457200">
+              <a:buFont typeface="Wingdings" panose="05000000000000000000" pitchFamily="2" charset="2"/>
+              <a:buChar char="Ø"/>
+            </a:pPr>
+            <a:r>
+              <a:rPr lang="pt-BR" sz="3200" dirty="0">
+                <a:latin typeface="Verdana" panose="020B0604030504040204" pitchFamily="34" charset="0"/>
+                <a:ea typeface="Verdana" panose="020B0604030504040204" pitchFamily="34" charset="0"/>
+              </a:rPr>
+              <a:t>Allan Perini</a:t>
             </a:r>
           </a:p>
         </p:txBody>
@@ -9863,7 +9507,7 @@
     </p:spTree>
     <p:extLst>
       <p:ext uri="{BB962C8B-B14F-4D97-AF65-F5344CB8AC3E}">
-        <p14:creationId xmlns:p14="http://schemas.microsoft.com/office/powerpoint/2010/main" val="1025352840"/>
+        <p14:creationId xmlns:p14="http://schemas.microsoft.com/office/powerpoint/2010/main" val="855279719"/>
       </p:ext>
     </p:extLst>
   </p:cSld>
@@ -10464,6 +10108,15 @@
 </file>
 
 <file path=customXml/item1.xml><?xml version="1.0" encoding="utf-8"?>
+<?mso-contentType ?>
+<FormTemplates xmlns="http://schemas.microsoft.com/sharepoint/v3/contenttype/forms">
+  <Display>DocumentLibraryForm</Display>
+  <Edit>DocumentLibraryForm</Edit>
+  <New>DocumentLibraryForm</New>
+</FormTemplates>
+</file>
+
+<file path=customXml/item2.xml><?xml version="1.0" encoding="utf-8"?>
 <ct:contentTypeSchema xmlns:ct="http://schemas.microsoft.com/office/2006/metadata/contentType" xmlns:ma="http://schemas.microsoft.com/office/2006/metadata/properties/metaAttributes" ct:_="" ma:_="" ma:contentTypeName="Documento" ma:contentTypeID="0x0101003014CAD5C0D95047AD87A6CEF9A0ED6F" ma:contentTypeVersion="11" ma:contentTypeDescription="Crie um novo documento." ma:contentTypeScope="" ma:versionID="0eaeb304f0019e33f865282dd94b7faa">
   <xsd:schema xmlns:xsd="http://www.w3.org/2001/XMLSchema" xmlns:xs="http://www.w3.org/2001/XMLSchema" xmlns:p="http://schemas.microsoft.com/office/2006/metadata/properties" xmlns:ns2="230e2427-5d80-4bd2-a9ba-53805cfde8a4" xmlns:ns3="cf5f2b4c-ceff-48b8-acfd-b6c7cb4e26ae" targetNamespace="http://schemas.microsoft.com/office/2006/metadata/properties" ma:root="true" ma:fieldsID="9583cfaf6218e9ef312e531a09f9933a" ns2:_="" ns3:_="">
     <xsd:import namespace="230e2427-5d80-4bd2-a9ba-53805cfde8a4"/>
@@ -10674,15 +10327,6 @@
 </ct:contentTypeSchema>
 </file>
 
-<file path=customXml/item2.xml><?xml version="1.0" encoding="utf-8"?>
-<?mso-contentType ?>
-<FormTemplates xmlns="http://schemas.microsoft.com/sharepoint/v3/contenttype/forms">
-  <Display>DocumentLibraryForm</Display>
-  <Edit>DocumentLibraryForm</Edit>
-  <New>DocumentLibraryForm</New>
-</FormTemplates>
-</file>
-
 <file path=customXml/item3.xml><?xml version="1.0" encoding="utf-8"?>
 <p:properties xmlns:p="http://schemas.microsoft.com/office/2006/metadata/properties" xmlns:xsi="http://www.w3.org/2001/XMLSchema-instance" xmlns:pc="http://schemas.microsoft.com/office/infopath/2007/PartnerControls">
   <documentManagement>
@@ -10702,6 +10346,14 @@
 </file>
 
 <file path=customXml/itemProps1.xml><?xml version="1.0" encoding="utf-8"?>
+<ds:datastoreItem xmlns:ds="http://schemas.openxmlformats.org/officeDocument/2006/customXml" ds:itemID="{954C6406-39F0-4F36-B3D7-F12E598C1962}">
+  <ds:schemaRefs>
+    <ds:schemaRef ds:uri="http://schemas.microsoft.com/sharepoint/v3/contenttype/forms"/>
+  </ds:schemaRefs>
+</ds:datastoreItem>
+</file>
+
+<file path=customXml/itemProps2.xml><?xml version="1.0" encoding="utf-8"?>
 <ds:datastoreItem xmlns:ds="http://schemas.openxmlformats.org/officeDocument/2006/customXml" ds:itemID="{CDCD03E9-41C4-42C6-A5E8-47AC9D6E1F65}">
   <ds:schemaRefs>
     <ds:schemaRef ds:uri="http://schemas.microsoft.com/office/2006/metadata/contentType"/>
@@ -10720,14 +10372,6 @@
 </ds:datastoreItem>
 </file>
 
-<file path=customXml/itemProps2.xml><?xml version="1.0" encoding="utf-8"?>
-<ds:datastoreItem xmlns:ds="http://schemas.openxmlformats.org/officeDocument/2006/customXml" ds:itemID="{954C6406-39F0-4F36-B3D7-F12E598C1962}">
-  <ds:schemaRefs>
-    <ds:schemaRef ds:uri="http://schemas.microsoft.com/sharepoint/v3/contenttype/forms"/>
-  </ds:schemaRefs>
-</ds:datastoreItem>
-</file>
-
 <file path=customXml/itemProps3.xml><?xml version="1.0" encoding="utf-8"?>
 <ds:datastoreItem xmlns:ds="http://schemas.openxmlformats.org/officeDocument/2006/customXml" ds:itemID="{925A2D76-B89D-43D9-81CC-F73DB603259F}">
   <ds:schemaRefs>

--- a/2025_Modelo Apresentação Senai - SA.pptx
+++ b/2025_Modelo Apresentação Senai - SA.pptx
@@ -8033,7 +8033,7 @@
         </p:nvSpPr>
         <p:spPr>
           <a:xfrm>
-            <a:off x="6993496" y="2432976"/>
+            <a:off x="6993495" y="2543716"/>
             <a:ext cx="4352474" cy="369332"/>
           </a:xfrm>
           <a:prstGeom prst="rect">
@@ -10108,15 +10108,6 @@
 </file>
 
 <file path=customXml/item1.xml><?xml version="1.0" encoding="utf-8"?>
-<?mso-contentType ?>
-<FormTemplates xmlns="http://schemas.microsoft.com/sharepoint/v3/contenttype/forms">
-  <Display>DocumentLibraryForm</Display>
-  <Edit>DocumentLibraryForm</Edit>
-  <New>DocumentLibraryForm</New>
-</FormTemplates>
-</file>
-
-<file path=customXml/item2.xml><?xml version="1.0" encoding="utf-8"?>
 <ct:contentTypeSchema xmlns:ct="http://schemas.microsoft.com/office/2006/metadata/contentType" xmlns:ma="http://schemas.microsoft.com/office/2006/metadata/properties/metaAttributes" ct:_="" ma:_="" ma:contentTypeName="Documento" ma:contentTypeID="0x0101003014CAD5C0D95047AD87A6CEF9A0ED6F" ma:contentTypeVersion="11" ma:contentTypeDescription="Crie um novo documento." ma:contentTypeScope="" ma:versionID="0eaeb304f0019e33f865282dd94b7faa">
   <xsd:schema xmlns:xsd="http://www.w3.org/2001/XMLSchema" xmlns:xs="http://www.w3.org/2001/XMLSchema" xmlns:p="http://schemas.microsoft.com/office/2006/metadata/properties" xmlns:ns2="230e2427-5d80-4bd2-a9ba-53805cfde8a4" xmlns:ns3="cf5f2b4c-ceff-48b8-acfd-b6c7cb4e26ae" targetNamespace="http://schemas.microsoft.com/office/2006/metadata/properties" ma:root="true" ma:fieldsID="9583cfaf6218e9ef312e531a09f9933a" ns2:_="" ns3:_="">
     <xsd:import namespace="230e2427-5d80-4bd2-a9ba-53805cfde8a4"/>
@@ -10327,6 +10318,15 @@
 </ct:contentTypeSchema>
 </file>
 
+<file path=customXml/item2.xml><?xml version="1.0" encoding="utf-8"?>
+<?mso-contentType ?>
+<FormTemplates xmlns="http://schemas.microsoft.com/sharepoint/v3/contenttype/forms">
+  <Display>DocumentLibraryForm</Display>
+  <Edit>DocumentLibraryForm</Edit>
+  <New>DocumentLibraryForm</New>
+</FormTemplates>
+</file>
+
 <file path=customXml/item3.xml><?xml version="1.0" encoding="utf-8"?>
 <p:properties xmlns:p="http://schemas.microsoft.com/office/2006/metadata/properties" xmlns:xsi="http://www.w3.org/2001/XMLSchema-instance" xmlns:pc="http://schemas.microsoft.com/office/infopath/2007/PartnerControls">
   <documentManagement>
@@ -10346,14 +10346,6 @@
 </file>
 
 <file path=customXml/itemProps1.xml><?xml version="1.0" encoding="utf-8"?>
-<ds:datastoreItem xmlns:ds="http://schemas.openxmlformats.org/officeDocument/2006/customXml" ds:itemID="{954C6406-39F0-4F36-B3D7-F12E598C1962}">
-  <ds:schemaRefs>
-    <ds:schemaRef ds:uri="http://schemas.microsoft.com/sharepoint/v3/contenttype/forms"/>
-  </ds:schemaRefs>
-</ds:datastoreItem>
-</file>
-
-<file path=customXml/itemProps2.xml><?xml version="1.0" encoding="utf-8"?>
 <ds:datastoreItem xmlns:ds="http://schemas.openxmlformats.org/officeDocument/2006/customXml" ds:itemID="{CDCD03E9-41C4-42C6-A5E8-47AC9D6E1F65}">
   <ds:schemaRefs>
     <ds:schemaRef ds:uri="http://schemas.microsoft.com/office/2006/metadata/contentType"/>
@@ -10372,6 +10364,14 @@
 </ds:datastoreItem>
 </file>
 
+<file path=customXml/itemProps2.xml><?xml version="1.0" encoding="utf-8"?>
+<ds:datastoreItem xmlns:ds="http://schemas.openxmlformats.org/officeDocument/2006/customXml" ds:itemID="{954C6406-39F0-4F36-B3D7-F12E598C1962}">
+  <ds:schemaRefs>
+    <ds:schemaRef ds:uri="http://schemas.microsoft.com/sharepoint/v3/contenttype/forms"/>
+  </ds:schemaRefs>
+</ds:datastoreItem>
+</file>
+
 <file path=customXml/itemProps3.xml><?xml version="1.0" encoding="utf-8"?>
 <ds:datastoreItem xmlns:ds="http://schemas.openxmlformats.org/officeDocument/2006/customXml" ds:itemID="{925A2D76-B89D-43D9-81CC-F73DB603259F}">
   <ds:schemaRefs>

--- a/2025_Modelo Apresentação Senai - SA.pptx
+++ b/2025_Modelo Apresentação Senai - SA.pptx
@@ -5,41 +5,42 @@
     <p:sldMasterId id="2147483648" r:id="rId4"/>
   </p:sldMasterIdLst>
   <p:notesMasterIdLst>
-    <p:notesMasterId r:id="rId15"/>
+    <p:notesMasterId r:id="rId16"/>
   </p:notesMasterIdLst>
   <p:sldIdLst>
     <p:sldId id="256" r:id="rId5"/>
     <p:sldId id="561" r:id="rId6"/>
     <p:sldId id="562" r:id="rId7"/>
-    <p:sldId id="552" r:id="rId8"/>
-    <p:sldId id="557" r:id="rId9"/>
-    <p:sldId id="558" r:id="rId10"/>
-    <p:sldId id="554" r:id="rId11"/>
-    <p:sldId id="559" r:id="rId12"/>
-    <p:sldId id="560" r:id="rId13"/>
-    <p:sldId id="548" r:id="rId14"/>
+    <p:sldId id="563" r:id="rId8"/>
+    <p:sldId id="552" r:id="rId9"/>
+    <p:sldId id="557" r:id="rId10"/>
+    <p:sldId id="558" r:id="rId11"/>
+    <p:sldId id="554" r:id="rId12"/>
+    <p:sldId id="559" r:id="rId13"/>
+    <p:sldId id="560" r:id="rId14"/>
+    <p:sldId id="548" r:id="rId15"/>
   </p:sldIdLst>
   <p:sldSz cx="12192000" cy="6858000"/>
   <p:notesSz cx="6858000" cy="9144000"/>
   <p:embeddedFontLst>
     <p:embeddedFont>
       <p:font typeface="Aharoni" panose="02010803020104030203" pitchFamily="2" charset="-79"/>
-      <p:bold r:id="rId16"/>
+      <p:bold r:id="rId17"/>
     </p:embeddedFont>
     <p:embeddedFont>
       <p:font typeface="Arial Black" panose="020B0A04020102020204" pitchFamily="34" charset="0"/>
-      <p:bold r:id="rId17"/>
+      <p:bold r:id="rId18"/>
     </p:embeddedFont>
     <p:embeddedFont>
       <p:font typeface="Branding Black" panose="00000A00000000000000" charset="0"/>
-      <p:bold r:id="rId18"/>
+      <p:bold r:id="rId19"/>
     </p:embeddedFont>
     <p:embeddedFont>
       <p:font typeface="Verdana" panose="020B0604030504040204" pitchFamily="34" charset="0"/>
-      <p:regular r:id="rId19"/>
-      <p:bold r:id="rId20"/>
-      <p:italic r:id="rId21"/>
-      <p:boldItalic r:id="rId22"/>
+      <p:regular r:id="rId20"/>
+      <p:bold r:id="rId21"/>
+      <p:italic r:id="rId22"/>
+      <p:boldItalic r:id="rId23"/>
     </p:embeddedFont>
   </p:embeddedFontLst>
   <p:defaultTextStyle>
@@ -4670,6 +4671,439 @@
             </a:extLst>
           </p:cNvPr>
           <p:cNvPicPr>
+            <a:picLocks noGrp="1" noRot="1" noChangeAspect="1" noMove="1" noResize="1" noEditPoints="1" noAdjustHandles="1" noChangeArrowheads="1" noChangeShapeType="1" noCrop="1"/>
+          </p:cNvPicPr>
+          <p:nvPr/>
+        </p:nvPicPr>
+        <p:blipFill>
+          <a:blip r:embed="rId2">
+            <a:extLst>
+              <a:ext uri="{96DAC541-7B7A-43D3-8B79-37D633B846F1}">
+                <asvg:svgBlip xmlns:asvg="http://schemas.microsoft.com/office/drawing/2016/SVG/main" r:embed="rId3"/>
+              </a:ext>
+            </a:extLst>
+          </a:blip>
+          <a:stretch>
+            <a:fillRect/>
+          </a:stretch>
+        </p:blipFill>
+        <p:spPr>
+          <a:xfrm>
+            <a:off x="11304109" y="345653"/>
+            <a:ext cx="590670" cy="414236"/>
+          </a:xfrm>
+          <a:prstGeom prst="rect">
+            <a:avLst/>
+          </a:prstGeom>
+        </p:spPr>
+      </p:pic>
+      <p:sp>
+        <p:nvSpPr>
+          <p:cNvPr id="9" name="CaixaDeTexto 8">
+            <a:extLst>
+              <a:ext uri="{FF2B5EF4-FFF2-40B4-BE49-F238E27FC236}">
+                <a16:creationId xmlns:a16="http://schemas.microsoft.com/office/drawing/2014/main" id="{C3FF65A0-369C-D42D-38F3-4267C6F783A8}"/>
+              </a:ext>
+            </a:extLst>
+          </p:cNvPr>
+          <p:cNvSpPr txBox="1"/>
+          <p:nvPr/>
+        </p:nvSpPr>
+        <p:spPr>
+          <a:xfrm>
+            <a:off x="169412" y="6436585"/>
+            <a:ext cx="3456512" cy="307777"/>
+          </a:xfrm>
+          <a:prstGeom prst="rect">
+            <a:avLst/>
+          </a:prstGeom>
+          <a:noFill/>
+        </p:spPr>
+        <p:txBody>
+          <a:bodyPr wrap="square" rtlCol="0">
+            <a:spAutoFit/>
+          </a:bodyPr>
+          <a:lstStyle/>
+          <a:p>
+            <a:pPr algn="just"/>
+            <a:r>
+              <a:rPr lang="pt-BR" sz="1400" b="1" dirty="0">
+                <a:solidFill>
+                  <a:srgbClr val="005CA8"/>
+                </a:solidFill>
+                <a:latin typeface="Branding Black" panose="00000A00000000000000" pitchFamily="50" charset="0"/>
+              </a:rPr>
+              <a:t>Prof.s3rgio@gmail.com</a:t>
+            </a:r>
+          </a:p>
+        </p:txBody>
+      </p:sp>
+      <p:grpSp>
+        <p:nvGrpSpPr>
+          <p:cNvPr id="12" name="Agrupar 11">
+            <a:extLst>
+              <a:ext uri="{FF2B5EF4-FFF2-40B4-BE49-F238E27FC236}">
+                <a16:creationId xmlns:a16="http://schemas.microsoft.com/office/drawing/2014/main" id="{CC5EF651-2DA5-0E70-EFF7-9488FEEFB47A}"/>
+              </a:ext>
+            </a:extLst>
+          </p:cNvPr>
+          <p:cNvGrpSpPr>
+            <a:grpSpLocks noGrp="1" noUngrp="1" noRot="1" noMove="1" noResize="1"/>
+          </p:cNvGrpSpPr>
+          <p:nvPr/>
+        </p:nvGrpSpPr>
+        <p:grpSpPr>
+          <a:xfrm>
+            <a:off x="6096000" y="5838415"/>
+            <a:ext cx="6096000" cy="1143000"/>
+            <a:chOff x="6096000" y="5838415"/>
+            <a:chExt cx="6096000" cy="1143000"/>
+          </a:xfrm>
+        </p:grpSpPr>
+        <p:sp>
+          <p:nvSpPr>
+            <p:cNvPr id="7" name="Retângulo 6">
+              <a:extLst>
+                <a:ext uri="{FF2B5EF4-FFF2-40B4-BE49-F238E27FC236}">
+                  <a16:creationId xmlns:a16="http://schemas.microsoft.com/office/drawing/2014/main" id="{728628C8-8C44-0CBC-DF6C-CEC9E1371D2D}"/>
+                </a:ext>
+              </a:extLst>
+            </p:cNvPr>
+            <p:cNvSpPr>
+              <a:spLocks noGrp="1" noRot="1" noMove="1" noResize="1" noEditPoints="1" noAdjustHandles="1" noChangeArrowheads="1" noChangeShapeType="1"/>
+            </p:cNvSpPr>
+            <p:nvPr/>
+          </p:nvSpPr>
+          <p:spPr>
+            <a:xfrm>
+              <a:off x="6096000" y="6675368"/>
+              <a:ext cx="6096000" cy="182632"/>
+            </a:xfrm>
+            <a:prstGeom prst="rect">
+              <a:avLst/>
+            </a:prstGeom>
+            <a:solidFill>
+              <a:srgbClr val="005CA8"/>
+            </a:solidFill>
+            <a:ln>
+              <a:noFill/>
+            </a:ln>
+          </p:spPr>
+          <p:style>
+            <a:lnRef idx="2">
+              <a:schemeClr val="accent1">
+                <a:shade val="50000"/>
+              </a:schemeClr>
+            </a:lnRef>
+            <a:fillRef idx="1">
+              <a:schemeClr val="accent1"/>
+            </a:fillRef>
+            <a:effectRef idx="0">
+              <a:schemeClr val="accent1"/>
+            </a:effectRef>
+            <a:fontRef idx="minor">
+              <a:schemeClr val="lt1"/>
+            </a:fontRef>
+          </p:style>
+          <p:txBody>
+            <a:bodyPr rtlCol="0" anchor="ctr"/>
+            <a:lstStyle/>
+            <a:p>
+              <a:pPr algn="ctr"/>
+              <a:endParaRPr lang="pt-BR">
+                <a:solidFill>
+                  <a:srgbClr val="14143C"/>
+                </a:solidFill>
+              </a:endParaRPr>
+            </a:p>
+          </p:txBody>
+        </p:sp>
+        <p:pic>
+          <p:nvPicPr>
+            <p:cNvPr id="2050" name="Picture 2" descr="FIESC">
+              <a:extLst>
+                <a:ext uri="{FF2B5EF4-FFF2-40B4-BE49-F238E27FC236}">
+                  <a16:creationId xmlns:a16="http://schemas.microsoft.com/office/drawing/2014/main" id="{1A67935A-584C-E520-7BC5-40CB572B176A}"/>
+                </a:ext>
+              </a:extLst>
+            </p:cNvPr>
+            <p:cNvPicPr>
+              <a:picLocks noGrp="1" noRot="1" noChangeAspect="1" noMove="1" noResize="1" noEditPoints="1" noAdjustHandles="1" noChangeArrowheads="1" noChangeShapeType="1" noCrop="1"/>
+            </p:cNvPicPr>
+            <p:nvPr/>
+          </p:nvPicPr>
+          <p:blipFill>
+            <a:blip r:embed="rId4">
+              <a:extLst>
+                <a:ext uri="{28A0092B-C50C-407E-A947-70E740481C1C}">
+                  <a14:useLocalDpi xmlns:a14="http://schemas.microsoft.com/office/drawing/2010/main" val="0"/>
+                </a:ext>
+              </a:extLst>
+            </a:blip>
+            <a:srcRect/>
+            <a:stretch>
+              <a:fillRect/>
+            </a:stretch>
+          </p:blipFill>
+          <p:spPr bwMode="auto">
+            <a:xfrm>
+              <a:off x="9888988" y="5838415"/>
+              <a:ext cx="2133600" cy="1143000"/>
+            </a:xfrm>
+            <a:prstGeom prst="rect">
+              <a:avLst/>
+            </a:prstGeom>
+            <a:noFill/>
+            <a:extLst>
+              <a:ext uri="{909E8E84-426E-40DD-AFC4-6F175D3DCCD1}">
+                <a14:hiddenFill xmlns:a14="http://schemas.microsoft.com/office/drawing/2010/main">
+                  <a:solidFill>
+                    <a:srgbClr val="FFFFFF"/>
+                  </a:solidFill>
+                </a14:hiddenFill>
+              </a:ext>
+            </a:extLst>
+          </p:spPr>
+        </p:pic>
+        <p:sp>
+          <p:nvSpPr>
+            <p:cNvPr id="11" name="CaixaDeTexto 10">
+              <a:extLst>
+                <a:ext uri="{FF2B5EF4-FFF2-40B4-BE49-F238E27FC236}">
+                  <a16:creationId xmlns:a16="http://schemas.microsoft.com/office/drawing/2014/main" id="{1936E23A-FA9B-49C2-6A13-B4C678B63766}"/>
+                </a:ext>
+              </a:extLst>
+            </p:cNvPr>
+            <p:cNvSpPr txBox="1">
+              <a:spLocks noGrp="1" noRot="1" noMove="1" noResize="1" noEditPoints="1" noAdjustHandles="1" noChangeArrowheads="1" noChangeShapeType="1"/>
+            </p:cNvSpPr>
+            <p:nvPr/>
+          </p:nvSpPr>
+          <p:spPr>
+            <a:xfrm>
+              <a:off x="10167827" y="6628184"/>
+              <a:ext cx="1575921" cy="276999"/>
+            </a:xfrm>
+            <a:prstGeom prst="rect">
+              <a:avLst/>
+            </a:prstGeom>
+            <a:noFill/>
+          </p:spPr>
+          <p:txBody>
+            <a:bodyPr wrap="square" rtlCol="0">
+              <a:spAutoFit/>
+            </a:bodyPr>
+            <a:lstStyle/>
+            <a:p>
+              <a:r>
+                <a:rPr lang="pt-BR" sz="1200" b="1" i="1" dirty="0">
+                  <a:solidFill>
+                    <a:schemeClr val="bg1"/>
+                  </a:solidFill>
+                  <a:latin typeface="Aharoni" panose="02010803020104030203" pitchFamily="2" charset="-79"/>
+                  <a:cs typeface="Aharoni" panose="02010803020104030203" pitchFamily="2" charset="-79"/>
+                </a:rPr>
+                <a:t>SESI – SENAI - IEL</a:t>
+              </a:r>
+            </a:p>
+          </p:txBody>
+        </p:sp>
+      </p:grpSp>
+      <p:pic>
+        <p:nvPicPr>
+          <p:cNvPr id="4" name="Gráfico 3">
+            <a:extLst>
+              <a:ext uri="{FF2B5EF4-FFF2-40B4-BE49-F238E27FC236}">
+                <a16:creationId xmlns:a16="http://schemas.microsoft.com/office/drawing/2014/main" id="{13C881EA-D14C-496A-470D-88F74C42C6B0}"/>
+              </a:ext>
+            </a:extLst>
+          </p:cNvPr>
+          <p:cNvPicPr>
+            <a:picLocks noGrp="1" noRot="1" noChangeAspect="1" noMove="1" noResize="1" noEditPoints="1" noAdjustHandles="1" noChangeArrowheads="1" noChangeShapeType="1" noCrop="1"/>
+          </p:cNvPicPr>
+          <p:nvPr/>
+        </p:nvPicPr>
+        <p:blipFill>
+          <a:blip r:embed="rId5">
+            <a:extLst>
+              <a:ext uri="{96DAC541-7B7A-43D3-8B79-37D633B846F1}">
+                <asvg:svgBlip xmlns:asvg="http://schemas.microsoft.com/office/drawing/2016/SVG/main" r:embed="rId6"/>
+              </a:ext>
+            </a:extLst>
+          </a:blip>
+          <a:stretch>
+            <a:fillRect/>
+          </a:stretch>
+        </p:blipFill>
+        <p:spPr>
+          <a:xfrm>
+            <a:off x="1163" y="187683"/>
+            <a:ext cx="614265" cy="4244718"/>
+          </a:xfrm>
+          <a:prstGeom prst="rect">
+            <a:avLst/>
+          </a:prstGeom>
+        </p:spPr>
+      </p:pic>
+      <p:sp>
+        <p:nvSpPr>
+          <p:cNvPr id="5" name="CaixaDeTexto 4">
+            <a:extLst>
+              <a:ext uri="{FF2B5EF4-FFF2-40B4-BE49-F238E27FC236}">
+                <a16:creationId xmlns:a16="http://schemas.microsoft.com/office/drawing/2014/main" id="{450B366E-ADF9-41FB-D956-C09E85EEAAD6}"/>
+              </a:ext>
+            </a:extLst>
+          </p:cNvPr>
+          <p:cNvSpPr txBox="1"/>
+          <p:nvPr/>
+        </p:nvSpPr>
+        <p:spPr>
+          <a:xfrm>
+            <a:off x="615428" y="1877856"/>
+            <a:ext cx="11121284" cy="3539430"/>
+          </a:xfrm>
+          <a:prstGeom prst="rect">
+            <a:avLst/>
+          </a:prstGeom>
+          <a:noFill/>
+        </p:spPr>
+        <p:txBody>
+          <a:bodyPr wrap="square" rtlCol="0">
+            <a:spAutoFit/>
+          </a:bodyPr>
+          <a:lstStyle/>
+          <a:p>
+            <a:pPr algn="ctr"/>
+            <a:r>
+              <a:rPr lang="pt-BR" sz="3200" b="1" dirty="0">
+                <a:ln>
+                  <a:solidFill>
+                    <a:sysClr val="windowText" lastClr="000000"/>
+                  </a:solidFill>
+                </a:ln>
+                <a:solidFill>
+                  <a:srgbClr val="FF0000"/>
+                </a:solidFill>
+                <a:latin typeface="Verdana" panose="020B0604030504040204" pitchFamily="34" charset="0"/>
+                <a:ea typeface="Verdana" panose="020B0604030504040204" pitchFamily="34" charset="0"/>
+              </a:rPr>
+              <a:t>AGRADECIMENTOS</a:t>
+            </a:r>
+          </a:p>
+          <a:p>
+            <a:pPr algn="ctr"/>
+            <a:endParaRPr lang="pt-BR" sz="3200" dirty="0">
+              <a:latin typeface="Verdana" panose="020B0604030504040204" pitchFamily="34" charset="0"/>
+              <a:ea typeface="Verdana" panose="020B0604030504040204" pitchFamily="34" charset="0"/>
+            </a:endParaRPr>
+          </a:p>
+          <a:p>
+            <a:pPr marL="457200" indent="-457200">
+              <a:buFont typeface="Wingdings" panose="05000000000000000000" pitchFamily="2" charset="2"/>
+              <a:buChar char="Ø"/>
+            </a:pPr>
+            <a:r>
+              <a:rPr lang="pt-BR" sz="3200" dirty="0">
+                <a:latin typeface="Verdana" panose="020B0604030504040204" pitchFamily="34" charset="0"/>
+                <a:ea typeface="Verdana" panose="020B0604030504040204" pitchFamily="34" charset="0"/>
+              </a:rPr>
+              <a:t>Jesus Cristo</a:t>
+            </a:r>
+          </a:p>
+          <a:p>
+            <a:pPr marL="457200" indent="-457200">
+              <a:buFont typeface="Wingdings" panose="05000000000000000000" pitchFamily="2" charset="2"/>
+              <a:buChar char="Ø"/>
+            </a:pPr>
+            <a:r>
+              <a:rPr lang="pt-BR" sz="3200" dirty="0">
+                <a:latin typeface="Verdana" panose="020B0604030504040204" pitchFamily="34" charset="0"/>
+                <a:ea typeface="Verdana" panose="020B0604030504040204" pitchFamily="34" charset="0"/>
+              </a:rPr>
+              <a:t>Kerry King</a:t>
+            </a:r>
+          </a:p>
+          <a:p>
+            <a:pPr marL="457200" indent="-457200">
+              <a:buFont typeface="Wingdings" panose="05000000000000000000" pitchFamily="2" charset="2"/>
+              <a:buChar char="Ø"/>
+            </a:pPr>
+            <a:r>
+              <a:rPr lang="pt-BR" sz="3200" dirty="0">
+                <a:latin typeface="Verdana" panose="020B0604030504040204" pitchFamily="34" charset="0"/>
+                <a:ea typeface="Verdana" panose="020B0604030504040204" pitchFamily="34" charset="0"/>
+              </a:rPr>
+              <a:t>Marcio Senhorinha</a:t>
+            </a:r>
+          </a:p>
+          <a:p>
+            <a:pPr marL="457200" indent="-457200">
+              <a:buFont typeface="Wingdings" panose="05000000000000000000" pitchFamily="2" charset="2"/>
+              <a:buChar char="Ø"/>
+            </a:pPr>
+            <a:r>
+              <a:rPr lang="pt-BR" sz="3200" dirty="0">
+                <a:latin typeface="Verdana" panose="020B0604030504040204" pitchFamily="34" charset="0"/>
+                <a:ea typeface="Verdana" panose="020B0604030504040204" pitchFamily="34" charset="0"/>
+              </a:rPr>
+              <a:t>Sérgio Luiz da Silveira</a:t>
+            </a:r>
+          </a:p>
+          <a:p>
+            <a:pPr marL="457200" indent="-457200">
+              <a:buFont typeface="Wingdings" panose="05000000000000000000" pitchFamily="2" charset="2"/>
+              <a:buChar char="Ø"/>
+            </a:pPr>
+            <a:r>
+              <a:rPr lang="pt-BR" sz="3200" dirty="0">
+                <a:latin typeface="Verdana" panose="020B0604030504040204" pitchFamily="34" charset="0"/>
+                <a:ea typeface="Verdana" panose="020B0604030504040204" pitchFamily="34" charset="0"/>
+              </a:rPr>
+              <a:t>Allan Perini</a:t>
+            </a:r>
+          </a:p>
+        </p:txBody>
+      </p:sp>
+    </p:spTree>
+    <p:extLst>
+      <p:ext uri="{BB962C8B-B14F-4D97-AF65-F5344CB8AC3E}">
+        <p14:creationId xmlns:p14="http://schemas.microsoft.com/office/powerpoint/2010/main" val="855279719"/>
+      </p:ext>
+    </p:extLst>
+  </p:cSld>
+  <p:clrMapOvr>
+    <a:masterClrMapping/>
+  </p:clrMapOvr>
+</p:sld>
+</file>
+
+<file path=ppt/slides/slide11.xml><?xml version="1.0" encoding="utf-8"?>
+<p:sld xmlns:a="http://schemas.openxmlformats.org/drawingml/2006/main" xmlns:r="http://schemas.openxmlformats.org/officeDocument/2006/relationships" xmlns:p="http://schemas.openxmlformats.org/presentationml/2006/main">
+  <p:cSld>
+    <p:spTree>
+      <p:nvGrpSpPr>
+        <p:cNvPr id="1" name=""/>
+        <p:cNvGrpSpPr/>
+        <p:nvPr/>
+      </p:nvGrpSpPr>
+      <p:grpSpPr>
+        <a:xfrm>
+          <a:off x="0" y="0"/>
+          <a:ext cx="0" cy="0"/>
+          <a:chOff x="0" y="0"/>
+          <a:chExt cx="0" cy="0"/>
+        </a:xfrm>
+      </p:grpSpPr>
+      <p:pic>
+        <p:nvPicPr>
+          <p:cNvPr id="3" name="Gráfico 2">
+            <a:extLst>
+              <a:ext uri="{FF2B5EF4-FFF2-40B4-BE49-F238E27FC236}">
+                <a16:creationId xmlns:a16="http://schemas.microsoft.com/office/drawing/2014/main" id="{12EA250C-B730-2CEB-9B63-8093001D4F43}"/>
+              </a:ext>
+            </a:extLst>
+          </p:cNvPr>
+          <p:cNvPicPr>
             <a:picLocks noChangeAspect="1"/>
           </p:cNvPicPr>
           <p:nvPr/>
@@ -6210,7 +6644,7 @@
         <p:spPr>
           <a:xfrm>
             <a:off x="1234206" y="1237048"/>
-            <a:ext cx="10365238" cy="2062103"/>
+            <a:ext cx="10365238" cy="4031873"/>
           </a:xfrm>
           <a:prstGeom prst="rect">
             <a:avLst/>
@@ -6224,12 +6658,29 @@
           <a:lstStyle/>
           <a:p>
             <a:r>
-              <a:rPr lang="pt-BR" sz="3200" dirty="0">
+              <a:rPr lang="pt-BR" sz="3200" b="0" i="0" u="none" strike="noStrike" dirty="0">
+                <a:solidFill>
+                  <a:srgbClr val="000000"/>
+                </a:solidFill>
+                <a:effectLst/>
                 <a:latin typeface="Verdana" panose="020B0604030504040204" pitchFamily="34" charset="0"/>
-                <a:ea typeface="Verdana" panose="020B0604030504040204" pitchFamily="34" charset="0"/>
               </a:rPr>
-              <a:t>A Padaria do Alemão, fundada há mais de 95 anos, é uma referência local que oferece pães, bolos e diversos produtos de café, mantendo receitas tradicionais e atendimento de qualidade.</a:t>
-            </a:r>
+              <a:t>O sistema foi desenvolvido para a Padaria do Alemão, tradicional há mais de 95 anos, com o objetivo de modernizar a gestão e otimizar os processos internos. O crescimento do negócio trouxe dificuldades, como falhas no controle de estoque, perda de informações de fornecedores e dependência de registros manuais em cadernos, o que comprometia a organização e a eficiência.</a:t>
+            </a:r>
+            <a:r>
+              <a:rPr lang="pt-BR" sz="3200" b="0" i="0" dirty="0">
+                <a:solidFill>
+                  <a:srgbClr val="000000"/>
+                </a:solidFill>
+                <a:effectLst/>
+                <a:latin typeface="Verdana" panose="020B0604030504040204" pitchFamily="34" charset="0"/>
+              </a:rPr>
+              <a:t>​</a:t>
+            </a:r>
+            <a:endParaRPr lang="pt-BR" sz="3200" dirty="0">
+              <a:latin typeface="Verdana" panose="020B0604030504040204" pitchFamily="34" charset="0"/>
+              <a:ea typeface="Verdana" panose="020B0604030504040204" pitchFamily="34" charset="0"/>
+            </a:endParaRPr>
           </a:p>
         </p:txBody>
       </p:sp>
@@ -6588,10 +7039,10 @@
       </p:pic>
       <p:sp>
         <p:nvSpPr>
-          <p:cNvPr id="5" name="CaixaDeTexto 4">
-            <a:extLst>
-              <a:ext uri="{FF2B5EF4-FFF2-40B4-BE49-F238E27FC236}">
-                <a16:creationId xmlns:a16="http://schemas.microsoft.com/office/drawing/2014/main" id="{B0BFF9FC-13A5-2497-E5D0-DB508CE1327B}"/>
+          <p:cNvPr id="6" name="CaixaDeTexto 5">
+            <a:extLst>
+              <a:ext uri="{FF2B5EF4-FFF2-40B4-BE49-F238E27FC236}">
+                <a16:creationId xmlns:a16="http://schemas.microsoft.com/office/drawing/2014/main" id="{9229632F-8D90-6195-9CDD-F470141FAAC6}"/>
               </a:ext>
             </a:extLst>
           </p:cNvPr>
@@ -6600,8 +7051,8 @@
         </p:nvSpPr>
         <p:spPr>
           <a:xfrm>
-            <a:off x="132099" y="118838"/>
-            <a:ext cx="11121284" cy="1077218"/>
+            <a:off x="1234206" y="1237048"/>
+            <a:ext cx="10365238" cy="4524315"/>
           </a:xfrm>
           <a:prstGeom prst="rect">
             <a:avLst/>
@@ -6609,89 +7060,42 @@
           <a:noFill/>
         </p:spPr>
         <p:txBody>
-          <a:bodyPr wrap="square" rtlCol="0">
+          <a:bodyPr wrap="square">
             <a:spAutoFit/>
           </a:bodyPr>
           <a:lstStyle/>
           <a:p>
-            <a:pPr algn="ctr"/>
-            <a:r>
-              <a:rPr lang="pt-BR" sz="3200" b="1" dirty="0">
+            <a:r>
+              <a:rPr lang="pt-BR" sz="3200" b="0" i="0" u="none" strike="noStrike" dirty="0">
+                <a:solidFill>
+                  <a:srgbClr val="000000"/>
+                </a:solidFill>
+                <a:effectLst/>
                 <a:latin typeface="Verdana" panose="020B0604030504040204" pitchFamily="34" charset="0"/>
-                <a:ea typeface="Verdana" panose="020B0604030504040204" pitchFamily="34" charset="0"/>
               </a:rPr>
-              <a:t>BANCO DE DADOS</a:t>
-            </a:r>
-          </a:p>
-          <a:p>
-            <a:pPr algn="ctr"/>
-            <a:r>
-              <a:rPr lang="pt-BR" sz="3200" b="1" dirty="0">
-                <a:ln>
-                  <a:solidFill>
-                    <a:sysClr val="windowText" lastClr="000000"/>
-                  </a:solidFill>
-                </a:ln>
+              <a:t>A solução integra em uma única plataforma recursos como login com níveis de acesso, abertura e fechamento de comandas, controle de pagamentos e cadastro de fornecedores, produtos e funcionários. Além disso, possibilita a gestão do estoque e a geração de relatórios e gráficos por datas específicas, garantindo maior organização, eficiência e confiabilidade às operações da padaria.</a:t>
+            </a:r>
+            <a:r>
+              <a:rPr lang="pt-BR" sz="3200" b="0" i="0" dirty="0">
                 <a:solidFill>
-                  <a:srgbClr val="3796FF"/>
+                  <a:srgbClr val="000000"/>
                 </a:solidFill>
+                <a:effectLst/>
                 <a:latin typeface="Verdana" panose="020B0604030504040204" pitchFamily="34" charset="0"/>
-                <a:ea typeface="Verdana" panose="020B0604030504040204" pitchFamily="34" charset="0"/>
               </a:rPr>
-              <a:t>Imagem do MRN</a:t>
-            </a:r>
-            <a:endParaRPr lang="pt-BR" sz="2800" dirty="0">
+              <a:t>​</a:t>
+            </a:r>
+            <a:endParaRPr lang="pt-BR" sz="3200" dirty="0">
               <a:latin typeface="Verdana" panose="020B0604030504040204" pitchFamily="34" charset="0"/>
               <a:ea typeface="Verdana" panose="020B0604030504040204" pitchFamily="34" charset="0"/>
             </a:endParaRPr>
           </a:p>
         </p:txBody>
       </p:sp>
-      <p:pic>
-        <p:nvPicPr>
-          <p:cNvPr id="2" name="Imagem 1">
-            <a:extLst>
-              <a:ext uri="{FF2B5EF4-FFF2-40B4-BE49-F238E27FC236}">
-                <a16:creationId xmlns:a16="http://schemas.microsoft.com/office/drawing/2014/main" id="{C543C844-D844-BDED-31D7-D6B9D0AD6463}"/>
-              </a:ext>
-            </a:extLst>
-          </p:cNvPr>
-          <p:cNvPicPr>
-            <a:picLocks noChangeAspect="1"/>
-          </p:cNvPicPr>
-          <p:nvPr/>
-        </p:nvPicPr>
-        <p:blipFill>
-          <a:blip r:embed="rId7">
-            <a:extLst>
-              <a:ext uri="{28A0092B-C50C-407E-A947-70E740481C1C}">
-                <a14:useLocalDpi xmlns:a14="http://schemas.microsoft.com/office/drawing/2010/main" val="0"/>
-              </a:ext>
-            </a:extLst>
-          </a:blip>
-          <a:srcRect/>
-          <a:stretch>
-            <a:fillRect/>
-          </a:stretch>
-        </p:blipFill>
-        <p:spPr bwMode="auto">
-          <a:xfrm>
-            <a:off x="1440240" y="1192443"/>
-            <a:ext cx="8505002" cy="4825666"/>
-          </a:xfrm>
-          <a:prstGeom prst="rect">
-            <a:avLst/>
-          </a:prstGeom>
-          <a:noFill/>
-          <a:ln>
-            <a:noFill/>
-          </a:ln>
-        </p:spPr>
-      </p:pic>
     </p:spTree>
     <p:extLst>
       <p:ext uri="{BB962C8B-B14F-4D97-AF65-F5344CB8AC3E}">
-        <p14:creationId xmlns:p14="http://schemas.microsoft.com/office/powerpoint/2010/main" val="3403325015"/>
+        <p14:creationId xmlns:p14="http://schemas.microsoft.com/office/powerpoint/2010/main" val="2508739107"/>
       </p:ext>
     </p:extLst>
   </p:cSld>
@@ -7004,10 +7408,10 @@
       </p:pic>
       <p:sp>
         <p:nvSpPr>
-          <p:cNvPr id="2" name="CaixaDeTexto 1">
-            <a:extLst>
-              <a:ext uri="{FF2B5EF4-FFF2-40B4-BE49-F238E27FC236}">
-                <a16:creationId xmlns:a16="http://schemas.microsoft.com/office/drawing/2014/main" id="{7F094C35-F076-57E3-285B-9B664512718D}"/>
+          <p:cNvPr id="5" name="CaixaDeTexto 4">
+            <a:extLst>
+              <a:ext uri="{FF2B5EF4-FFF2-40B4-BE49-F238E27FC236}">
+                <a16:creationId xmlns:a16="http://schemas.microsoft.com/office/drawing/2014/main" id="{B0BFF9FC-13A5-2497-E5D0-DB508CE1327B}"/>
               </a:ext>
             </a:extLst>
           </p:cNvPr>
@@ -7016,7 +7420,7 @@
         </p:nvSpPr>
         <p:spPr>
           <a:xfrm>
-            <a:off x="535358" y="-24941"/>
+            <a:off x="132099" y="118838"/>
             <a:ext cx="11121284" cy="1077218"/>
           </a:xfrm>
           <a:prstGeom prst="rect">
@@ -7036,7 +7440,7 @@
                 <a:latin typeface="Verdana" panose="020B0604030504040204" pitchFamily="34" charset="0"/>
                 <a:ea typeface="Verdana" panose="020B0604030504040204" pitchFamily="34" charset="0"/>
               </a:rPr>
-              <a:t>DIAGRAMA DO CASO DE USO (GERAL)</a:t>
+              <a:t>BANCO DE DADOS</a:t>
             </a:r>
           </a:p>
           <a:p>
@@ -7054,9 +7458,9 @@
                 <a:latin typeface="Verdana" panose="020B0604030504040204" pitchFamily="34" charset="0"/>
                 <a:ea typeface="Verdana" panose="020B0604030504040204" pitchFamily="34" charset="0"/>
               </a:rPr>
-              <a:t>Imagem</a:t>
-            </a:r>
-            <a:endParaRPr lang="pt-BR" sz="3200" dirty="0">
+              <a:t>Imagem do MRN</a:t>
+            </a:r>
+            <a:endParaRPr lang="pt-BR" sz="2800" dirty="0">
               <a:latin typeface="Verdana" panose="020B0604030504040204" pitchFamily="34" charset="0"/>
               <a:ea typeface="Verdana" panose="020B0604030504040204" pitchFamily="34" charset="0"/>
             </a:endParaRPr>
@@ -7065,10 +7469,10 @@
       </p:sp>
       <p:pic>
         <p:nvPicPr>
-          <p:cNvPr id="6" name="Imagem 5">
-            <a:extLst>
-              <a:ext uri="{FF2B5EF4-FFF2-40B4-BE49-F238E27FC236}">
-                <a16:creationId xmlns:a16="http://schemas.microsoft.com/office/drawing/2014/main" id="{EB20F1C3-3890-D726-D372-BF0DB68B2F69}"/>
+          <p:cNvPr id="2" name="Imagem 1">
+            <a:extLst>
+              <a:ext uri="{FF2B5EF4-FFF2-40B4-BE49-F238E27FC236}">
+                <a16:creationId xmlns:a16="http://schemas.microsoft.com/office/drawing/2014/main" id="{C543C844-D844-BDED-31D7-D6B9D0AD6463}"/>
               </a:ext>
             </a:extLst>
           </p:cNvPr>
@@ -7078,25 +7482,36 @@
           <p:nvPr/>
         </p:nvPicPr>
         <p:blipFill>
-          <a:blip r:embed="rId7"/>
+          <a:blip r:embed="rId7">
+            <a:extLst>
+              <a:ext uri="{28A0092B-C50C-407E-A947-70E740481C1C}">
+                <a14:useLocalDpi xmlns:a14="http://schemas.microsoft.com/office/drawing/2010/main" val="0"/>
+              </a:ext>
+            </a:extLst>
+          </a:blip>
+          <a:srcRect/>
           <a:stretch>
             <a:fillRect/>
           </a:stretch>
         </p:blipFill>
-        <p:spPr>
-          <a:xfrm>
-            <a:off x="3619500" y="1052277"/>
-            <a:ext cx="5524500" cy="5397639"/>
+        <p:spPr bwMode="auto">
+          <a:xfrm>
+            <a:off x="1440240" y="1192443"/>
+            <a:ext cx="8505002" cy="4825666"/>
           </a:xfrm>
           <a:prstGeom prst="rect">
             <a:avLst/>
           </a:prstGeom>
+          <a:noFill/>
+          <a:ln>
+            <a:noFill/>
+          </a:ln>
         </p:spPr>
       </p:pic>
     </p:spTree>
     <p:extLst>
       <p:ext uri="{BB962C8B-B14F-4D97-AF65-F5344CB8AC3E}">
-        <p14:creationId xmlns:p14="http://schemas.microsoft.com/office/powerpoint/2010/main" val="984659062"/>
+        <p14:creationId xmlns:p14="http://schemas.microsoft.com/office/powerpoint/2010/main" val="3403325015"/>
       </p:ext>
     </p:extLst>
   </p:cSld>
@@ -7412,7 +7827,7 @@
           <p:cNvPr id="2" name="CaixaDeTexto 1">
             <a:extLst>
               <a:ext uri="{FF2B5EF4-FFF2-40B4-BE49-F238E27FC236}">
-                <a16:creationId xmlns:a16="http://schemas.microsoft.com/office/drawing/2014/main" id="{3E73C538-7322-D3FE-2D45-F38951041EBE}"/>
+                <a16:creationId xmlns:a16="http://schemas.microsoft.com/office/drawing/2014/main" id="{7F094C35-F076-57E3-285B-9B664512718D}"/>
               </a:ext>
             </a:extLst>
           </p:cNvPr>
@@ -7421,7 +7836,7 @@
         </p:nvSpPr>
         <p:spPr>
           <a:xfrm>
-            <a:off x="615428" y="-41984"/>
+            <a:off x="535358" y="-24941"/>
             <a:ext cx="11121284" cy="1077218"/>
           </a:xfrm>
           <a:prstGeom prst="rect">
@@ -7441,23 +7856,26 @@
                 <a:latin typeface="Verdana" panose="020B0604030504040204" pitchFamily="34" charset="0"/>
                 <a:ea typeface="Verdana" panose="020B0604030504040204" pitchFamily="34" charset="0"/>
               </a:rPr>
-              <a:t>PROTOTIPAÇÃO DO SISTEMA</a:t>
-            </a:r>
-            <a:endParaRPr lang="pt-BR" sz="3200" b="1" dirty="0">
-              <a:ln>
+              <a:t>DIAGRAMA DO CASO DE USO (GERAL)</a:t>
+            </a:r>
+          </a:p>
+          <a:p>
+            <a:pPr algn="ctr"/>
+            <a:r>
+              <a:rPr lang="pt-BR" sz="3200" b="1" dirty="0">
+                <a:ln>
+                  <a:solidFill>
+                    <a:sysClr val="windowText" lastClr="000000"/>
+                  </a:solidFill>
+                </a:ln>
                 <a:solidFill>
-                  <a:sysClr val="windowText" lastClr="000000"/>
+                  <a:srgbClr val="3796FF"/>
                 </a:solidFill>
-              </a:ln>
-              <a:solidFill>
-                <a:srgbClr val="FF0000"/>
-              </a:solidFill>
-              <a:latin typeface="Verdana" panose="020B0604030504040204" pitchFamily="34" charset="0"/>
-              <a:ea typeface="Verdana" panose="020B0604030504040204" pitchFamily="34" charset="0"/>
-            </a:endParaRPr>
-          </a:p>
-          <a:p>
-            <a:pPr algn="ctr"/>
+                <a:latin typeface="Verdana" panose="020B0604030504040204" pitchFamily="34" charset="0"/>
+                <a:ea typeface="Verdana" panose="020B0604030504040204" pitchFamily="34" charset="0"/>
+              </a:rPr>
+              <a:t>Imagem</a:t>
+            </a:r>
             <a:endParaRPr lang="pt-BR" sz="3200" dirty="0">
               <a:latin typeface="Verdana" panose="020B0604030504040204" pitchFamily="34" charset="0"/>
               <a:ea typeface="Verdana" panose="020B0604030504040204" pitchFamily="34" charset="0"/>
@@ -7470,7 +7888,7 @@
           <p:cNvPr id="6" name="Imagem 5">
             <a:extLst>
               <a:ext uri="{FF2B5EF4-FFF2-40B4-BE49-F238E27FC236}">
-                <a16:creationId xmlns:a16="http://schemas.microsoft.com/office/drawing/2014/main" id="{99049B36-B0B8-2BF6-56CA-C902B40CB24E}"/>
+                <a16:creationId xmlns:a16="http://schemas.microsoft.com/office/drawing/2014/main" id="{EB20F1C3-3890-D726-D372-BF0DB68B2F69}"/>
               </a:ext>
             </a:extLst>
           </p:cNvPr>
@@ -7487,822 +7905,18 @@
         </p:blipFill>
         <p:spPr>
           <a:xfrm>
-            <a:off x="681755" y="929867"/>
-            <a:ext cx="1525883" cy="1498732"/>
+            <a:off x="3619500" y="1052277"/>
+            <a:ext cx="5524500" cy="5397639"/>
           </a:xfrm>
           <a:prstGeom prst="rect">
             <a:avLst/>
           </a:prstGeom>
         </p:spPr>
       </p:pic>
-      <p:sp>
-        <p:nvSpPr>
-          <p:cNvPr id="16" name="Seta: para Baixo 15">
-            <a:extLst>
-              <a:ext uri="{FF2B5EF4-FFF2-40B4-BE49-F238E27FC236}">
-                <a16:creationId xmlns:a16="http://schemas.microsoft.com/office/drawing/2014/main" id="{33653C01-D0E9-CB21-5E5B-E3E92B036803}"/>
-              </a:ext>
-            </a:extLst>
-          </p:cNvPr>
-          <p:cNvSpPr/>
-          <p:nvPr/>
-        </p:nvSpPr>
-        <p:spPr>
-          <a:xfrm rot="16200000">
-            <a:off x="2734757" y="1336465"/>
-            <a:ext cx="720437" cy="479987"/>
-          </a:xfrm>
-          <a:prstGeom prst="downArrow">
-            <a:avLst/>
-          </a:prstGeom>
-        </p:spPr>
-        <p:style>
-          <a:lnRef idx="2">
-            <a:schemeClr val="accent1">
-              <a:shade val="15000"/>
-            </a:schemeClr>
-          </a:lnRef>
-          <a:fillRef idx="1">
-            <a:schemeClr val="accent1"/>
-          </a:fillRef>
-          <a:effectRef idx="0">
-            <a:schemeClr val="accent1"/>
-          </a:effectRef>
-          <a:fontRef idx="minor">
-            <a:schemeClr val="lt1"/>
-          </a:fontRef>
-        </p:style>
-        <p:txBody>
-          <a:bodyPr rtlCol="0" anchor="ctr"/>
-          <a:lstStyle/>
-          <a:p>
-            <a:pPr algn="ctr"/>
-            <a:endParaRPr lang="pt-BR"/>
-          </a:p>
-        </p:txBody>
-      </p:sp>
-      <p:sp>
-        <p:nvSpPr>
-          <p:cNvPr id="19" name="CaixaDeTexto 18">
-            <a:extLst>
-              <a:ext uri="{FF2B5EF4-FFF2-40B4-BE49-F238E27FC236}">
-                <a16:creationId xmlns:a16="http://schemas.microsoft.com/office/drawing/2014/main" id="{F5EFC4A3-92C5-9029-4002-13DC61649BB7}"/>
-              </a:ext>
-            </a:extLst>
-          </p:cNvPr>
-          <p:cNvSpPr txBox="1"/>
-          <p:nvPr/>
-        </p:nvSpPr>
-        <p:spPr>
-          <a:xfrm>
-            <a:off x="817418" y="453618"/>
-            <a:ext cx="2299855" cy="369332"/>
-          </a:xfrm>
-          <a:prstGeom prst="rect">
-            <a:avLst/>
-          </a:prstGeom>
-          <a:noFill/>
-        </p:spPr>
-        <p:txBody>
-          <a:bodyPr wrap="square" rtlCol="0">
-            <a:spAutoFit/>
-          </a:bodyPr>
-          <a:lstStyle/>
-          <a:p>
-            <a:r>
-              <a:rPr lang="pt-BR" dirty="0"/>
-              <a:t>Tela de login</a:t>
-            </a:r>
-          </a:p>
-        </p:txBody>
-      </p:sp>
-      <p:sp>
-        <p:nvSpPr>
-          <p:cNvPr id="22" name="Seta: para Baixo 21">
-            <a:extLst>
-              <a:ext uri="{FF2B5EF4-FFF2-40B4-BE49-F238E27FC236}">
-                <a16:creationId xmlns:a16="http://schemas.microsoft.com/office/drawing/2014/main" id="{7223E0E0-2A52-20EF-7C9D-1EF8592F7492}"/>
-              </a:ext>
-            </a:extLst>
-          </p:cNvPr>
-          <p:cNvSpPr/>
-          <p:nvPr/>
-        </p:nvSpPr>
-        <p:spPr>
-          <a:xfrm rot="5400000">
-            <a:off x="2046101" y="1311595"/>
-            <a:ext cx="720437" cy="479987"/>
-          </a:xfrm>
-          <a:prstGeom prst="downArrow">
-            <a:avLst/>
-          </a:prstGeom>
-        </p:spPr>
-        <p:style>
-          <a:lnRef idx="2">
-            <a:schemeClr val="accent1">
-              <a:shade val="15000"/>
-            </a:schemeClr>
-          </a:lnRef>
-          <a:fillRef idx="1">
-            <a:schemeClr val="accent1"/>
-          </a:fillRef>
-          <a:effectRef idx="0">
-            <a:schemeClr val="accent1"/>
-          </a:effectRef>
-          <a:fontRef idx="minor">
-            <a:schemeClr val="lt1"/>
-          </a:fontRef>
-        </p:style>
-        <p:txBody>
-          <a:bodyPr rtlCol="0" anchor="ctr"/>
-          <a:lstStyle/>
-          <a:p>
-            <a:pPr algn="ctr"/>
-            <a:endParaRPr lang="pt-BR"/>
-          </a:p>
-        </p:txBody>
-      </p:sp>
-      <p:sp>
-        <p:nvSpPr>
-          <p:cNvPr id="24" name="CaixaDeTexto 23">
-            <a:extLst>
-              <a:ext uri="{FF2B5EF4-FFF2-40B4-BE49-F238E27FC236}">
-                <a16:creationId xmlns:a16="http://schemas.microsoft.com/office/drawing/2014/main" id="{CD7E6A42-441A-439B-2704-81018AB89AF0}"/>
-              </a:ext>
-            </a:extLst>
-          </p:cNvPr>
-          <p:cNvSpPr txBox="1"/>
-          <p:nvPr/>
-        </p:nvSpPr>
-        <p:spPr>
-          <a:xfrm>
-            <a:off x="3921044" y="670360"/>
-            <a:ext cx="3456512" cy="369332"/>
-          </a:xfrm>
-          <a:prstGeom prst="rect">
-            <a:avLst/>
-          </a:prstGeom>
-          <a:noFill/>
-        </p:spPr>
-        <p:txBody>
-          <a:bodyPr wrap="square" rtlCol="0">
-            <a:spAutoFit/>
-          </a:bodyPr>
-          <a:lstStyle/>
-          <a:p>
-            <a:r>
-              <a:rPr lang="pt-BR" dirty="0"/>
-              <a:t>Tela principal</a:t>
-            </a:r>
-          </a:p>
-        </p:txBody>
-      </p:sp>
-      <p:pic>
-        <p:nvPicPr>
-          <p:cNvPr id="8" name="Imagem 7" descr="Interface gráfica do usuário&#10;&#10;O conteúdo gerado por IA pode estar incorreto.">
-            <a:extLst>
-              <a:ext uri="{FF2B5EF4-FFF2-40B4-BE49-F238E27FC236}">
-                <a16:creationId xmlns:a16="http://schemas.microsoft.com/office/drawing/2014/main" id="{FE171389-6F0C-92EF-0DBB-7DF752810FEE}"/>
-              </a:ext>
-            </a:extLst>
-          </p:cNvPr>
-          <p:cNvPicPr>
-            <a:picLocks noChangeAspect="1"/>
-          </p:cNvPicPr>
-          <p:nvPr/>
-        </p:nvPicPr>
-        <p:blipFill>
-          <a:blip r:embed="rId8">
-            <a:extLst>
-              <a:ext uri="{28A0092B-C50C-407E-A947-70E740481C1C}">
-                <a14:useLocalDpi xmlns:a14="http://schemas.microsoft.com/office/drawing/2010/main" val="0"/>
-              </a:ext>
-            </a:extLst>
-          </a:blip>
-          <a:stretch>
-            <a:fillRect/>
-          </a:stretch>
-        </p:blipFill>
-        <p:spPr>
-          <a:xfrm>
-            <a:off x="7655131" y="2838935"/>
-            <a:ext cx="3029203" cy="1764147"/>
-          </a:xfrm>
-          <a:prstGeom prst="rect">
-            <a:avLst/>
-          </a:prstGeom>
-        </p:spPr>
-      </p:pic>
-      <p:sp>
-        <p:nvSpPr>
-          <p:cNvPr id="13" name="Seta: para Baixo 12">
-            <a:extLst>
-              <a:ext uri="{FF2B5EF4-FFF2-40B4-BE49-F238E27FC236}">
-                <a16:creationId xmlns:a16="http://schemas.microsoft.com/office/drawing/2014/main" id="{2BC410AA-4FDE-DE52-F8BF-94ED8B87EEC0}"/>
-              </a:ext>
-            </a:extLst>
-          </p:cNvPr>
-          <p:cNvSpPr/>
-          <p:nvPr/>
-        </p:nvSpPr>
-        <p:spPr>
-          <a:xfrm rot="16200000">
-            <a:off x="6742684" y="1190549"/>
-            <a:ext cx="720437" cy="479987"/>
-          </a:xfrm>
-          <a:prstGeom prst="downArrow">
-            <a:avLst/>
-          </a:prstGeom>
-        </p:spPr>
-        <p:style>
-          <a:lnRef idx="2">
-            <a:schemeClr val="accent1">
-              <a:shade val="15000"/>
-            </a:schemeClr>
-          </a:lnRef>
-          <a:fillRef idx="1">
-            <a:schemeClr val="accent1"/>
-          </a:fillRef>
-          <a:effectRef idx="0">
-            <a:schemeClr val="accent1"/>
-          </a:effectRef>
-          <a:fontRef idx="minor">
-            <a:schemeClr val="lt1"/>
-          </a:fontRef>
-        </p:style>
-        <p:txBody>
-          <a:bodyPr rtlCol="0" anchor="ctr"/>
-          <a:lstStyle/>
-          <a:p>
-            <a:pPr algn="ctr"/>
-            <a:endParaRPr lang="pt-BR"/>
-          </a:p>
-        </p:txBody>
-      </p:sp>
-      <p:pic>
-        <p:nvPicPr>
-          <p:cNvPr id="15" name="Imagem 14" descr="Interface gráfica do usuário, Aplicativo&#10;&#10;O conteúdo gerado por IA pode estar incorreto.">
-            <a:extLst>
-              <a:ext uri="{FF2B5EF4-FFF2-40B4-BE49-F238E27FC236}">
-                <a16:creationId xmlns:a16="http://schemas.microsoft.com/office/drawing/2014/main" id="{F194A1DD-7B4C-DF79-2E70-AB960251B0CA}"/>
-              </a:ext>
-            </a:extLst>
-          </p:cNvPr>
-          <p:cNvPicPr>
-            <a:picLocks noChangeAspect="1"/>
-          </p:cNvPicPr>
-          <p:nvPr/>
-        </p:nvPicPr>
-        <p:blipFill>
-          <a:blip r:embed="rId9">
-            <a:extLst>
-              <a:ext uri="{28A0092B-C50C-407E-A947-70E740481C1C}">
-                <a14:useLocalDpi xmlns:a14="http://schemas.microsoft.com/office/drawing/2010/main" val="0"/>
-              </a:ext>
-            </a:extLst>
-          </a:blip>
-          <a:stretch>
-            <a:fillRect/>
-          </a:stretch>
-        </p:blipFill>
-        <p:spPr>
-          <a:xfrm>
-            <a:off x="5747454" y="4668608"/>
-            <a:ext cx="3392287" cy="1929810"/>
-          </a:xfrm>
-          <a:prstGeom prst="rect">
-            <a:avLst/>
-          </a:prstGeom>
-        </p:spPr>
-      </p:pic>
-      <p:pic>
-        <p:nvPicPr>
-          <p:cNvPr id="20" name="Imagem 19" descr="Interface gráfica do usuário, Aplicativo&#10;&#10;O conteúdo gerado por IA pode estar incorreto.">
-            <a:extLst>
-              <a:ext uri="{FF2B5EF4-FFF2-40B4-BE49-F238E27FC236}">
-                <a16:creationId xmlns:a16="http://schemas.microsoft.com/office/drawing/2014/main" id="{2B0E28D2-0C64-D125-AEFD-FC1854E61519}"/>
-              </a:ext>
-            </a:extLst>
-          </p:cNvPr>
-          <p:cNvPicPr>
-            <a:picLocks noChangeAspect="1"/>
-          </p:cNvPicPr>
-          <p:nvPr/>
-        </p:nvPicPr>
-        <p:blipFill>
-          <a:blip r:embed="rId10">
-            <a:extLst>
-              <a:ext uri="{28A0092B-C50C-407E-A947-70E740481C1C}">
-                <a14:useLocalDpi xmlns:a14="http://schemas.microsoft.com/office/drawing/2010/main" val="0"/>
-              </a:ext>
-            </a:extLst>
-          </a:blip>
-          <a:stretch>
-            <a:fillRect/>
-          </a:stretch>
-        </p:blipFill>
-        <p:spPr>
-          <a:xfrm>
-            <a:off x="1748316" y="2781662"/>
-            <a:ext cx="3557167" cy="2412762"/>
-          </a:xfrm>
-          <a:prstGeom prst="rect">
-            <a:avLst/>
-          </a:prstGeom>
-        </p:spPr>
-      </p:pic>
-      <p:sp>
-        <p:nvSpPr>
-          <p:cNvPr id="25" name="Seta: para Baixo 24">
-            <a:extLst>
-              <a:ext uri="{FF2B5EF4-FFF2-40B4-BE49-F238E27FC236}">
-                <a16:creationId xmlns:a16="http://schemas.microsoft.com/office/drawing/2014/main" id="{A1F3446D-CC5C-A34E-4262-0F4FC276B678}"/>
-              </a:ext>
-            </a:extLst>
-          </p:cNvPr>
-          <p:cNvSpPr/>
-          <p:nvPr/>
-        </p:nvSpPr>
-        <p:spPr>
-          <a:xfrm>
-            <a:off x="8659965" y="2116335"/>
-            <a:ext cx="720437" cy="479987"/>
-          </a:xfrm>
-          <a:prstGeom prst="downArrow">
-            <a:avLst/>
-          </a:prstGeom>
-        </p:spPr>
-        <p:style>
-          <a:lnRef idx="2">
-            <a:schemeClr val="accent1">
-              <a:shade val="15000"/>
-            </a:schemeClr>
-          </a:lnRef>
-          <a:fillRef idx="1">
-            <a:schemeClr val="accent1"/>
-          </a:fillRef>
-          <a:effectRef idx="0">
-            <a:schemeClr val="accent1"/>
-          </a:effectRef>
-          <a:fontRef idx="minor">
-            <a:schemeClr val="lt1"/>
-          </a:fontRef>
-        </p:style>
-        <p:txBody>
-          <a:bodyPr rtlCol="0" anchor="ctr"/>
-          <a:lstStyle/>
-          <a:p>
-            <a:pPr algn="ctr"/>
-            <a:endParaRPr lang="pt-BR"/>
-          </a:p>
-        </p:txBody>
-      </p:sp>
-      <p:sp>
-        <p:nvSpPr>
-          <p:cNvPr id="26" name="Seta: para Baixo 25">
-            <a:extLst>
-              <a:ext uri="{FF2B5EF4-FFF2-40B4-BE49-F238E27FC236}">
-                <a16:creationId xmlns:a16="http://schemas.microsoft.com/office/drawing/2014/main" id="{911F5F86-38FF-EAA5-3C0D-263F3457ED13}"/>
-              </a:ext>
-            </a:extLst>
-          </p:cNvPr>
-          <p:cNvSpPr/>
-          <p:nvPr/>
-        </p:nvSpPr>
-        <p:spPr>
-          <a:xfrm rot="2850865">
-            <a:off x="9108493" y="5276526"/>
-            <a:ext cx="720437" cy="479987"/>
-          </a:xfrm>
-          <a:prstGeom prst="downArrow">
-            <a:avLst/>
-          </a:prstGeom>
-        </p:spPr>
-        <p:style>
-          <a:lnRef idx="2">
-            <a:schemeClr val="accent1">
-              <a:shade val="15000"/>
-            </a:schemeClr>
-          </a:lnRef>
-          <a:fillRef idx="1">
-            <a:schemeClr val="accent1"/>
-          </a:fillRef>
-          <a:effectRef idx="0">
-            <a:schemeClr val="accent1"/>
-          </a:effectRef>
-          <a:fontRef idx="minor">
-            <a:schemeClr val="lt1"/>
-          </a:fontRef>
-        </p:style>
-        <p:txBody>
-          <a:bodyPr rtlCol="0" anchor="ctr"/>
-          <a:lstStyle/>
-          <a:p>
-            <a:pPr algn="ctr"/>
-            <a:endParaRPr lang="pt-BR"/>
-          </a:p>
-        </p:txBody>
-      </p:sp>
-      <p:sp>
-        <p:nvSpPr>
-          <p:cNvPr id="27" name="Seta: para Baixo 26">
-            <a:extLst>
-              <a:ext uri="{FF2B5EF4-FFF2-40B4-BE49-F238E27FC236}">
-                <a16:creationId xmlns:a16="http://schemas.microsoft.com/office/drawing/2014/main" id="{04246C84-9B6C-4AEB-DDF9-B9B63D2F0780}"/>
-              </a:ext>
-            </a:extLst>
-          </p:cNvPr>
-          <p:cNvSpPr/>
-          <p:nvPr/>
-        </p:nvSpPr>
-        <p:spPr>
-          <a:xfrm rot="5400000">
-            <a:off x="5405829" y="3099579"/>
-            <a:ext cx="720437" cy="836386"/>
-          </a:xfrm>
-          <a:prstGeom prst="downArrow">
-            <a:avLst/>
-          </a:prstGeom>
-        </p:spPr>
-        <p:style>
-          <a:lnRef idx="2">
-            <a:schemeClr val="accent1">
-              <a:shade val="15000"/>
-            </a:schemeClr>
-          </a:lnRef>
-          <a:fillRef idx="1">
-            <a:schemeClr val="accent1"/>
-          </a:fillRef>
-          <a:effectRef idx="0">
-            <a:schemeClr val="accent1"/>
-          </a:effectRef>
-          <a:fontRef idx="minor">
-            <a:schemeClr val="lt1"/>
-          </a:fontRef>
-        </p:style>
-        <p:txBody>
-          <a:bodyPr rtlCol="0" anchor="ctr"/>
-          <a:lstStyle/>
-          <a:p>
-            <a:pPr algn="ctr"/>
-            <a:endParaRPr lang="pt-BR"/>
-          </a:p>
-        </p:txBody>
-      </p:sp>
-      <p:sp>
-        <p:nvSpPr>
-          <p:cNvPr id="28" name="CaixaDeTexto 27">
-            <a:extLst>
-              <a:ext uri="{FF2B5EF4-FFF2-40B4-BE49-F238E27FC236}">
-                <a16:creationId xmlns:a16="http://schemas.microsoft.com/office/drawing/2014/main" id="{8966EBD7-81D4-9A5C-09F0-3DB0491EEFBB}"/>
-              </a:ext>
-            </a:extLst>
-          </p:cNvPr>
-          <p:cNvSpPr txBox="1"/>
-          <p:nvPr/>
-        </p:nvSpPr>
-        <p:spPr>
-          <a:xfrm>
-            <a:off x="7896738" y="445564"/>
-            <a:ext cx="1748364" cy="369332"/>
-          </a:xfrm>
-          <a:prstGeom prst="rect">
-            <a:avLst/>
-          </a:prstGeom>
-          <a:noFill/>
-        </p:spPr>
-        <p:txBody>
-          <a:bodyPr wrap="none" rtlCol="0">
-            <a:spAutoFit/>
-          </a:bodyPr>
-          <a:lstStyle/>
-          <a:p>
-            <a:r>
-              <a:rPr lang="pt-BR" dirty="0"/>
-              <a:t>Tela de produtos</a:t>
-            </a:r>
-          </a:p>
-        </p:txBody>
-      </p:sp>
-      <p:sp>
-        <p:nvSpPr>
-          <p:cNvPr id="29" name="CaixaDeTexto 28">
-            <a:extLst>
-              <a:ext uri="{FF2B5EF4-FFF2-40B4-BE49-F238E27FC236}">
-                <a16:creationId xmlns:a16="http://schemas.microsoft.com/office/drawing/2014/main" id="{153801C5-9031-5562-51B8-4101DE8BF41B}"/>
-              </a:ext>
-            </a:extLst>
-          </p:cNvPr>
-          <p:cNvSpPr txBox="1"/>
-          <p:nvPr/>
-        </p:nvSpPr>
-        <p:spPr>
-          <a:xfrm>
-            <a:off x="2035685" y="2462751"/>
-            <a:ext cx="2356286" cy="369332"/>
-          </a:xfrm>
-          <a:prstGeom prst="rect">
-            <a:avLst/>
-          </a:prstGeom>
-          <a:noFill/>
-        </p:spPr>
-        <p:txBody>
-          <a:bodyPr wrap="none" rtlCol="0">
-            <a:spAutoFit/>
-          </a:bodyPr>
-          <a:lstStyle/>
-          <a:p>
-            <a:r>
-              <a:rPr lang="pt-BR" dirty="0"/>
-              <a:t>Tela de editar produtos</a:t>
-            </a:r>
-          </a:p>
-        </p:txBody>
-      </p:sp>
-      <p:sp>
-        <p:nvSpPr>
-          <p:cNvPr id="30" name="CaixaDeTexto 29">
-            <a:extLst>
-              <a:ext uri="{FF2B5EF4-FFF2-40B4-BE49-F238E27FC236}">
-                <a16:creationId xmlns:a16="http://schemas.microsoft.com/office/drawing/2014/main" id="{33D073F4-61B9-EA38-76FA-719186DB71AC}"/>
-              </a:ext>
-            </a:extLst>
-          </p:cNvPr>
-          <p:cNvSpPr txBox="1"/>
-          <p:nvPr/>
-        </p:nvSpPr>
-        <p:spPr>
-          <a:xfrm>
-            <a:off x="6993495" y="2543716"/>
-            <a:ext cx="4352474" cy="369332"/>
-          </a:xfrm>
-          <a:prstGeom prst="rect">
-            <a:avLst/>
-          </a:prstGeom>
-          <a:noFill/>
-        </p:spPr>
-        <p:txBody>
-          <a:bodyPr wrap="none" rtlCol="0">
-            <a:spAutoFit/>
-          </a:bodyPr>
-          <a:lstStyle/>
-          <a:p>
-            <a:r>
-              <a:rPr lang="pt-BR" dirty="0"/>
-              <a:t>O lápis libera opções de cadastro e alteração</a:t>
-            </a:r>
-          </a:p>
-        </p:txBody>
-      </p:sp>
-      <p:sp>
-        <p:nvSpPr>
-          <p:cNvPr id="31" name="CaixaDeTexto 30">
-            <a:extLst>
-              <a:ext uri="{FF2B5EF4-FFF2-40B4-BE49-F238E27FC236}">
-                <a16:creationId xmlns:a16="http://schemas.microsoft.com/office/drawing/2014/main" id="{E1763596-E437-FC09-A2E8-F74D5C74ED32}"/>
-              </a:ext>
-            </a:extLst>
-          </p:cNvPr>
-          <p:cNvSpPr txBox="1"/>
-          <p:nvPr/>
-        </p:nvSpPr>
-        <p:spPr>
-          <a:xfrm>
-            <a:off x="5919828" y="4418416"/>
-            <a:ext cx="1699632" cy="369332"/>
-          </a:xfrm>
-          <a:prstGeom prst="rect">
-            <a:avLst/>
-          </a:prstGeom>
-          <a:noFill/>
-        </p:spPr>
-        <p:txBody>
-          <a:bodyPr wrap="none" rtlCol="0">
-            <a:spAutoFit/>
-          </a:bodyPr>
-          <a:lstStyle/>
-          <a:p>
-            <a:r>
-              <a:rPr lang="pt-BR" dirty="0"/>
-              <a:t>Tela de cadastro</a:t>
-            </a:r>
-          </a:p>
-        </p:txBody>
-      </p:sp>
-      <p:pic>
-        <p:nvPicPr>
-          <p:cNvPr id="33" name="Imagem 32" descr="Interface gráfica do usuário, Aplicativo&#10;&#10;O conteúdo gerado por IA pode estar incorreto.">
-            <a:extLst>
-              <a:ext uri="{FF2B5EF4-FFF2-40B4-BE49-F238E27FC236}">
-                <a16:creationId xmlns:a16="http://schemas.microsoft.com/office/drawing/2014/main" id="{C871BD2A-679D-01F4-5113-5637827B8F67}"/>
-              </a:ext>
-            </a:extLst>
-          </p:cNvPr>
-          <p:cNvPicPr>
-            <a:picLocks noChangeAspect="1"/>
-          </p:cNvPicPr>
-          <p:nvPr/>
-        </p:nvPicPr>
-        <p:blipFill>
-          <a:blip r:embed="rId11">
-            <a:extLst>
-              <a:ext uri="{28A0092B-C50C-407E-A947-70E740481C1C}">
-                <a14:useLocalDpi xmlns:a14="http://schemas.microsoft.com/office/drawing/2010/main" val="0"/>
-              </a:ext>
-            </a:extLst>
-          </a:blip>
-          <a:stretch>
-            <a:fillRect/>
-          </a:stretch>
-        </p:blipFill>
-        <p:spPr>
-          <a:xfrm>
-            <a:off x="7619460" y="780398"/>
-            <a:ext cx="2801449" cy="1323537"/>
-          </a:xfrm>
-          <a:prstGeom prst="rect">
-            <a:avLst/>
-          </a:prstGeom>
-        </p:spPr>
-      </p:pic>
-      <p:pic>
-        <p:nvPicPr>
-          <p:cNvPr id="36" name="Imagem 35">
-            <a:extLst>
-              <a:ext uri="{FF2B5EF4-FFF2-40B4-BE49-F238E27FC236}">
-                <a16:creationId xmlns:a16="http://schemas.microsoft.com/office/drawing/2014/main" id="{A2EE3B87-003C-31DA-8029-4668EFB4E9A2}"/>
-              </a:ext>
-            </a:extLst>
-          </p:cNvPr>
-          <p:cNvPicPr>
-            <a:picLocks noChangeAspect="1"/>
-          </p:cNvPicPr>
-          <p:nvPr/>
-        </p:nvPicPr>
-        <p:blipFill>
-          <a:blip r:embed="rId12">
-            <a:extLst>
-              <a:ext uri="{28A0092B-C50C-407E-A947-70E740481C1C}">
-                <a14:useLocalDpi xmlns:a14="http://schemas.microsoft.com/office/drawing/2010/main" val="0"/>
-              </a:ext>
-            </a:extLst>
-          </a:blip>
-          <a:stretch>
-            <a:fillRect/>
-          </a:stretch>
-        </p:blipFill>
-        <p:spPr>
-          <a:xfrm>
-            <a:off x="3386695" y="1056918"/>
-            <a:ext cx="2537151" cy="1198670"/>
-          </a:xfrm>
-          <a:prstGeom prst="rect">
-            <a:avLst/>
-          </a:prstGeom>
-        </p:spPr>
-      </p:pic>
-      <p:sp>
-        <p:nvSpPr>
-          <p:cNvPr id="37" name="Seta: para Baixo 36">
-            <a:extLst>
-              <a:ext uri="{FF2B5EF4-FFF2-40B4-BE49-F238E27FC236}">
-                <a16:creationId xmlns:a16="http://schemas.microsoft.com/office/drawing/2014/main" id="{B721C91C-2D51-CCB6-95D7-640D1AA19836}"/>
-              </a:ext>
-            </a:extLst>
-          </p:cNvPr>
-          <p:cNvSpPr/>
-          <p:nvPr/>
-        </p:nvSpPr>
-        <p:spPr>
-          <a:xfrm rot="5400000">
-            <a:off x="6064016" y="1190549"/>
-            <a:ext cx="720437" cy="479987"/>
-          </a:xfrm>
-          <a:prstGeom prst="downArrow">
-            <a:avLst/>
-          </a:prstGeom>
-        </p:spPr>
-        <p:style>
-          <a:lnRef idx="2">
-            <a:schemeClr val="accent1">
-              <a:shade val="15000"/>
-            </a:schemeClr>
-          </a:lnRef>
-          <a:fillRef idx="1">
-            <a:schemeClr val="accent1"/>
-          </a:fillRef>
-          <a:effectRef idx="0">
-            <a:schemeClr val="accent1"/>
-          </a:effectRef>
-          <a:fontRef idx="minor">
-            <a:schemeClr val="lt1"/>
-          </a:fontRef>
-        </p:style>
-        <p:txBody>
-          <a:bodyPr rtlCol="0" anchor="ctr"/>
-          <a:lstStyle/>
-          <a:p>
-            <a:pPr algn="ctr"/>
-            <a:endParaRPr lang="pt-BR"/>
-          </a:p>
-        </p:txBody>
-      </p:sp>
-      <p:sp>
-        <p:nvSpPr>
-          <p:cNvPr id="39" name="Seta: para Baixo 38">
-            <a:extLst>
-              <a:ext uri="{FF2B5EF4-FFF2-40B4-BE49-F238E27FC236}">
-                <a16:creationId xmlns:a16="http://schemas.microsoft.com/office/drawing/2014/main" id="{D2F5C4BF-A3A7-D032-D7B1-C38B2F21084B}"/>
-              </a:ext>
-            </a:extLst>
-          </p:cNvPr>
-          <p:cNvSpPr/>
-          <p:nvPr/>
-        </p:nvSpPr>
-        <p:spPr>
-          <a:xfrm rot="13856497">
-            <a:off x="9670132" y="4825198"/>
-            <a:ext cx="720437" cy="479987"/>
-          </a:xfrm>
-          <a:prstGeom prst="downArrow">
-            <a:avLst/>
-          </a:prstGeom>
-        </p:spPr>
-        <p:style>
-          <a:lnRef idx="2">
-            <a:schemeClr val="accent1">
-              <a:shade val="15000"/>
-            </a:schemeClr>
-          </a:lnRef>
-          <a:fillRef idx="1">
-            <a:schemeClr val="accent1"/>
-          </a:fillRef>
-          <a:effectRef idx="0">
-            <a:schemeClr val="accent1"/>
-          </a:effectRef>
-          <a:fontRef idx="minor">
-            <a:schemeClr val="lt1"/>
-          </a:fontRef>
-        </p:style>
-        <p:txBody>
-          <a:bodyPr rtlCol="0" anchor="ctr"/>
-          <a:lstStyle/>
-          <a:p>
-            <a:pPr algn="ctr"/>
-            <a:endParaRPr lang="pt-BR"/>
-          </a:p>
-        </p:txBody>
-      </p:sp>
-      <p:sp>
-        <p:nvSpPr>
-          <p:cNvPr id="40" name="Seta: para Baixo 39">
-            <a:extLst>
-              <a:ext uri="{FF2B5EF4-FFF2-40B4-BE49-F238E27FC236}">
-                <a16:creationId xmlns:a16="http://schemas.microsoft.com/office/drawing/2014/main" id="{AFFFB5C8-4A75-1BAD-37BF-C20C0E4031D1}"/>
-              </a:ext>
-            </a:extLst>
-          </p:cNvPr>
-          <p:cNvSpPr/>
-          <p:nvPr/>
-        </p:nvSpPr>
-        <p:spPr>
-          <a:xfrm rot="16200000">
-            <a:off x="6628491" y="3144574"/>
-            <a:ext cx="720437" cy="777692"/>
-          </a:xfrm>
-          <a:prstGeom prst="downArrow">
-            <a:avLst/>
-          </a:prstGeom>
-        </p:spPr>
-        <p:style>
-          <a:lnRef idx="2">
-            <a:schemeClr val="accent1">
-              <a:shade val="15000"/>
-            </a:schemeClr>
-          </a:lnRef>
-          <a:fillRef idx="1">
-            <a:schemeClr val="accent1"/>
-          </a:fillRef>
-          <a:effectRef idx="0">
-            <a:schemeClr val="accent1"/>
-          </a:effectRef>
-          <a:fontRef idx="minor">
-            <a:schemeClr val="lt1"/>
-          </a:fontRef>
-        </p:style>
-        <p:txBody>
-          <a:bodyPr rtlCol="0" anchor="ctr"/>
-          <a:lstStyle/>
-          <a:p>
-            <a:pPr algn="ctr"/>
-            <a:endParaRPr lang="pt-BR"/>
-          </a:p>
-        </p:txBody>
-      </p:sp>
     </p:spTree>
     <p:extLst>
       <p:ext uri="{BB962C8B-B14F-4D97-AF65-F5344CB8AC3E}">
-        <p14:creationId xmlns:p14="http://schemas.microsoft.com/office/powerpoint/2010/main" val="6276868"/>
+        <p14:creationId xmlns:p14="http://schemas.microsoft.com/office/powerpoint/2010/main" val="984659062"/>
       </p:ext>
     </p:extLst>
   </p:cSld>
@@ -8615,10 +8229,10 @@
       </p:pic>
       <p:sp>
         <p:nvSpPr>
-          <p:cNvPr id="5" name="CaixaDeTexto 4">
-            <a:extLst>
-              <a:ext uri="{FF2B5EF4-FFF2-40B4-BE49-F238E27FC236}">
-                <a16:creationId xmlns:a16="http://schemas.microsoft.com/office/drawing/2014/main" id="{61FDC6AC-1BEC-5AB8-1A27-461C659F4272}"/>
+          <p:cNvPr id="2" name="CaixaDeTexto 1">
+            <a:extLst>
+              <a:ext uri="{FF2B5EF4-FFF2-40B4-BE49-F238E27FC236}">
+                <a16:creationId xmlns:a16="http://schemas.microsoft.com/office/drawing/2014/main" id="{3E73C538-7322-D3FE-2D45-F38951041EBE}"/>
               </a:ext>
             </a:extLst>
           </p:cNvPr>
@@ -8627,8 +8241,8 @@
         </p:nvSpPr>
         <p:spPr>
           <a:xfrm>
-            <a:off x="901304" y="873049"/>
-            <a:ext cx="11121284" cy="3046988"/>
+            <a:off x="615428" y="-41984"/>
+            <a:ext cx="11121284" cy="1077218"/>
           </a:xfrm>
           <a:prstGeom prst="rect">
             <a:avLst/>
@@ -8647,7 +8261,7 @@
                 <a:latin typeface="Verdana" panose="020B0604030504040204" pitchFamily="34" charset="0"/>
                 <a:ea typeface="Verdana" panose="020B0604030504040204" pitchFamily="34" charset="0"/>
               </a:rPr>
-              <a:t>APRESENTAÇAO DO SISTEMA</a:t>
+              <a:t>PROTOTIPAÇÃO DO SISTEMA</a:t>
             </a:r>
             <a:endParaRPr lang="pt-BR" sz="3200" b="1" dirty="0">
               <a:ln>
@@ -8669,51 +8283,846 @@
               <a:ea typeface="Verdana" panose="020B0604030504040204" pitchFamily="34" charset="0"/>
             </a:endParaRPr>
           </a:p>
-          <a:p>
-            <a:pPr marL="457200" indent="-457200">
-              <a:buFont typeface="Wingdings" panose="05000000000000000000" pitchFamily="2" charset="2"/>
-              <a:buChar char="Ø"/>
-            </a:pPr>
-            <a:r>
-              <a:rPr lang="pt-BR" sz="3200" dirty="0">
-                <a:latin typeface="Verdana" panose="020B0604030504040204" pitchFamily="34" charset="0"/>
-                <a:ea typeface="Verdana" panose="020B0604030504040204" pitchFamily="34" charset="0"/>
-              </a:rPr>
-              <a:t>Exibir o Sistema;</a:t>
-            </a:r>
-          </a:p>
-          <a:p>
-            <a:pPr marL="457200" indent="-457200">
-              <a:buFont typeface="Wingdings" panose="05000000000000000000" pitchFamily="2" charset="2"/>
-              <a:buChar char="Ø"/>
-            </a:pPr>
-            <a:r>
-              <a:rPr lang="pt-BR" sz="3200" dirty="0">
-                <a:latin typeface="Verdana" panose="020B0604030504040204" pitchFamily="34" charset="0"/>
-                <a:ea typeface="Verdana" panose="020B0604030504040204" pitchFamily="34" charset="0"/>
-              </a:rPr>
-              <a:t>Realizar CRUD no Sistema;</a:t>
-            </a:r>
-          </a:p>
-          <a:p>
-            <a:pPr marL="457200" indent="-457200">
-              <a:buFont typeface="Wingdings" panose="05000000000000000000" pitchFamily="2" charset="2"/>
-              <a:buChar char="Ø"/>
-            </a:pPr>
-            <a:r>
-              <a:rPr lang="pt-BR" sz="3200" dirty="0">
-                <a:latin typeface="Verdana" panose="020B0604030504040204" pitchFamily="34" charset="0"/>
-                <a:ea typeface="Verdana" panose="020B0604030504040204" pitchFamily="34" charset="0"/>
-              </a:rPr>
-              <a:t>Explicar as ações que está sendo realizada no sistema.</a:t>
-            </a:r>
+        </p:txBody>
+      </p:sp>
+      <p:pic>
+        <p:nvPicPr>
+          <p:cNvPr id="6" name="Imagem 5">
+            <a:extLst>
+              <a:ext uri="{FF2B5EF4-FFF2-40B4-BE49-F238E27FC236}">
+                <a16:creationId xmlns:a16="http://schemas.microsoft.com/office/drawing/2014/main" id="{99049B36-B0B8-2BF6-56CA-C902B40CB24E}"/>
+              </a:ext>
+            </a:extLst>
+          </p:cNvPr>
+          <p:cNvPicPr>
+            <a:picLocks noChangeAspect="1"/>
+          </p:cNvPicPr>
+          <p:nvPr/>
+        </p:nvPicPr>
+        <p:blipFill>
+          <a:blip r:embed="rId7"/>
+          <a:stretch>
+            <a:fillRect/>
+          </a:stretch>
+        </p:blipFill>
+        <p:spPr>
+          <a:xfrm>
+            <a:off x="681755" y="929867"/>
+            <a:ext cx="1525883" cy="1498732"/>
+          </a:xfrm>
+          <a:prstGeom prst="rect">
+            <a:avLst/>
+          </a:prstGeom>
+        </p:spPr>
+      </p:pic>
+      <p:sp>
+        <p:nvSpPr>
+          <p:cNvPr id="16" name="Seta: para Baixo 15">
+            <a:extLst>
+              <a:ext uri="{FF2B5EF4-FFF2-40B4-BE49-F238E27FC236}">
+                <a16:creationId xmlns:a16="http://schemas.microsoft.com/office/drawing/2014/main" id="{33653C01-D0E9-CB21-5E5B-E3E92B036803}"/>
+              </a:ext>
+            </a:extLst>
+          </p:cNvPr>
+          <p:cNvSpPr/>
+          <p:nvPr/>
+        </p:nvSpPr>
+        <p:spPr>
+          <a:xfrm rot="16200000">
+            <a:off x="2734757" y="1336465"/>
+            <a:ext cx="720437" cy="479987"/>
+          </a:xfrm>
+          <a:prstGeom prst="downArrow">
+            <a:avLst/>
+          </a:prstGeom>
+        </p:spPr>
+        <p:style>
+          <a:lnRef idx="2">
+            <a:schemeClr val="accent1">
+              <a:shade val="15000"/>
+            </a:schemeClr>
+          </a:lnRef>
+          <a:fillRef idx="1">
+            <a:schemeClr val="accent1"/>
+          </a:fillRef>
+          <a:effectRef idx="0">
+            <a:schemeClr val="accent1"/>
+          </a:effectRef>
+          <a:fontRef idx="minor">
+            <a:schemeClr val="lt1"/>
+          </a:fontRef>
+        </p:style>
+        <p:txBody>
+          <a:bodyPr rtlCol="0" anchor="ctr"/>
+          <a:lstStyle/>
+          <a:p>
+            <a:pPr algn="ctr"/>
+            <a:endParaRPr lang="pt-BR"/>
+          </a:p>
+        </p:txBody>
+      </p:sp>
+      <p:sp>
+        <p:nvSpPr>
+          <p:cNvPr id="19" name="CaixaDeTexto 18">
+            <a:extLst>
+              <a:ext uri="{FF2B5EF4-FFF2-40B4-BE49-F238E27FC236}">
+                <a16:creationId xmlns:a16="http://schemas.microsoft.com/office/drawing/2014/main" id="{F5EFC4A3-92C5-9029-4002-13DC61649BB7}"/>
+              </a:ext>
+            </a:extLst>
+          </p:cNvPr>
+          <p:cNvSpPr txBox="1"/>
+          <p:nvPr/>
+        </p:nvSpPr>
+        <p:spPr>
+          <a:xfrm>
+            <a:off x="817418" y="453618"/>
+            <a:ext cx="2299855" cy="369332"/>
+          </a:xfrm>
+          <a:prstGeom prst="rect">
+            <a:avLst/>
+          </a:prstGeom>
+          <a:noFill/>
+        </p:spPr>
+        <p:txBody>
+          <a:bodyPr wrap="square" rtlCol="0">
+            <a:spAutoFit/>
+          </a:bodyPr>
+          <a:lstStyle/>
+          <a:p>
+            <a:r>
+              <a:rPr lang="pt-BR" dirty="0"/>
+              <a:t>Tela de login</a:t>
+            </a:r>
+          </a:p>
+        </p:txBody>
+      </p:sp>
+      <p:sp>
+        <p:nvSpPr>
+          <p:cNvPr id="22" name="Seta: para Baixo 21">
+            <a:extLst>
+              <a:ext uri="{FF2B5EF4-FFF2-40B4-BE49-F238E27FC236}">
+                <a16:creationId xmlns:a16="http://schemas.microsoft.com/office/drawing/2014/main" id="{7223E0E0-2A52-20EF-7C9D-1EF8592F7492}"/>
+              </a:ext>
+            </a:extLst>
+          </p:cNvPr>
+          <p:cNvSpPr/>
+          <p:nvPr/>
+        </p:nvSpPr>
+        <p:spPr>
+          <a:xfrm rot="5400000">
+            <a:off x="2046101" y="1311595"/>
+            <a:ext cx="720437" cy="479987"/>
+          </a:xfrm>
+          <a:prstGeom prst="downArrow">
+            <a:avLst/>
+          </a:prstGeom>
+        </p:spPr>
+        <p:style>
+          <a:lnRef idx="2">
+            <a:schemeClr val="accent1">
+              <a:shade val="15000"/>
+            </a:schemeClr>
+          </a:lnRef>
+          <a:fillRef idx="1">
+            <a:schemeClr val="accent1"/>
+          </a:fillRef>
+          <a:effectRef idx="0">
+            <a:schemeClr val="accent1"/>
+          </a:effectRef>
+          <a:fontRef idx="minor">
+            <a:schemeClr val="lt1"/>
+          </a:fontRef>
+        </p:style>
+        <p:txBody>
+          <a:bodyPr rtlCol="0" anchor="ctr"/>
+          <a:lstStyle/>
+          <a:p>
+            <a:pPr algn="ctr"/>
+            <a:endParaRPr lang="pt-BR"/>
+          </a:p>
+        </p:txBody>
+      </p:sp>
+      <p:sp>
+        <p:nvSpPr>
+          <p:cNvPr id="24" name="CaixaDeTexto 23">
+            <a:extLst>
+              <a:ext uri="{FF2B5EF4-FFF2-40B4-BE49-F238E27FC236}">
+                <a16:creationId xmlns:a16="http://schemas.microsoft.com/office/drawing/2014/main" id="{CD7E6A42-441A-439B-2704-81018AB89AF0}"/>
+              </a:ext>
+            </a:extLst>
+          </p:cNvPr>
+          <p:cNvSpPr txBox="1"/>
+          <p:nvPr/>
+        </p:nvSpPr>
+        <p:spPr>
+          <a:xfrm>
+            <a:off x="3921044" y="670360"/>
+            <a:ext cx="3456512" cy="369332"/>
+          </a:xfrm>
+          <a:prstGeom prst="rect">
+            <a:avLst/>
+          </a:prstGeom>
+          <a:noFill/>
+        </p:spPr>
+        <p:txBody>
+          <a:bodyPr wrap="square" rtlCol="0">
+            <a:spAutoFit/>
+          </a:bodyPr>
+          <a:lstStyle/>
+          <a:p>
+            <a:r>
+              <a:rPr lang="pt-BR" dirty="0"/>
+              <a:t>Tela principal</a:t>
+            </a:r>
+          </a:p>
+        </p:txBody>
+      </p:sp>
+      <p:pic>
+        <p:nvPicPr>
+          <p:cNvPr id="8" name="Imagem 7" descr="Interface gráfica do usuário&#10;&#10;O conteúdo gerado por IA pode estar incorreto.">
+            <a:extLst>
+              <a:ext uri="{FF2B5EF4-FFF2-40B4-BE49-F238E27FC236}">
+                <a16:creationId xmlns:a16="http://schemas.microsoft.com/office/drawing/2014/main" id="{FE171389-6F0C-92EF-0DBB-7DF752810FEE}"/>
+              </a:ext>
+            </a:extLst>
+          </p:cNvPr>
+          <p:cNvPicPr>
+            <a:picLocks noChangeAspect="1"/>
+          </p:cNvPicPr>
+          <p:nvPr/>
+        </p:nvPicPr>
+        <p:blipFill>
+          <a:blip r:embed="rId8">
+            <a:extLst>
+              <a:ext uri="{28A0092B-C50C-407E-A947-70E740481C1C}">
+                <a14:useLocalDpi xmlns:a14="http://schemas.microsoft.com/office/drawing/2010/main" val="0"/>
+              </a:ext>
+            </a:extLst>
+          </a:blip>
+          <a:stretch>
+            <a:fillRect/>
+          </a:stretch>
+        </p:blipFill>
+        <p:spPr>
+          <a:xfrm>
+            <a:off x="7655131" y="2838935"/>
+            <a:ext cx="3029203" cy="1764147"/>
+          </a:xfrm>
+          <a:prstGeom prst="rect">
+            <a:avLst/>
+          </a:prstGeom>
+        </p:spPr>
+      </p:pic>
+      <p:sp>
+        <p:nvSpPr>
+          <p:cNvPr id="13" name="Seta: para Baixo 12">
+            <a:extLst>
+              <a:ext uri="{FF2B5EF4-FFF2-40B4-BE49-F238E27FC236}">
+                <a16:creationId xmlns:a16="http://schemas.microsoft.com/office/drawing/2014/main" id="{2BC410AA-4FDE-DE52-F8BF-94ED8B87EEC0}"/>
+              </a:ext>
+            </a:extLst>
+          </p:cNvPr>
+          <p:cNvSpPr/>
+          <p:nvPr/>
+        </p:nvSpPr>
+        <p:spPr>
+          <a:xfrm rot="16200000">
+            <a:off x="6742684" y="1190549"/>
+            <a:ext cx="720437" cy="479987"/>
+          </a:xfrm>
+          <a:prstGeom prst="downArrow">
+            <a:avLst/>
+          </a:prstGeom>
+        </p:spPr>
+        <p:style>
+          <a:lnRef idx="2">
+            <a:schemeClr val="accent1">
+              <a:shade val="15000"/>
+            </a:schemeClr>
+          </a:lnRef>
+          <a:fillRef idx="1">
+            <a:schemeClr val="accent1"/>
+          </a:fillRef>
+          <a:effectRef idx="0">
+            <a:schemeClr val="accent1"/>
+          </a:effectRef>
+          <a:fontRef idx="minor">
+            <a:schemeClr val="lt1"/>
+          </a:fontRef>
+        </p:style>
+        <p:txBody>
+          <a:bodyPr rtlCol="0" anchor="ctr"/>
+          <a:lstStyle/>
+          <a:p>
+            <a:pPr algn="ctr"/>
+            <a:endParaRPr lang="pt-BR"/>
+          </a:p>
+        </p:txBody>
+      </p:sp>
+      <p:pic>
+        <p:nvPicPr>
+          <p:cNvPr id="15" name="Imagem 14" descr="Interface gráfica do usuário, Aplicativo&#10;&#10;O conteúdo gerado por IA pode estar incorreto.">
+            <a:extLst>
+              <a:ext uri="{FF2B5EF4-FFF2-40B4-BE49-F238E27FC236}">
+                <a16:creationId xmlns:a16="http://schemas.microsoft.com/office/drawing/2014/main" id="{F194A1DD-7B4C-DF79-2E70-AB960251B0CA}"/>
+              </a:ext>
+            </a:extLst>
+          </p:cNvPr>
+          <p:cNvPicPr>
+            <a:picLocks noChangeAspect="1"/>
+          </p:cNvPicPr>
+          <p:nvPr/>
+        </p:nvPicPr>
+        <p:blipFill>
+          <a:blip r:embed="rId9">
+            <a:extLst>
+              <a:ext uri="{28A0092B-C50C-407E-A947-70E740481C1C}">
+                <a14:useLocalDpi xmlns:a14="http://schemas.microsoft.com/office/drawing/2010/main" val="0"/>
+              </a:ext>
+            </a:extLst>
+          </a:blip>
+          <a:stretch>
+            <a:fillRect/>
+          </a:stretch>
+        </p:blipFill>
+        <p:spPr>
+          <a:xfrm>
+            <a:off x="5747454" y="4668608"/>
+            <a:ext cx="3392287" cy="1929810"/>
+          </a:xfrm>
+          <a:prstGeom prst="rect">
+            <a:avLst/>
+          </a:prstGeom>
+        </p:spPr>
+      </p:pic>
+      <p:pic>
+        <p:nvPicPr>
+          <p:cNvPr id="20" name="Imagem 19" descr="Interface gráfica do usuário, Aplicativo&#10;&#10;O conteúdo gerado por IA pode estar incorreto.">
+            <a:extLst>
+              <a:ext uri="{FF2B5EF4-FFF2-40B4-BE49-F238E27FC236}">
+                <a16:creationId xmlns:a16="http://schemas.microsoft.com/office/drawing/2014/main" id="{2B0E28D2-0C64-D125-AEFD-FC1854E61519}"/>
+              </a:ext>
+            </a:extLst>
+          </p:cNvPr>
+          <p:cNvPicPr>
+            <a:picLocks noChangeAspect="1"/>
+          </p:cNvPicPr>
+          <p:nvPr/>
+        </p:nvPicPr>
+        <p:blipFill>
+          <a:blip r:embed="rId10">
+            <a:extLst>
+              <a:ext uri="{28A0092B-C50C-407E-A947-70E740481C1C}">
+                <a14:useLocalDpi xmlns:a14="http://schemas.microsoft.com/office/drawing/2010/main" val="0"/>
+              </a:ext>
+            </a:extLst>
+          </a:blip>
+          <a:stretch>
+            <a:fillRect/>
+          </a:stretch>
+        </p:blipFill>
+        <p:spPr>
+          <a:xfrm>
+            <a:off x="1748316" y="2781662"/>
+            <a:ext cx="3557167" cy="2412762"/>
+          </a:xfrm>
+          <a:prstGeom prst="rect">
+            <a:avLst/>
+          </a:prstGeom>
+        </p:spPr>
+      </p:pic>
+      <p:sp>
+        <p:nvSpPr>
+          <p:cNvPr id="25" name="Seta: para Baixo 24">
+            <a:extLst>
+              <a:ext uri="{FF2B5EF4-FFF2-40B4-BE49-F238E27FC236}">
+                <a16:creationId xmlns:a16="http://schemas.microsoft.com/office/drawing/2014/main" id="{A1F3446D-CC5C-A34E-4262-0F4FC276B678}"/>
+              </a:ext>
+            </a:extLst>
+          </p:cNvPr>
+          <p:cNvSpPr/>
+          <p:nvPr/>
+        </p:nvSpPr>
+        <p:spPr>
+          <a:xfrm>
+            <a:off x="8659965" y="2116335"/>
+            <a:ext cx="720437" cy="479987"/>
+          </a:xfrm>
+          <a:prstGeom prst="downArrow">
+            <a:avLst/>
+          </a:prstGeom>
+        </p:spPr>
+        <p:style>
+          <a:lnRef idx="2">
+            <a:schemeClr val="accent1">
+              <a:shade val="15000"/>
+            </a:schemeClr>
+          </a:lnRef>
+          <a:fillRef idx="1">
+            <a:schemeClr val="accent1"/>
+          </a:fillRef>
+          <a:effectRef idx="0">
+            <a:schemeClr val="accent1"/>
+          </a:effectRef>
+          <a:fontRef idx="minor">
+            <a:schemeClr val="lt1"/>
+          </a:fontRef>
+        </p:style>
+        <p:txBody>
+          <a:bodyPr rtlCol="0" anchor="ctr"/>
+          <a:lstStyle/>
+          <a:p>
+            <a:pPr algn="ctr"/>
+            <a:endParaRPr lang="pt-BR"/>
+          </a:p>
+        </p:txBody>
+      </p:sp>
+      <p:sp>
+        <p:nvSpPr>
+          <p:cNvPr id="26" name="Seta: para Baixo 25">
+            <a:extLst>
+              <a:ext uri="{FF2B5EF4-FFF2-40B4-BE49-F238E27FC236}">
+                <a16:creationId xmlns:a16="http://schemas.microsoft.com/office/drawing/2014/main" id="{911F5F86-38FF-EAA5-3C0D-263F3457ED13}"/>
+              </a:ext>
+            </a:extLst>
+          </p:cNvPr>
+          <p:cNvSpPr/>
+          <p:nvPr/>
+        </p:nvSpPr>
+        <p:spPr>
+          <a:xfrm rot="2850865">
+            <a:off x="9108493" y="5276526"/>
+            <a:ext cx="720437" cy="479987"/>
+          </a:xfrm>
+          <a:prstGeom prst="downArrow">
+            <a:avLst/>
+          </a:prstGeom>
+        </p:spPr>
+        <p:style>
+          <a:lnRef idx="2">
+            <a:schemeClr val="accent1">
+              <a:shade val="15000"/>
+            </a:schemeClr>
+          </a:lnRef>
+          <a:fillRef idx="1">
+            <a:schemeClr val="accent1"/>
+          </a:fillRef>
+          <a:effectRef idx="0">
+            <a:schemeClr val="accent1"/>
+          </a:effectRef>
+          <a:fontRef idx="minor">
+            <a:schemeClr val="lt1"/>
+          </a:fontRef>
+        </p:style>
+        <p:txBody>
+          <a:bodyPr rtlCol="0" anchor="ctr"/>
+          <a:lstStyle/>
+          <a:p>
+            <a:pPr algn="ctr"/>
+            <a:endParaRPr lang="pt-BR"/>
+          </a:p>
+        </p:txBody>
+      </p:sp>
+      <p:sp>
+        <p:nvSpPr>
+          <p:cNvPr id="27" name="Seta: para Baixo 26">
+            <a:extLst>
+              <a:ext uri="{FF2B5EF4-FFF2-40B4-BE49-F238E27FC236}">
+                <a16:creationId xmlns:a16="http://schemas.microsoft.com/office/drawing/2014/main" id="{04246C84-9B6C-4AEB-DDF9-B9B63D2F0780}"/>
+              </a:ext>
+            </a:extLst>
+          </p:cNvPr>
+          <p:cNvSpPr/>
+          <p:nvPr/>
+        </p:nvSpPr>
+        <p:spPr>
+          <a:xfrm rot="5400000">
+            <a:off x="5405829" y="3099579"/>
+            <a:ext cx="720437" cy="836386"/>
+          </a:xfrm>
+          <a:prstGeom prst="downArrow">
+            <a:avLst/>
+          </a:prstGeom>
+        </p:spPr>
+        <p:style>
+          <a:lnRef idx="2">
+            <a:schemeClr val="accent1">
+              <a:shade val="15000"/>
+            </a:schemeClr>
+          </a:lnRef>
+          <a:fillRef idx="1">
+            <a:schemeClr val="accent1"/>
+          </a:fillRef>
+          <a:effectRef idx="0">
+            <a:schemeClr val="accent1"/>
+          </a:effectRef>
+          <a:fontRef idx="minor">
+            <a:schemeClr val="lt1"/>
+          </a:fontRef>
+        </p:style>
+        <p:txBody>
+          <a:bodyPr rtlCol="0" anchor="ctr"/>
+          <a:lstStyle/>
+          <a:p>
+            <a:pPr algn="ctr"/>
+            <a:endParaRPr lang="pt-BR"/>
+          </a:p>
+        </p:txBody>
+      </p:sp>
+      <p:sp>
+        <p:nvSpPr>
+          <p:cNvPr id="28" name="CaixaDeTexto 27">
+            <a:extLst>
+              <a:ext uri="{FF2B5EF4-FFF2-40B4-BE49-F238E27FC236}">
+                <a16:creationId xmlns:a16="http://schemas.microsoft.com/office/drawing/2014/main" id="{8966EBD7-81D4-9A5C-09F0-3DB0491EEFBB}"/>
+              </a:ext>
+            </a:extLst>
+          </p:cNvPr>
+          <p:cNvSpPr txBox="1"/>
+          <p:nvPr/>
+        </p:nvSpPr>
+        <p:spPr>
+          <a:xfrm>
+            <a:off x="7896738" y="445564"/>
+            <a:ext cx="1748364" cy="369332"/>
+          </a:xfrm>
+          <a:prstGeom prst="rect">
+            <a:avLst/>
+          </a:prstGeom>
+          <a:noFill/>
+        </p:spPr>
+        <p:txBody>
+          <a:bodyPr wrap="none" rtlCol="0">
+            <a:spAutoFit/>
+          </a:bodyPr>
+          <a:lstStyle/>
+          <a:p>
+            <a:r>
+              <a:rPr lang="pt-BR" dirty="0"/>
+              <a:t>Tela de produtos</a:t>
+            </a:r>
+          </a:p>
+        </p:txBody>
+      </p:sp>
+      <p:sp>
+        <p:nvSpPr>
+          <p:cNvPr id="29" name="CaixaDeTexto 28">
+            <a:extLst>
+              <a:ext uri="{FF2B5EF4-FFF2-40B4-BE49-F238E27FC236}">
+                <a16:creationId xmlns:a16="http://schemas.microsoft.com/office/drawing/2014/main" id="{153801C5-9031-5562-51B8-4101DE8BF41B}"/>
+              </a:ext>
+            </a:extLst>
+          </p:cNvPr>
+          <p:cNvSpPr txBox="1"/>
+          <p:nvPr/>
+        </p:nvSpPr>
+        <p:spPr>
+          <a:xfrm>
+            <a:off x="2035685" y="2462751"/>
+            <a:ext cx="2356286" cy="369332"/>
+          </a:xfrm>
+          <a:prstGeom prst="rect">
+            <a:avLst/>
+          </a:prstGeom>
+          <a:noFill/>
+        </p:spPr>
+        <p:txBody>
+          <a:bodyPr wrap="none" rtlCol="0">
+            <a:spAutoFit/>
+          </a:bodyPr>
+          <a:lstStyle/>
+          <a:p>
+            <a:r>
+              <a:rPr lang="pt-BR" dirty="0"/>
+              <a:t>Tela de editar produtos</a:t>
+            </a:r>
+          </a:p>
+        </p:txBody>
+      </p:sp>
+      <p:sp>
+        <p:nvSpPr>
+          <p:cNvPr id="30" name="CaixaDeTexto 29">
+            <a:extLst>
+              <a:ext uri="{FF2B5EF4-FFF2-40B4-BE49-F238E27FC236}">
+                <a16:creationId xmlns:a16="http://schemas.microsoft.com/office/drawing/2014/main" id="{33D073F4-61B9-EA38-76FA-719186DB71AC}"/>
+              </a:ext>
+            </a:extLst>
+          </p:cNvPr>
+          <p:cNvSpPr txBox="1"/>
+          <p:nvPr/>
+        </p:nvSpPr>
+        <p:spPr>
+          <a:xfrm>
+            <a:off x="6993495" y="2543716"/>
+            <a:ext cx="4352474" cy="369332"/>
+          </a:xfrm>
+          <a:prstGeom prst="rect">
+            <a:avLst/>
+          </a:prstGeom>
+          <a:noFill/>
+        </p:spPr>
+        <p:txBody>
+          <a:bodyPr wrap="none" rtlCol="0">
+            <a:spAutoFit/>
+          </a:bodyPr>
+          <a:lstStyle/>
+          <a:p>
+            <a:r>
+              <a:rPr lang="pt-BR" dirty="0"/>
+              <a:t>O lápis libera opções de cadastro e alteração</a:t>
+            </a:r>
+          </a:p>
+        </p:txBody>
+      </p:sp>
+      <p:sp>
+        <p:nvSpPr>
+          <p:cNvPr id="31" name="CaixaDeTexto 30">
+            <a:extLst>
+              <a:ext uri="{FF2B5EF4-FFF2-40B4-BE49-F238E27FC236}">
+                <a16:creationId xmlns:a16="http://schemas.microsoft.com/office/drawing/2014/main" id="{E1763596-E437-FC09-A2E8-F74D5C74ED32}"/>
+              </a:ext>
+            </a:extLst>
+          </p:cNvPr>
+          <p:cNvSpPr txBox="1"/>
+          <p:nvPr/>
+        </p:nvSpPr>
+        <p:spPr>
+          <a:xfrm>
+            <a:off x="5919828" y="4418416"/>
+            <a:ext cx="1699632" cy="369332"/>
+          </a:xfrm>
+          <a:prstGeom prst="rect">
+            <a:avLst/>
+          </a:prstGeom>
+          <a:noFill/>
+        </p:spPr>
+        <p:txBody>
+          <a:bodyPr wrap="none" rtlCol="0">
+            <a:spAutoFit/>
+          </a:bodyPr>
+          <a:lstStyle/>
+          <a:p>
+            <a:r>
+              <a:rPr lang="pt-BR" dirty="0"/>
+              <a:t>Tela de cadastro</a:t>
+            </a:r>
+          </a:p>
+        </p:txBody>
+      </p:sp>
+      <p:pic>
+        <p:nvPicPr>
+          <p:cNvPr id="33" name="Imagem 32" descr="Interface gráfica do usuário, Aplicativo&#10;&#10;O conteúdo gerado por IA pode estar incorreto.">
+            <a:extLst>
+              <a:ext uri="{FF2B5EF4-FFF2-40B4-BE49-F238E27FC236}">
+                <a16:creationId xmlns:a16="http://schemas.microsoft.com/office/drawing/2014/main" id="{C871BD2A-679D-01F4-5113-5637827B8F67}"/>
+              </a:ext>
+            </a:extLst>
+          </p:cNvPr>
+          <p:cNvPicPr>
+            <a:picLocks noChangeAspect="1"/>
+          </p:cNvPicPr>
+          <p:nvPr/>
+        </p:nvPicPr>
+        <p:blipFill>
+          <a:blip r:embed="rId11">
+            <a:extLst>
+              <a:ext uri="{28A0092B-C50C-407E-A947-70E740481C1C}">
+                <a14:useLocalDpi xmlns:a14="http://schemas.microsoft.com/office/drawing/2010/main" val="0"/>
+              </a:ext>
+            </a:extLst>
+          </a:blip>
+          <a:stretch>
+            <a:fillRect/>
+          </a:stretch>
+        </p:blipFill>
+        <p:spPr>
+          <a:xfrm>
+            <a:off x="7619460" y="780398"/>
+            <a:ext cx="2801449" cy="1323537"/>
+          </a:xfrm>
+          <a:prstGeom prst="rect">
+            <a:avLst/>
+          </a:prstGeom>
+        </p:spPr>
+      </p:pic>
+      <p:pic>
+        <p:nvPicPr>
+          <p:cNvPr id="36" name="Imagem 35">
+            <a:extLst>
+              <a:ext uri="{FF2B5EF4-FFF2-40B4-BE49-F238E27FC236}">
+                <a16:creationId xmlns:a16="http://schemas.microsoft.com/office/drawing/2014/main" id="{A2EE3B87-003C-31DA-8029-4668EFB4E9A2}"/>
+              </a:ext>
+            </a:extLst>
+          </p:cNvPr>
+          <p:cNvPicPr>
+            <a:picLocks noChangeAspect="1"/>
+          </p:cNvPicPr>
+          <p:nvPr/>
+        </p:nvPicPr>
+        <p:blipFill>
+          <a:blip r:embed="rId12">
+            <a:extLst>
+              <a:ext uri="{28A0092B-C50C-407E-A947-70E740481C1C}">
+                <a14:useLocalDpi xmlns:a14="http://schemas.microsoft.com/office/drawing/2010/main" val="0"/>
+              </a:ext>
+            </a:extLst>
+          </a:blip>
+          <a:stretch>
+            <a:fillRect/>
+          </a:stretch>
+        </p:blipFill>
+        <p:spPr>
+          <a:xfrm>
+            <a:off x="3386695" y="1056918"/>
+            <a:ext cx="2537151" cy="1198670"/>
+          </a:xfrm>
+          <a:prstGeom prst="rect">
+            <a:avLst/>
+          </a:prstGeom>
+        </p:spPr>
+      </p:pic>
+      <p:sp>
+        <p:nvSpPr>
+          <p:cNvPr id="37" name="Seta: para Baixo 36">
+            <a:extLst>
+              <a:ext uri="{FF2B5EF4-FFF2-40B4-BE49-F238E27FC236}">
+                <a16:creationId xmlns:a16="http://schemas.microsoft.com/office/drawing/2014/main" id="{B721C91C-2D51-CCB6-95D7-640D1AA19836}"/>
+              </a:ext>
+            </a:extLst>
+          </p:cNvPr>
+          <p:cNvSpPr/>
+          <p:nvPr/>
+        </p:nvSpPr>
+        <p:spPr>
+          <a:xfrm rot="5400000">
+            <a:off x="6064016" y="1190549"/>
+            <a:ext cx="720437" cy="479987"/>
+          </a:xfrm>
+          <a:prstGeom prst="downArrow">
+            <a:avLst/>
+          </a:prstGeom>
+        </p:spPr>
+        <p:style>
+          <a:lnRef idx="2">
+            <a:schemeClr val="accent1">
+              <a:shade val="15000"/>
+            </a:schemeClr>
+          </a:lnRef>
+          <a:fillRef idx="1">
+            <a:schemeClr val="accent1"/>
+          </a:fillRef>
+          <a:effectRef idx="0">
+            <a:schemeClr val="accent1"/>
+          </a:effectRef>
+          <a:fontRef idx="minor">
+            <a:schemeClr val="lt1"/>
+          </a:fontRef>
+        </p:style>
+        <p:txBody>
+          <a:bodyPr rtlCol="0" anchor="ctr"/>
+          <a:lstStyle/>
+          <a:p>
+            <a:pPr algn="ctr"/>
+            <a:endParaRPr lang="pt-BR"/>
+          </a:p>
+        </p:txBody>
+      </p:sp>
+      <p:sp>
+        <p:nvSpPr>
+          <p:cNvPr id="39" name="Seta: para Baixo 38">
+            <a:extLst>
+              <a:ext uri="{FF2B5EF4-FFF2-40B4-BE49-F238E27FC236}">
+                <a16:creationId xmlns:a16="http://schemas.microsoft.com/office/drawing/2014/main" id="{D2F5C4BF-A3A7-D032-D7B1-C38B2F21084B}"/>
+              </a:ext>
+            </a:extLst>
+          </p:cNvPr>
+          <p:cNvSpPr/>
+          <p:nvPr/>
+        </p:nvSpPr>
+        <p:spPr>
+          <a:xfrm rot="13856497">
+            <a:off x="9670132" y="4825198"/>
+            <a:ext cx="720437" cy="479987"/>
+          </a:xfrm>
+          <a:prstGeom prst="downArrow">
+            <a:avLst/>
+          </a:prstGeom>
+        </p:spPr>
+        <p:style>
+          <a:lnRef idx="2">
+            <a:schemeClr val="accent1">
+              <a:shade val="15000"/>
+            </a:schemeClr>
+          </a:lnRef>
+          <a:fillRef idx="1">
+            <a:schemeClr val="accent1"/>
+          </a:fillRef>
+          <a:effectRef idx="0">
+            <a:schemeClr val="accent1"/>
+          </a:effectRef>
+          <a:fontRef idx="minor">
+            <a:schemeClr val="lt1"/>
+          </a:fontRef>
+        </p:style>
+        <p:txBody>
+          <a:bodyPr rtlCol="0" anchor="ctr"/>
+          <a:lstStyle/>
+          <a:p>
+            <a:pPr algn="ctr"/>
+            <a:endParaRPr lang="pt-BR"/>
+          </a:p>
+        </p:txBody>
+      </p:sp>
+      <p:sp>
+        <p:nvSpPr>
+          <p:cNvPr id="40" name="Seta: para Baixo 39">
+            <a:extLst>
+              <a:ext uri="{FF2B5EF4-FFF2-40B4-BE49-F238E27FC236}">
+                <a16:creationId xmlns:a16="http://schemas.microsoft.com/office/drawing/2014/main" id="{AFFFB5C8-4A75-1BAD-37BF-C20C0E4031D1}"/>
+              </a:ext>
+            </a:extLst>
+          </p:cNvPr>
+          <p:cNvSpPr/>
+          <p:nvPr/>
+        </p:nvSpPr>
+        <p:spPr>
+          <a:xfrm rot="16200000">
+            <a:off x="6628491" y="3144574"/>
+            <a:ext cx="720437" cy="777692"/>
+          </a:xfrm>
+          <a:prstGeom prst="downArrow">
+            <a:avLst/>
+          </a:prstGeom>
+        </p:spPr>
+        <p:style>
+          <a:lnRef idx="2">
+            <a:schemeClr val="accent1">
+              <a:shade val="15000"/>
+            </a:schemeClr>
+          </a:lnRef>
+          <a:fillRef idx="1">
+            <a:schemeClr val="accent1"/>
+          </a:fillRef>
+          <a:effectRef idx="0">
+            <a:schemeClr val="accent1"/>
+          </a:effectRef>
+          <a:fontRef idx="minor">
+            <a:schemeClr val="lt1"/>
+          </a:fontRef>
+        </p:style>
+        <p:txBody>
+          <a:bodyPr rtlCol="0" anchor="ctr"/>
+          <a:lstStyle/>
+          <a:p>
+            <a:pPr algn="ctr"/>
+            <a:endParaRPr lang="pt-BR"/>
           </a:p>
         </p:txBody>
       </p:sp>
     </p:spTree>
     <p:extLst>
       <p:ext uri="{BB962C8B-B14F-4D97-AF65-F5344CB8AC3E}">
-        <p14:creationId xmlns:p14="http://schemas.microsoft.com/office/powerpoint/2010/main" val="1025352840"/>
+        <p14:creationId xmlns:p14="http://schemas.microsoft.com/office/powerpoint/2010/main" val="6276868"/>
       </p:ext>
     </p:extLst>
   </p:cSld>
@@ -9026,10 +9435,10 @@
       </p:pic>
       <p:sp>
         <p:nvSpPr>
-          <p:cNvPr id="2" name="CaixaDeTexto 1">
-            <a:extLst>
-              <a:ext uri="{FF2B5EF4-FFF2-40B4-BE49-F238E27FC236}">
-                <a16:creationId xmlns:a16="http://schemas.microsoft.com/office/drawing/2014/main" id="{C8510107-E3C6-DF5A-475A-F560311510F8}"/>
+          <p:cNvPr id="5" name="CaixaDeTexto 4">
+            <a:extLst>
+              <a:ext uri="{FF2B5EF4-FFF2-40B4-BE49-F238E27FC236}">
+                <a16:creationId xmlns:a16="http://schemas.microsoft.com/office/drawing/2014/main" id="{61FDC6AC-1BEC-5AB8-1A27-461C659F4272}"/>
               </a:ext>
             </a:extLst>
           </p:cNvPr>
@@ -9038,8 +9447,8 @@
         </p:nvSpPr>
         <p:spPr>
           <a:xfrm>
-            <a:off x="615428" y="3136612"/>
-            <a:ext cx="11121284" cy="584775"/>
+            <a:off x="478160" y="2914431"/>
+            <a:ext cx="11121284" cy="769441"/>
           </a:xfrm>
           <a:prstGeom prst="rect">
             <a:avLst/>
@@ -9054,27 +9463,31 @@
           <a:p>
             <a:pPr algn="ctr"/>
             <a:r>
-              <a:rPr lang="pt-BR" sz="3200" b="1" dirty="0">
-                <a:ln>
-                  <a:solidFill>
-                    <a:sysClr val="windowText" lastClr="000000"/>
-                  </a:solidFill>
-                </a:ln>
-                <a:solidFill>
-                  <a:srgbClr val="FF0000"/>
-                </a:solidFill>
+              <a:rPr lang="pt-BR" sz="4400" b="1" dirty="0">
                 <a:latin typeface="Verdana" panose="020B0604030504040204" pitchFamily="34" charset="0"/>
                 <a:ea typeface="Verdana" panose="020B0604030504040204" pitchFamily="34" charset="0"/>
               </a:rPr>
-              <a:t>CONCLUSAO</a:t>
-            </a:r>
+              <a:t>APRESENTAÇÃO DO SISTEMA</a:t>
+            </a:r>
+            <a:endParaRPr lang="pt-BR" sz="4400" b="1" dirty="0">
+              <a:ln>
+                <a:solidFill>
+                  <a:sysClr val="windowText" lastClr="000000"/>
+                </a:solidFill>
+              </a:ln>
+              <a:solidFill>
+                <a:srgbClr val="FF0000"/>
+              </a:solidFill>
+              <a:latin typeface="Verdana" panose="020B0604030504040204" pitchFamily="34" charset="0"/>
+              <a:ea typeface="Verdana" panose="020B0604030504040204" pitchFamily="34" charset="0"/>
+            </a:endParaRPr>
           </a:p>
         </p:txBody>
       </p:sp>
     </p:spTree>
     <p:extLst>
       <p:ext uri="{BB962C8B-B14F-4D97-AF65-F5344CB8AC3E}">
-        <p14:creationId xmlns:p14="http://schemas.microsoft.com/office/powerpoint/2010/main" val="436553731"/>
+        <p14:creationId xmlns:p14="http://schemas.microsoft.com/office/powerpoint/2010/main" val="1025352840"/>
       </p:ext>
     </p:extLst>
   </p:cSld>
@@ -9387,10 +9800,10 @@
       </p:pic>
       <p:sp>
         <p:nvSpPr>
-          <p:cNvPr id="5" name="CaixaDeTexto 4">
-            <a:extLst>
-              <a:ext uri="{FF2B5EF4-FFF2-40B4-BE49-F238E27FC236}">
-                <a16:creationId xmlns:a16="http://schemas.microsoft.com/office/drawing/2014/main" id="{450B366E-ADF9-41FB-D956-C09E85EEAAD6}"/>
+          <p:cNvPr id="2" name="CaixaDeTexto 1">
+            <a:extLst>
+              <a:ext uri="{FF2B5EF4-FFF2-40B4-BE49-F238E27FC236}">
+                <a16:creationId xmlns:a16="http://schemas.microsoft.com/office/drawing/2014/main" id="{C8510107-E3C6-DF5A-475A-F560311510F8}"/>
               </a:ext>
             </a:extLst>
           </p:cNvPr>
@@ -9399,8 +9812,8 @@
         </p:nvSpPr>
         <p:spPr>
           <a:xfrm>
-            <a:off x="615428" y="1877856"/>
-            <a:ext cx="11121284" cy="3539430"/>
+            <a:off x="169412" y="64268"/>
+            <a:ext cx="11121284" cy="584775"/>
           </a:xfrm>
           <a:prstGeom prst="rect">
             <a:avLst/>
@@ -9427,87 +9840,70 @@
                 <a:latin typeface="Verdana" panose="020B0604030504040204" pitchFamily="34" charset="0"/>
                 <a:ea typeface="Verdana" panose="020B0604030504040204" pitchFamily="34" charset="0"/>
               </a:rPr>
-              <a:t>AGRADECIMENTOS</a:t>
-            </a:r>
-          </a:p>
-          <a:p>
-            <a:pPr algn="ctr"/>
+              <a:t>CONCLUSÃO</a:t>
+            </a:r>
+          </a:p>
+        </p:txBody>
+      </p:sp>
+      <p:sp>
+        <p:nvSpPr>
+          <p:cNvPr id="5" name="CaixaDeTexto 4">
+            <a:extLst>
+              <a:ext uri="{FF2B5EF4-FFF2-40B4-BE49-F238E27FC236}">
+                <a16:creationId xmlns:a16="http://schemas.microsoft.com/office/drawing/2014/main" id="{7358DC08-0E76-CB05-E2B9-AE1360A60C07}"/>
+              </a:ext>
+            </a:extLst>
+          </p:cNvPr>
+          <p:cNvSpPr txBox="1"/>
+          <p:nvPr/>
+        </p:nvSpPr>
+        <p:spPr>
+          <a:xfrm>
+            <a:off x="784360" y="503126"/>
+            <a:ext cx="10623279" cy="6001643"/>
+          </a:xfrm>
+          <a:prstGeom prst="rect">
+            <a:avLst/>
+          </a:prstGeom>
+          <a:noFill/>
+        </p:spPr>
+        <p:txBody>
+          <a:bodyPr wrap="square" rtlCol="0">
+            <a:spAutoFit/>
+          </a:bodyPr>
+          <a:lstStyle/>
+          <a:p>
+            <a:r>
+              <a:rPr lang="pt-BR" sz="3200" b="0" i="0" u="none" strike="noStrike" dirty="0">
+                <a:solidFill>
+                  <a:srgbClr val="000000"/>
+                </a:solidFill>
+                <a:effectLst/>
+                <a:latin typeface="Verdana" panose="020B0604030504040204" pitchFamily="34" charset="0"/>
+              </a:rPr>
+              <a:t>O sistema desenvolvido para a Padaria do Alemão mostrou-se fundamental para superar os desafios enfrentados com o crescimento do negócio. A solução trouxe modernização e eficiência, substituindo os registros manuais por um controle integrado e confiável. Com funcionalidades que abrangem desde a gestão de comandas e pagamentos até o controle de estoque e geração de relatórios, o sistema contribui para a organização, redução de erros e melhor tomada de decisões, apoiando a continuidade e expansão da padaria.</a:t>
+            </a:r>
+            <a:r>
+              <a:rPr lang="pt-BR" sz="3200" b="0" i="0" dirty="0">
+                <a:solidFill>
+                  <a:srgbClr val="000000"/>
+                </a:solidFill>
+                <a:effectLst/>
+                <a:latin typeface="Verdana" panose="020B0604030504040204" pitchFamily="34" charset="0"/>
+              </a:rPr>
+              <a:t>​</a:t>
+            </a:r>
             <a:endParaRPr lang="pt-BR" sz="3200" dirty="0">
               <a:latin typeface="Verdana" panose="020B0604030504040204" pitchFamily="34" charset="0"/>
               <a:ea typeface="Verdana" panose="020B0604030504040204" pitchFamily="34" charset="0"/>
             </a:endParaRPr>
           </a:p>
-          <a:p>
-            <a:pPr marL="457200" indent="-457200">
-              <a:buFont typeface="Wingdings" panose="05000000000000000000" pitchFamily="2" charset="2"/>
-              <a:buChar char="Ø"/>
-            </a:pPr>
-            <a:r>
-              <a:rPr lang="pt-BR" sz="3200" dirty="0">
-                <a:latin typeface="Verdana" panose="020B0604030504040204" pitchFamily="34" charset="0"/>
-                <a:ea typeface="Verdana" panose="020B0604030504040204" pitchFamily="34" charset="0"/>
-              </a:rPr>
-              <a:t>Jesus Cristo</a:t>
-            </a:r>
-          </a:p>
-          <a:p>
-            <a:pPr marL="457200" indent="-457200">
-              <a:buFont typeface="Wingdings" panose="05000000000000000000" pitchFamily="2" charset="2"/>
-              <a:buChar char="Ø"/>
-            </a:pPr>
-            <a:r>
-              <a:rPr lang="pt-BR" sz="3200" dirty="0">
-                <a:latin typeface="Verdana" panose="020B0604030504040204" pitchFamily="34" charset="0"/>
-                <a:ea typeface="Verdana" panose="020B0604030504040204" pitchFamily="34" charset="0"/>
-              </a:rPr>
-              <a:t>Kerry King</a:t>
-            </a:r>
-          </a:p>
-          <a:p>
-            <a:pPr marL="457200" indent="-457200">
-              <a:buFont typeface="Wingdings" panose="05000000000000000000" pitchFamily="2" charset="2"/>
-              <a:buChar char="Ø"/>
-            </a:pPr>
-            <a:r>
-              <a:rPr lang="pt-BR" sz="3200" dirty="0">
-                <a:latin typeface="Verdana" panose="020B0604030504040204" pitchFamily="34" charset="0"/>
-                <a:ea typeface="Verdana" panose="020B0604030504040204" pitchFamily="34" charset="0"/>
-              </a:rPr>
-              <a:t>Marcio Senhorinha</a:t>
-            </a:r>
-          </a:p>
-          <a:p>
-            <a:pPr marL="457200" indent="-457200">
-              <a:buFont typeface="Wingdings" panose="05000000000000000000" pitchFamily="2" charset="2"/>
-              <a:buChar char="Ø"/>
-            </a:pPr>
-            <a:r>
-              <a:rPr lang="pt-BR" sz="3200" dirty="0">
-                <a:latin typeface="Verdana" panose="020B0604030504040204" pitchFamily="34" charset="0"/>
-                <a:ea typeface="Verdana" panose="020B0604030504040204" pitchFamily="34" charset="0"/>
-              </a:rPr>
-              <a:t>Sérgio Luiz da Silveira</a:t>
-            </a:r>
-          </a:p>
-          <a:p>
-            <a:pPr marL="457200" indent="-457200">
-              <a:buFont typeface="Wingdings" panose="05000000000000000000" pitchFamily="2" charset="2"/>
-              <a:buChar char="Ø"/>
-            </a:pPr>
-            <a:r>
-              <a:rPr lang="pt-BR" sz="3200" dirty="0">
-                <a:latin typeface="Verdana" panose="020B0604030504040204" pitchFamily="34" charset="0"/>
-                <a:ea typeface="Verdana" panose="020B0604030504040204" pitchFamily="34" charset="0"/>
-              </a:rPr>
-              <a:t>Allan Perini</a:t>
-            </a:r>
-          </a:p>
         </p:txBody>
       </p:sp>
     </p:spTree>
     <p:extLst>
       <p:ext uri="{BB962C8B-B14F-4D97-AF65-F5344CB8AC3E}">
-        <p14:creationId xmlns:p14="http://schemas.microsoft.com/office/powerpoint/2010/main" val="855279719"/>
+        <p14:creationId xmlns:p14="http://schemas.microsoft.com/office/powerpoint/2010/main" val="436553731"/>
       </p:ext>
     </p:extLst>
   </p:cSld>
